--- a/slides/output/Career_Canvas_Meeting_3_Business_Research_Lab.pptx
+++ b/slides/output/Career_Canvas_Meeting_3_Business_Research_Lab.pptx
@@ -2,23 +2,23 @@
 <file path=ppt/presentation.xml><?xml version="1.0" encoding="utf-8"?>
 <p:presentation xmlns:p="http://schemas.openxmlformats.org/presentationml/2006/main">
   <p:sldMasterIdLst>
-    <p:sldMasterId xmlns:r="http://schemas.openxmlformats.org/officeDocument/2006/relationships" id="2147483648" r:id="R7c84a148a46e4eda"/>
+    <p:sldMasterId xmlns:r="http://schemas.openxmlformats.org/officeDocument/2006/relationships" id="2147483648" r:id="R7b128c5a8ef641b5"/>
   </p:sldMasterIdLst>
   <p:notesMasterIdLst>
-    <p:notesMasterId xmlns:r="http://schemas.openxmlformats.org/officeDocument/2006/relationships" r:id="R727f8bc880684b6e"/>
+    <p:notesMasterId xmlns:r="http://schemas.openxmlformats.org/officeDocument/2006/relationships" r:id="R31b07e40dc3f43f2"/>
   </p:notesMasterIdLst>
   <p:sldIdLst>
-    <p:sldId xmlns:r="http://schemas.openxmlformats.org/officeDocument/2006/relationships" id="256" r:id="Rb76e73c108764520"/>
-    <p:sldId xmlns:r="http://schemas.openxmlformats.org/officeDocument/2006/relationships" id="257" r:id="Rc7e47be945af4065"/>
-    <p:sldId xmlns:r="http://schemas.openxmlformats.org/officeDocument/2006/relationships" id="258" r:id="Rcdea4f221b9d45b9"/>
-    <p:sldId xmlns:r="http://schemas.openxmlformats.org/officeDocument/2006/relationships" id="259" r:id="R59a8299eded74eed"/>
-    <p:sldId xmlns:r="http://schemas.openxmlformats.org/officeDocument/2006/relationships" id="260" r:id="R22d0e9bc0f9d4807"/>
-    <p:sldId xmlns:r="http://schemas.openxmlformats.org/officeDocument/2006/relationships" id="261" r:id="Rbfc18fde58ac40a6"/>
-    <p:sldId xmlns:r="http://schemas.openxmlformats.org/officeDocument/2006/relationships" id="262" r:id="Rf673728a2b3a4b4b"/>
-    <p:sldId xmlns:r="http://schemas.openxmlformats.org/officeDocument/2006/relationships" id="263" r:id="R1fbfe4e244874e58"/>
-    <p:sldId xmlns:r="http://schemas.openxmlformats.org/officeDocument/2006/relationships" id="264" r:id="R27f0c5b9f522477f"/>
-    <p:sldId xmlns:r="http://schemas.openxmlformats.org/officeDocument/2006/relationships" id="265" r:id="R0f24c841f84b412d"/>
-    <p:sldId xmlns:r="http://schemas.openxmlformats.org/officeDocument/2006/relationships" id="266" r:id="R06bbbfa5f2b44e91"/>
+    <p:sldId xmlns:r="http://schemas.openxmlformats.org/officeDocument/2006/relationships" id="256" r:id="Rb90b30f2f0c946a4"/>
+    <p:sldId xmlns:r="http://schemas.openxmlformats.org/officeDocument/2006/relationships" id="257" r:id="Red1e2a6408eb498d"/>
+    <p:sldId xmlns:r="http://schemas.openxmlformats.org/officeDocument/2006/relationships" id="258" r:id="Ra3a8ff9b19af4db8"/>
+    <p:sldId xmlns:r="http://schemas.openxmlformats.org/officeDocument/2006/relationships" id="259" r:id="Rc0c6ae4f99d24d3c"/>
+    <p:sldId xmlns:r="http://schemas.openxmlformats.org/officeDocument/2006/relationships" id="260" r:id="Rce36d9e1e57443d6"/>
+    <p:sldId xmlns:r="http://schemas.openxmlformats.org/officeDocument/2006/relationships" id="261" r:id="Rc3e6227df3154ee4"/>
+    <p:sldId xmlns:r="http://schemas.openxmlformats.org/officeDocument/2006/relationships" id="262" r:id="R4409200b9e5944a7"/>
+    <p:sldId xmlns:r="http://schemas.openxmlformats.org/officeDocument/2006/relationships" id="263" r:id="Rd3589cf003b74cb4"/>
+    <p:sldId xmlns:r="http://schemas.openxmlformats.org/officeDocument/2006/relationships" id="264" r:id="R78a208fe4a104851"/>
+    <p:sldId xmlns:r="http://schemas.openxmlformats.org/officeDocument/2006/relationships" id="265" r:id="R90ffa63e7b94481f"/>
+    <p:sldId xmlns:r="http://schemas.openxmlformats.org/officeDocument/2006/relationships" id="266" r:id="Ree8747a9bb774a11"/>
   </p:sldIdLst>
   <p:sldSz cx="12192000" cy="6858000"/>
   <p:notesSz cx="6858000" cy="9144000"/>
@@ -1370,7 +1370,7 @@
   </p:cSld>
   <p:clrMap bg1="lt1" tx1="dk1" bg2="lt2" tx2="dk2" accent1="accent1" accent2="accent2" accent3="accent3" accent4="accent4" accent5="accent5" accent6="accent6" hlink="hlink" folHlink="folHlink"/>
   <p:sldLayoutIdLst>
-    <p:sldLayoutId xmlns:r="http://schemas.openxmlformats.org/officeDocument/2006/relationships" id="2147483649" r:id="Rb727446cc77d4769"/>
+    <p:sldLayoutId xmlns:r="http://schemas.openxmlformats.org/officeDocument/2006/relationships" id="2147483649" r:id="R04aa9c1172654a70"/>
   </p:sldLayoutIdLst>
   <p:txStyles>
     <p:titleStyle>
@@ -1918,10 +1918,10 @@
       </p:grpSpPr>
       <p:sp>
         <p:nvSpPr>
-          <p:cNvPr id="11" name="">
-            <a:extLst xmlns:a="http://schemas.openxmlformats.org/drawingml/2006/main">
-              <a:ext uri="{FF2B5EF4-FFF2-40B4-BE49-F238E27FC236}">
-                <a16:creationId xmlns:a16="http://schemas.microsoft.com/office/drawing/2014/main" id="{0C0AA180-C986-4EE1-8EC0-EBCD68379E99}"/>
+          <p:cNvPr id="12" name="">
+            <a:extLst xmlns:a="http://schemas.openxmlformats.org/drawingml/2006/main">
+              <a:ext uri="{FF2B5EF4-FFF2-40B4-BE49-F238E27FC236}">
+                <a16:creationId xmlns:a16="http://schemas.microsoft.com/office/drawing/2014/main" id="{FC4854C2-8E95-4BA2-A414-34EB4913BACF}"/>
               </a:ext>
             </a:extLst>
           </p:cNvPr>
@@ -1939,7 +1939,7 @@
             <a:avLst/>
           </a:prstGeom>
           <a:solidFill xmlns:a="http://schemas.openxmlformats.org/drawingml/2006/main">
-            <a:srgbClr val="EEF7FF"/>
+            <a:srgbClr val="0F1A2B"/>
           </a:solidFill>
           <a:ln xmlns:a="http://schemas.openxmlformats.org/drawingml/2006/main" w="0">
             <a:noFill/>
@@ -1951,27 +1951,27 @@
           <p:cNvPr id="2" name="">
             <a:extLst xmlns:a="http://schemas.openxmlformats.org/drawingml/2006/main">
               <a:ext uri="{FF2B5EF4-FFF2-40B4-BE49-F238E27FC236}">
-                <a16:creationId xmlns:a16="http://schemas.microsoft.com/office/drawing/2014/main" id="{E508D2BA-CE2F-40FC-A22D-E1556FB894B4}"/>
-              </a:ext>
-            </a:extLst>
-          </p:cNvPr>
-          <p:cNvSpPr>
-            <a:spLocks xmlns:a="http://schemas.openxmlformats.org/drawingml/2006/main" noGrp="1"/>
-          </p:cNvSpPr>
-          <p:nvPr/>
-        </p:nvSpPr>
-        <p:spPr>
-          <a:xfrm xmlns:a="http://schemas.openxmlformats.org/drawingml/2006/main">
-            <a:off x="7239000" y="1143000"/>
-            <a:ext cx="4381500" cy="4572000"/>
+                <a16:creationId xmlns:a16="http://schemas.microsoft.com/office/drawing/2014/main" id="{AD2FEAC7-69F2-4319-93CD-9577EEEC58A5}"/>
+              </a:ext>
+            </a:extLst>
+          </p:cNvPr>
+          <p:cNvSpPr>
+            <a:spLocks xmlns:a="http://schemas.openxmlformats.org/drawingml/2006/main" noGrp="1"/>
+          </p:cNvSpPr>
+          <p:nvPr/>
+        </p:nvSpPr>
+        <p:spPr>
+          <a:xfrm xmlns:a="http://schemas.openxmlformats.org/drawingml/2006/main">
+            <a:off x="7239000" y="1333500"/>
+            <a:ext cx="4381500" cy="4191000"/>
           </a:xfrm>
           <a:prstGeom xmlns:a="http://schemas.openxmlformats.org/drawingml/2006/main" prst="roundRect">
             <a:avLst>
-              <a:gd name="adj" fmla="val 1739"/>
+              <a:gd name="adj" fmla="val 1818"/>
             </a:avLst>
           </a:prstGeom>
           <a:solidFill xmlns:a="http://schemas.openxmlformats.org/drawingml/2006/main">
-            <a:srgbClr val="092454"/>
+            <a:srgbClr val="1C2E4A"/>
           </a:solidFill>
           <a:ln xmlns:a="http://schemas.openxmlformats.org/drawingml/2006/main" w="0">
             <a:noFill/>
@@ -1983,18 +1983,18 @@
           <p:cNvPr id="3" name="">
             <a:extLst xmlns:a="http://schemas.openxmlformats.org/drawingml/2006/main">
               <a:ext uri="{FF2B5EF4-FFF2-40B4-BE49-F238E27FC236}">
-                <a16:creationId xmlns:a16="http://schemas.microsoft.com/office/drawing/2014/main" id="{B0B0A05A-F841-461A-B645-50BB5C569FAB}"/>
-              </a:ext>
-            </a:extLst>
-          </p:cNvPr>
-          <p:cNvSpPr>
-            <a:spLocks xmlns:a="http://schemas.openxmlformats.org/drawingml/2006/main" noGrp="1"/>
-          </p:cNvSpPr>
-          <p:nvPr/>
-        </p:nvSpPr>
-        <p:spPr>
-          <a:xfrm xmlns:a="http://schemas.openxmlformats.org/drawingml/2006/main">
-            <a:off x="7620000" y="1600200"/>
+                <a16:creationId xmlns:a16="http://schemas.microsoft.com/office/drawing/2014/main" id="{3216E364-71B0-466F-B5F6-6F0D557EF867}"/>
+              </a:ext>
+            </a:extLst>
+          </p:cNvPr>
+          <p:cNvSpPr>
+            <a:spLocks xmlns:a="http://schemas.openxmlformats.org/drawingml/2006/main" noGrp="1"/>
+          </p:cNvSpPr>
+          <p:nvPr/>
+        </p:nvSpPr>
+        <p:spPr>
+          <a:xfrm xmlns:a="http://schemas.openxmlformats.org/drawingml/2006/main">
+            <a:off x="7620000" y="1771650"/>
             <a:ext cx="3619500" cy="266700"/>
           </a:xfrm>
           <a:prstGeom xmlns:a="http://schemas.openxmlformats.org/drawingml/2006/main" prst="rect">
@@ -2012,19 +2012,19 @@
           <a:lstStyle xmlns:a="http://schemas.openxmlformats.org/drawingml/2006/main"/>
           <a:p xmlns:a="http://schemas.openxmlformats.org/drawingml/2006/main">
             <a:pPr algn="l">
-              <a:defRPr sz="1125" b="1">
-                <a:solidFill>
-                  <a:srgbClr val="FFD43B"/>
-                </a:solidFill>
-                <a:latin typeface="Helvetica Neue"/>
-                <a:ea typeface="Helvetica Neue"/>
-                <a:cs typeface="Helvetica Neue"/>
-              </a:defRPr>
-            </a:pPr>
-            <a:r>
-              <a:rPr sz="1125" b="1">
-                <a:solidFill>
-                  <a:srgbClr val="FFD43B"/>
+              <a:defRPr sz="1050" b="1">
+                <a:solidFill>
+                  <a:srgbClr val="D1CFC9"/>
+                </a:solidFill>
+                <a:latin typeface="Helvetica Neue"/>
+                <a:ea typeface="Helvetica Neue"/>
+                <a:cs typeface="Helvetica Neue"/>
+              </a:defRPr>
+            </a:pPr>
+            <a:r>
+              <a:rPr sz="1050" b="1">
+                <a:solidFill>
+                  <a:srgbClr val="D1CFC9"/>
                 </a:solidFill>
                 <a:latin typeface="Helvetica Neue"/>
                 <a:ea typeface="Helvetica Neue"/>
@@ -2040,156 +2040,19 @@
           <p:cNvPr id="4" name="">
             <a:extLst xmlns:a="http://schemas.openxmlformats.org/drawingml/2006/main">
               <a:ext uri="{FF2B5EF4-FFF2-40B4-BE49-F238E27FC236}">
-                <a16:creationId xmlns:a16="http://schemas.microsoft.com/office/drawing/2014/main" id="{D9C93E81-C2E7-4172-976D-1315A1CFD26B}"/>
-              </a:ext>
-            </a:extLst>
-          </p:cNvPr>
-          <p:cNvSpPr>
-            <a:spLocks xmlns:a="http://schemas.openxmlformats.org/drawingml/2006/main" noGrp="1"/>
-          </p:cNvSpPr>
-          <p:nvPr/>
-        </p:nvSpPr>
-        <p:spPr>
-          <a:xfrm xmlns:a="http://schemas.openxmlformats.org/drawingml/2006/main">
-            <a:off x="7620000" y="2114550"/>
-            <a:ext cx="3657600" cy="2857500"/>
-          </a:xfrm>
-          <a:prstGeom xmlns:a="http://schemas.openxmlformats.org/drawingml/2006/main" prst="rect">
-            <a:avLst/>
-          </a:prstGeom>
-          <a:noFill xmlns:a="http://schemas.openxmlformats.org/drawingml/2006/main"/>
-          <a:ln xmlns:a="http://schemas.openxmlformats.org/drawingml/2006/main" w="0">
-            <a:noFill/>
-          </a:ln>
-        </p:spPr>
-        <p:txBody>
-          <a:bodyPr xmlns:a="http://schemas.openxmlformats.org/drawingml/2006/main" anchor="t">
-            <a:noAutofit/>
-          </a:bodyPr>
-          <a:lstStyle xmlns:a="http://schemas.openxmlformats.org/drawingml/2006/main"/>
-          <a:p xmlns:a="http://schemas.openxmlformats.org/drawingml/2006/main">
-            <a:pPr algn="l">
-              <a:defRPr sz="3000" b="1">
-                <a:solidFill>
-                  <a:srgbClr val="FFFFFF"/>
-                </a:solidFill>
-                <a:latin typeface="Helvetica Neue"/>
-                <a:ea typeface="Helvetica Neue"/>
-                <a:cs typeface="Helvetica Neue"/>
-              </a:defRPr>
-            </a:pPr>
-            <a:r>
-              <a:rPr sz="3000" b="1">
-                <a:solidFill>
-                  <a:srgbClr val="FFFFFF"/>
-                </a:solidFill>
-                <a:latin typeface="Helvetica Neue"/>
-                <a:ea typeface="Helvetica Neue"/>
-                <a:cs typeface="Helvetica Neue"/>
-              </a:rPr>
-              <a:t>Business</a:t>
-            </a:r>
-          </a:p>
-          <a:p xmlns:a="http://schemas.openxmlformats.org/drawingml/2006/main">
-            <a:pPr algn="l">
-              <a:defRPr sz="3000" b="1">
-                <a:solidFill>
-                  <a:srgbClr val="FFFFFF"/>
-                </a:solidFill>
-                <a:latin typeface="Helvetica Neue"/>
-                <a:ea typeface="Helvetica Neue"/>
-                <a:cs typeface="Helvetica Neue"/>
-              </a:defRPr>
-            </a:pPr>
-            <a:r>
-              <a:rPr sz="3000" b="1">
-                <a:solidFill>
-                  <a:srgbClr val="FFFFFF"/>
-                </a:solidFill>
-                <a:latin typeface="Helvetica Neue"/>
-                <a:ea typeface="Helvetica Neue"/>
-                <a:cs typeface="Helvetica Neue"/>
-              </a:rPr>
-              <a:t>research lab</a:t>
-            </a:r>
-          </a:p>
-        </p:txBody>
-      </p:sp>
-      <p:sp>
-        <p:nvSpPr>
-          <p:cNvPr id="5" name="">
-            <a:extLst xmlns:a="http://schemas.openxmlformats.org/drawingml/2006/main">
-              <a:ext uri="{FF2B5EF4-FFF2-40B4-BE49-F238E27FC236}">
-                <a16:creationId xmlns:a16="http://schemas.microsoft.com/office/drawing/2014/main" id="{E5055B42-C59A-439F-BA44-F7C5346ABB91}"/>
-              </a:ext>
-            </a:extLst>
-          </p:cNvPr>
-          <p:cNvSpPr>
-            <a:spLocks xmlns:a="http://schemas.openxmlformats.org/drawingml/2006/main" noGrp="1"/>
-          </p:cNvSpPr>
-          <p:nvPr/>
-        </p:nvSpPr>
-        <p:spPr>
-          <a:xfrm xmlns:a="http://schemas.openxmlformats.org/drawingml/2006/main">
-            <a:off x="685800" y="552450"/>
-            <a:ext cx="2857500" cy="247650"/>
-          </a:xfrm>
-          <a:prstGeom xmlns:a="http://schemas.openxmlformats.org/drawingml/2006/main" prst="rect">
-            <a:avLst/>
-          </a:prstGeom>
-          <a:noFill xmlns:a="http://schemas.openxmlformats.org/drawingml/2006/main"/>
-          <a:ln xmlns:a="http://schemas.openxmlformats.org/drawingml/2006/main" w="0">
-            <a:noFill/>
-          </a:ln>
-        </p:spPr>
-        <p:txBody>
-          <a:bodyPr xmlns:a="http://schemas.openxmlformats.org/drawingml/2006/main" anchor="t">
-            <a:noAutofit/>
-          </a:bodyPr>
-          <a:lstStyle xmlns:a="http://schemas.openxmlformats.org/drawingml/2006/main"/>
-          <a:p xmlns:a="http://schemas.openxmlformats.org/drawingml/2006/main">
-            <a:pPr algn="l">
-              <a:defRPr sz="1200" b="1">
-                <a:solidFill>
-                  <a:srgbClr val="2563EB"/>
-                </a:solidFill>
-                <a:latin typeface="Helvetica Neue"/>
-                <a:ea typeface="Helvetica Neue"/>
-                <a:cs typeface="Helvetica Neue"/>
-              </a:defRPr>
-            </a:pPr>
-            <a:r>
-              <a:rPr sz="1200" b="1">
-                <a:solidFill>
-                  <a:srgbClr val="2563EB"/>
-                </a:solidFill>
-                <a:latin typeface="Helvetica Neue"/>
-                <a:ea typeface="Helvetica Neue"/>
-                <a:cs typeface="Helvetica Neue"/>
-              </a:rPr>
-              <a:t>CAREER CANVAS</a:t>
-            </a:r>
-          </a:p>
-        </p:txBody>
-      </p:sp>
-      <p:sp>
-        <p:nvSpPr>
-          <p:cNvPr id="6" name="">
-            <a:extLst xmlns:a="http://schemas.openxmlformats.org/drawingml/2006/main">
-              <a:ext uri="{FF2B5EF4-FFF2-40B4-BE49-F238E27FC236}">
-                <a16:creationId xmlns:a16="http://schemas.microsoft.com/office/drawing/2014/main" id="{D0075E08-06DC-4B94-931B-8F58997A146B}"/>
-              </a:ext>
-            </a:extLst>
-          </p:cNvPr>
-          <p:cNvSpPr>
-            <a:spLocks xmlns:a="http://schemas.openxmlformats.org/drawingml/2006/main" noGrp="1"/>
-          </p:cNvSpPr>
-          <p:nvPr/>
-        </p:nvSpPr>
-        <p:spPr>
-          <a:xfrm xmlns:a="http://schemas.openxmlformats.org/drawingml/2006/main">
-            <a:off x="685800" y="914400"/>
-            <a:ext cx="685800" cy="76200"/>
+                <a16:creationId xmlns:a16="http://schemas.microsoft.com/office/drawing/2014/main" id="{064DE340-BB50-4F0C-84ED-25DA7C09F9C6}"/>
+              </a:ext>
+            </a:extLst>
+          </p:cNvPr>
+          <p:cNvSpPr>
+            <a:spLocks xmlns:a="http://schemas.openxmlformats.org/drawingml/2006/main" noGrp="1"/>
+          </p:cNvSpPr>
+          <p:nvPr/>
+        </p:nvSpPr>
+        <p:spPr>
+          <a:xfrm xmlns:a="http://schemas.openxmlformats.org/drawingml/2006/main">
+            <a:off x="7620000" y="2152650"/>
+            <a:ext cx="571500" cy="57150"/>
           </a:xfrm>
           <a:prstGeom xmlns:a="http://schemas.openxmlformats.org/drawingml/2006/main" prst="roundRect">
             <a:avLst>
@@ -2197,7 +2060,7 @@
             </a:avLst>
           </a:prstGeom>
           <a:solidFill xmlns:a="http://schemas.openxmlformats.org/drawingml/2006/main">
-            <a:srgbClr val="FFD43B"/>
+            <a:srgbClr val="D1CFC9"/>
           </a:solidFill>
           <a:ln xmlns:a="http://schemas.openxmlformats.org/drawingml/2006/main" w="0">
             <a:noFill/>
@@ -2206,10 +2069,179 @@
       </p:sp>
       <p:sp>
         <p:nvSpPr>
+          <p:cNvPr id="5" name="">
+            <a:extLst xmlns:a="http://schemas.openxmlformats.org/drawingml/2006/main">
+              <a:ext uri="{FF2B5EF4-FFF2-40B4-BE49-F238E27FC236}">
+                <a16:creationId xmlns:a16="http://schemas.microsoft.com/office/drawing/2014/main" id="{82E82AC4-5A35-4515-8B9D-5DA94F228391}"/>
+              </a:ext>
+            </a:extLst>
+          </p:cNvPr>
+          <p:cNvSpPr>
+            <a:spLocks xmlns:a="http://schemas.openxmlformats.org/drawingml/2006/main" noGrp="1"/>
+          </p:cNvSpPr>
+          <p:nvPr/>
+        </p:nvSpPr>
+        <p:spPr>
+          <a:xfrm xmlns:a="http://schemas.openxmlformats.org/drawingml/2006/main">
+            <a:off x="7620000" y="2495550"/>
+            <a:ext cx="3657600" cy="2667000"/>
+          </a:xfrm>
+          <a:prstGeom xmlns:a="http://schemas.openxmlformats.org/drawingml/2006/main" prst="rect">
+            <a:avLst/>
+          </a:prstGeom>
+          <a:noFill xmlns:a="http://schemas.openxmlformats.org/drawingml/2006/main"/>
+          <a:ln xmlns:a="http://schemas.openxmlformats.org/drawingml/2006/main" w="0">
+            <a:noFill/>
+          </a:ln>
+        </p:spPr>
+        <p:txBody>
+          <a:bodyPr xmlns:a="http://schemas.openxmlformats.org/drawingml/2006/main" anchor="t">
+            <a:noAutofit/>
+          </a:bodyPr>
+          <a:lstStyle xmlns:a="http://schemas.openxmlformats.org/drawingml/2006/main"/>
+          <a:p xmlns:a="http://schemas.openxmlformats.org/drawingml/2006/main">
+            <a:pPr algn="l">
+              <a:defRPr sz="2850" b="1">
+                <a:solidFill>
+                  <a:srgbClr val="FFFFFF"/>
+                </a:solidFill>
+                <a:latin typeface="Helvetica Neue"/>
+                <a:ea typeface="Helvetica Neue"/>
+                <a:cs typeface="Helvetica Neue"/>
+              </a:defRPr>
+            </a:pPr>
+            <a:r>
+              <a:rPr sz="2850" b="1">
+                <a:solidFill>
+                  <a:srgbClr val="FFFFFF"/>
+                </a:solidFill>
+                <a:latin typeface="Helvetica Neue"/>
+                <a:ea typeface="Helvetica Neue"/>
+                <a:cs typeface="Helvetica Neue"/>
+              </a:rPr>
+              <a:t>Business</a:t>
+            </a:r>
+          </a:p>
+          <a:p xmlns:a="http://schemas.openxmlformats.org/drawingml/2006/main">
+            <a:pPr algn="l">
+              <a:defRPr sz="2850" b="1">
+                <a:solidFill>
+                  <a:srgbClr val="FFFFFF"/>
+                </a:solidFill>
+                <a:latin typeface="Helvetica Neue"/>
+                <a:ea typeface="Helvetica Neue"/>
+                <a:cs typeface="Helvetica Neue"/>
+              </a:defRPr>
+            </a:pPr>
+            <a:r>
+              <a:rPr sz="2850" b="1">
+                <a:solidFill>
+                  <a:srgbClr val="FFFFFF"/>
+                </a:solidFill>
+                <a:latin typeface="Helvetica Neue"/>
+                <a:ea typeface="Helvetica Neue"/>
+                <a:cs typeface="Helvetica Neue"/>
+              </a:rPr>
+              <a:t>research lab</a:t>
+            </a:r>
+          </a:p>
+        </p:txBody>
+      </p:sp>
+      <p:sp>
+        <p:nvSpPr>
+          <p:cNvPr id="6" name="">
+            <a:extLst xmlns:a="http://schemas.openxmlformats.org/drawingml/2006/main">
+              <a:ext uri="{FF2B5EF4-FFF2-40B4-BE49-F238E27FC236}">
+                <a16:creationId xmlns:a16="http://schemas.microsoft.com/office/drawing/2014/main" id="{352E5C3A-8287-4C1A-9FE1-8269D56C61A4}"/>
+              </a:ext>
+            </a:extLst>
+          </p:cNvPr>
+          <p:cNvSpPr>
+            <a:spLocks xmlns:a="http://schemas.openxmlformats.org/drawingml/2006/main" noGrp="1"/>
+          </p:cNvSpPr>
+          <p:nvPr/>
+        </p:nvSpPr>
+        <p:spPr>
+          <a:xfrm xmlns:a="http://schemas.openxmlformats.org/drawingml/2006/main">
+            <a:off x="685800" y="552450"/>
+            <a:ext cx="2857500" cy="247650"/>
+          </a:xfrm>
+          <a:prstGeom xmlns:a="http://schemas.openxmlformats.org/drawingml/2006/main" prst="rect">
+            <a:avLst/>
+          </a:prstGeom>
+          <a:noFill xmlns:a="http://schemas.openxmlformats.org/drawingml/2006/main"/>
+          <a:ln xmlns:a="http://schemas.openxmlformats.org/drawingml/2006/main" w="0">
+            <a:noFill/>
+          </a:ln>
+        </p:spPr>
+        <p:txBody>
+          <a:bodyPr xmlns:a="http://schemas.openxmlformats.org/drawingml/2006/main" anchor="t">
+            <a:noAutofit/>
+          </a:bodyPr>
+          <a:lstStyle xmlns:a="http://schemas.openxmlformats.org/drawingml/2006/main"/>
+          <a:p xmlns:a="http://schemas.openxmlformats.org/drawingml/2006/main">
+            <a:pPr algn="l">
+              <a:defRPr sz="1125" b="1">
+                <a:solidFill>
+                  <a:srgbClr val="52677D"/>
+                </a:solidFill>
+                <a:latin typeface="Helvetica Neue"/>
+                <a:ea typeface="Helvetica Neue"/>
+                <a:cs typeface="Helvetica Neue"/>
+              </a:defRPr>
+            </a:pPr>
+            <a:r>
+              <a:rPr sz="1125" b="1">
+                <a:solidFill>
+                  <a:srgbClr val="52677D"/>
+                </a:solidFill>
+                <a:latin typeface="Helvetica Neue"/>
+                <a:ea typeface="Helvetica Neue"/>
+                <a:cs typeface="Helvetica Neue"/>
+              </a:rPr>
+              <a:t>CAREER CANVAS</a:t>
+            </a:r>
+          </a:p>
+        </p:txBody>
+      </p:sp>
+      <p:sp>
+        <p:nvSpPr>
           <p:cNvPr id="7" name="">
             <a:extLst xmlns:a="http://schemas.openxmlformats.org/drawingml/2006/main">
               <a:ext uri="{FF2B5EF4-FFF2-40B4-BE49-F238E27FC236}">
-                <a16:creationId xmlns:a16="http://schemas.microsoft.com/office/drawing/2014/main" id="{01B67ABD-1FFC-48CA-9369-B5485DE0FB1D}"/>
+                <a16:creationId xmlns:a16="http://schemas.microsoft.com/office/drawing/2014/main" id="{7B8D2C31-AAC9-47BD-9E89-7B68E64019AA}"/>
+              </a:ext>
+            </a:extLst>
+          </p:cNvPr>
+          <p:cNvSpPr>
+            <a:spLocks xmlns:a="http://schemas.openxmlformats.org/drawingml/2006/main" noGrp="1"/>
+          </p:cNvSpPr>
+          <p:nvPr/>
+        </p:nvSpPr>
+        <p:spPr>
+          <a:xfrm xmlns:a="http://schemas.openxmlformats.org/drawingml/2006/main">
+            <a:off x="685800" y="914400"/>
+            <a:ext cx="685800" cy="76200"/>
+          </a:xfrm>
+          <a:prstGeom xmlns:a="http://schemas.openxmlformats.org/drawingml/2006/main" prst="roundRect">
+            <a:avLst>
+              <a:gd name="adj" fmla="val 50000"/>
+            </a:avLst>
+          </a:prstGeom>
+          <a:solidFill xmlns:a="http://schemas.openxmlformats.org/drawingml/2006/main">
+            <a:srgbClr val="1C2E4A"/>
+          </a:solidFill>
+          <a:ln xmlns:a="http://schemas.openxmlformats.org/drawingml/2006/main" w="0">
+            <a:noFill/>
+          </a:ln>
+        </p:spPr>
+      </p:sp>
+      <p:sp>
+        <p:nvSpPr>
+          <p:cNvPr id="8" name="">
+            <a:extLst xmlns:a="http://schemas.openxmlformats.org/drawingml/2006/main">
+              <a:ext uri="{FF2B5EF4-FFF2-40B4-BE49-F238E27FC236}">
+                <a16:creationId xmlns:a16="http://schemas.microsoft.com/office/drawing/2014/main" id="{467EC6BA-7F7E-499D-96CF-D1CE0EA63A55}"/>
               </a:ext>
             </a:extLst>
           </p:cNvPr>
@@ -2221,7 +2253,7 @@
         <p:spPr>
           <a:xfrm xmlns:a="http://schemas.openxmlformats.org/drawingml/2006/main">
             <a:off x="685800" y="1447800"/>
-            <a:ext cx="4762500" cy="1771650"/>
+            <a:ext cx="4953000" cy="1809750"/>
           </a:xfrm>
           <a:prstGeom xmlns:a="http://schemas.openxmlformats.org/drawingml/2006/main" prst="rect">
             <a:avLst/>
@@ -2238,19 +2270,19 @@
           <a:lstStyle xmlns:a="http://schemas.openxmlformats.org/drawingml/2006/main"/>
           <a:p xmlns:a="http://schemas.openxmlformats.org/drawingml/2006/main">
             <a:pPr algn="l">
-              <a:defRPr sz="4050" b="1">
-                <a:solidFill>
-                  <a:srgbClr val="092454"/>
-                </a:solidFill>
-                <a:latin typeface="Helvetica Neue"/>
-                <a:ea typeface="Helvetica Neue"/>
-                <a:cs typeface="Helvetica Neue"/>
-              </a:defRPr>
-            </a:pPr>
-            <a:r>
-              <a:rPr sz="4050" b="1">
-                <a:solidFill>
-                  <a:srgbClr val="092454"/>
+              <a:defRPr sz="3900" b="1">
+                <a:solidFill>
+                  <a:srgbClr val="1C2E4A"/>
+                </a:solidFill>
+                <a:latin typeface="Helvetica Neue"/>
+                <a:ea typeface="Helvetica Neue"/>
+                <a:cs typeface="Helvetica Neue"/>
+              </a:defRPr>
+            </a:pPr>
+            <a:r>
+              <a:rPr sz="3900" b="1">
+                <a:solidFill>
+                  <a:srgbClr val="1C2E4A"/>
                 </a:solidFill>
                 <a:latin typeface="Helvetica Neue"/>
                 <a:ea typeface="Helvetica Neue"/>
@@ -2261,19 +2293,19 @@
           </a:p>
           <a:p xmlns:a="http://schemas.openxmlformats.org/drawingml/2006/main">
             <a:pPr algn="l">
-              <a:defRPr sz="4050" b="1">
-                <a:solidFill>
-                  <a:srgbClr val="092454"/>
-                </a:solidFill>
-                <a:latin typeface="Helvetica Neue"/>
-                <a:ea typeface="Helvetica Neue"/>
-                <a:cs typeface="Helvetica Neue"/>
-              </a:defRPr>
-            </a:pPr>
-            <a:r>
-              <a:rPr sz="4050" b="1">
-                <a:solidFill>
-                  <a:srgbClr val="092454"/>
+              <a:defRPr sz="3900" b="1">
+                <a:solidFill>
+                  <a:srgbClr val="1C2E4A"/>
+                </a:solidFill>
+                <a:latin typeface="Helvetica Neue"/>
+                <a:ea typeface="Helvetica Neue"/>
+                <a:cs typeface="Helvetica Neue"/>
+              </a:defRPr>
+            </a:pPr>
+            <a:r>
+              <a:rPr sz="3900" b="1">
+                <a:solidFill>
+                  <a:srgbClr val="1C2E4A"/>
                 </a:solidFill>
                 <a:latin typeface="Helvetica Neue"/>
                 <a:ea typeface="Helvetica Neue"/>
@@ -2286,22 +2318,22 @@
       </p:sp>
       <p:sp>
         <p:nvSpPr>
-          <p:cNvPr id="8" name="">
-            <a:extLst xmlns:a="http://schemas.openxmlformats.org/drawingml/2006/main">
-              <a:ext uri="{FF2B5EF4-FFF2-40B4-BE49-F238E27FC236}">
-                <a16:creationId xmlns:a16="http://schemas.microsoft.com/office/drawing/2014/main" id="{1439F20B-B219-447C-BB8C-77DF95BB4BC5}"/>
-              </a:ext>
-            </a:extLst>
-          </p:cNvPr>
-          <p:cNvSpPr>
-            <a:spLocks xmlns:a="http://schemas.openxmlformats.org/drawingml/2006/main" noGrp="1"/>
-          </p:cNvSpPr>
-          <p:nvPr/>
-        </p:nvSpPr>
-        <p:spPr>
-          <a:xfrm xmlns:a="http://schemas.openxmlformats.org/drawingml/2006/main">
-            <a:off x="685800" y="3429000"/>
-            <a:ext cx="4476750" cy="1047750"/>
+          <p:cNvPr id="9" name="">
+            <a:extLst xmlns:a="http://schemas.openxmlformats.org/drawingml/2006/main">
+              <a:ext uri="{FF2B5EF4-FFF2-40B4-BE49-F238E27FC236}">
+                <a16:creationId xmlns:a16="http://schemas.microsoft.com/office/drawing/2014/main" id="{0044D3DB-4688-480F-823D-E2BDEB0DCF70}"/>
+              </a:ext>
+            </a:extLst>
+          </p:cNvPr>
+          <p:cNvSpPr>
+            <a:spLocks xmlns:a="http://schemas.openxmlformats.org/drawingml/2006/main" noGrp="1"/>
+          </p:cNvSpPr>
+          <p:nvPr/>
+        </p:nvSpPr>
+        <p:spPr>
+          <a:xfrm xmlns:a="http://schemas.openxmlformats.org/drawingml/2006/main">
+            <a:off x="685800" y="3467100"/>
+            <a:ext cx="4762500" cy="1143000"/>
           </a:xfrm>
           <a:prstGeom xmlns:a="http://schemas.openxmlformats.org/drawingml/2006/main" prst="rect">
             <a:avLst/>
@@ -2318,19 +2350,19 @@
           <a:lstStyle xmlns:a="http://schemas.openxmlformats.org/drawingml/2006/main"/>
           <a:p xmlns:a="http://schemas.openxmlformats.org/drawingml/2006/main">
             <a:pPr algn="l">
-              <a:defRPr sz="1650" b="0">
-                <a:solidFill>
-                  <a:srgbClr val="61718A"/>
-                </a:solidFill>
-                <a:latin typeface="Helvetica Neue"/>
-                <a:ea typeface="Helvetica Neue"/>
-                <a:cs typeface="Helvetica Neue"/>
-              </a:defRPr>
-            </a:pPr>
-            <a:r>
-              <a:rPr sz="1650" b="0">
-                <a:solidFill>
-                  <a:srgbClr val="61718A"/>
+              <a:defRPr sz="1575" b="0">
+                <a:solidFill>
+                  <a:srgbClr val="52677D"/>
+                </a:solidFill>
+                <a:latin typeface="Helvetica Neue"/>
+                <a:ea typeface="Helvetica Neue"/>
+                <a:cs typeface="Helvetica Neue"/>
+              </a:defRPr>
+            </a:pPr>
+            <a:r>
+              <a:rPr sz="1575" b="0">
+                <a:solidFill>
+                  <a:srgbClr val="52677D"/>
                 </a:solidFill>
                 <a:latin typeface="Helvetica Neue"/>
                 <a:ea typeface="Helvetica Neue"/>
@@ -2343,21 +2375,21 @@
       </p:sp>
       <p:sp>
         <p:nvSpPr>
-          <p:cNvPr id="9" name="">
-            <a:extLst xmlns:a="http://schemas.openxmlformats.org/drawingml/2006/main">
-              <a:ext uri="{FF2B5EF4-FFF2-40B4-BE49-F238E27FC236}">
-                <a16:creationId xmlns:a16="http://schemas.microsoft.com/office/drawing/2014/main" id="{6D9F06EC-A018-4F16-A157-BB271606BA39}"/>
-              </a:ext>
-            </a:extLst>
-          </p:cNvPr>
-          <p:cNvSpPr>
-            <a:spLocks xmlns:a="http://schemas.openxmlformats.org/drawingml/2006/main" noGrp="1"/>
-          </p:cNvSpPr>
-          <p:nvPr/>
-        </p:nvSpPr>
-        <p:spPr>
-          <a:xfrm xmlns:a="http://schemas.openxmlformats.org/drawingml/2006/main">
-            <a:off x="685800" y="5429250"/>
+          <p:cNvPr id="10" name="">
+            <a:extLst xmlns:a="http://schemas.openxmlformats.org/drawingml/2006/main">
+              <a:ext uri="{FF2B5EF4-FFF2-40B4-BE49-F238E27FC236}">
+                <a16:creationId xmlns:a16="http://schemas.microsoft.com/office/drawing/2014/main" id="{CF88E147-B68F-4B8D-B322-7BDAEAD7D614}"/>
+              </a:ext>
+            </a:extLst>
+          </p:cNvPr>
+          <p:cNvSpPr>
+            <a:spLocks xmlns:a="http://schemas.openxmlformats.org/drawingml/2006/main" noGrp="1"/>
+          </p:cNvSpPr>
+          <p:nvPr/>
+        </p:nvSpPr>
+        <p:spPr>
+          <a:xfrm xmlns:a="http://schemas.openxmlformats.org/drawingml/2006/main">
+            <a:off x="685800" y="5391150"/>
             <a:ext cx="2095500" cy="285750"/>
           </a:xfrm>
           <a:prstGeom xmlns:a="http://schemas.openxmlformats.org/drawingml/2006/main" prst="rect">
@@ -2375,19 +2407,19 @@
           <a:lstStyle xmlns:a="http://schemas.openxmlformats.org/drawingml/2006/main"/>
           <a:p xmlns:a="http://schemas.openxmlformats.org/drawingml/2006/main">
             <a:pPr algn="l">
-              <a:defRPr sz="1350" b="1">
-                <a:solidFill>
-                  <a:srgbClr val="092454"/>
-                </a:solidFill>
-                <a:latin typeface="Helvetica Neue"/>
-                <a:ea typeface="Helvetica Neue"/>
-                <a:cs typeface="Helvetica Neue"/>
-              </a:defRPr>
-            </a:pPr>
-            <a:r>
-              <a:rPr sz="1350" b="1">
-                <a:solidFill>
-                  <a:srgbClr val="092454"/>
+              <a:defRPr sz="1275" b="1">
+                <a:solidFill>
+                  <a:srgbClr val="1C2E4A"/>
+                </a:solidFill>
+                <a:latin typeface="Helvetica Neue"/>
+                <a:ea typeface="Helvetica Neue"/>
+                <a:cs typeface="Helvetica Neue"/>
+              </a:defRPr>
+            </a:pPr>
+            <a:r>
+              <a:rPr sz="1275" b="1">
+                <a:solidFill>
+                  <a:srgbClr val="1C2E4A"/>
                 </a:solidFill>
                 <a:latin typeface="Helvetica Neue"/>
                 <a:ea typeface="Helvetica Neue"/>
@@ -2400,22 +2432,22 @@
       </p:sp>
       <p:sp>
         <p:nvSpPr>
-          <p:cNvPr id="10" name="">
-            <a:extLst xmlns:a="http://schemas.openxmlformats.org/drawingml/2006/main">
-              <a:ext uri="{FF2B5EF4-FFF2-40B4-BE49-F238E27FC236}">
-                <a16:creationId xmlns:a16="http://schemas.microsoft.com/office/drawing/2014/main" id="{ED1F2617-3F79-48AC-BF28-842255EBF2A4}"/>
-              </a:ext>
-            </a:extLst>
-          </p:cNvPr>
-          <p:cNvSpPr>
-            <a:spLocks xmlns:a="http://schemas.openxmlformats.org/drawingml/2006/main" noGrp="1"/>
-          </p:cNvSpPr>
-          <p:nvPr/>
-        </p:nvSpPr>
-        <p:spPr>
-          <a:xfrm xmlns:a="http://schemas.openxmlformats.org/drawingml/2006/main">
-            <a:off x="685800" y="5810250"/>
-            <a:ext cx="3333750" cy="476250"/>
+          <p:cNvPr id="11" name="">
+            <a:extLst xmlns:a="http://schemas.openxmlformats.org/drawingml/2006/main">
+              <a:ext uri="{FF2B5EF4-FFF2-40B4-BE49-F238E27FC236}">
+                <a16:creationId xmlns:a16="http://schemas.microsoft.com/office/drawing/2014/main" id="{411D3A3E-831E-484D-ABFE-6C721951D22F}"/>
+              </a:ext>
+            </a:extLst>
+          </p:cNvPr>
+          <p:cNvSpPr>
+            <a:spLocks xmlns:a="http://schemas.openxmlformats.org/drawingml/2006/main" noGrp="1"/>
+          </p:cNvSpPr>
+          <p:nvPr/>
+        </p:nvSpPr>
+        <p:spPr>
+          <a:xfrm xmlns:a="http://schemas.openxmlformats.org/drawingml/2006/main">
+            <a:off x="685800" y="5772150"/>
+            <a:ext cx="3619500" cy="476250"/>
           </a:xfrm>
           <a:prstGeom xmlns:a="http://schemas.openxmlformats.org/drawingml/2006/main" prst="rect">
             <a:avLst/>
@@ -2432,19 +2464,19 @@
           <a:lstStyle xmlns:a="http://schemas.openxmlformats.org/drawingml/2006/main"/>
           <a:p xmlns:a="http://schemas.openxmlformats.org/drawingml/2006/main">
             <a:pPr algn="l">
-              <a:defRPr sz="1050" b="0">
-                <a:solidFill>
-                  <a:srgbClr val="61718A"/>
-                </a:solidFill>
-                <a:latin typeface="Helvetica Neue"/>
-                <a:ea typeface="Helvetica Neue"/>
-                <a:cs typeface="Helvetica Neue"/>
-              </a:defRPr>
-            </a:pPr>
-            <a:r>
-              <a:rPr sz="1050" b="0">
-                <a:solidFill>
-                  <a:srgbClr val="61718A"/>
+              <a:defRPr sz="975" b="0">
+                <a:solidFill>
+                  <a:srgbClr val="52677D"/>
+                </a:solidFill>
+                <a:latin typeface="Helvetica Neue"/>
+                <a:ea typeface="Helvetica Neue"/>
+                <a:cs typeface="Helvetica Neue"/>
+              </a:defRPr>
+            </a:pPr>
+            <a:r>
+              <a:rPr sz="975" b="0">
+                <a:solidFill>
+                  <a:srgbClr val="52677D"/>
                 </a:solidFill>
                 <a:latin typeface="Helvetica Neue"/>
                 <a:ea typeface="Helvetica Neue"/>
@@ -2455,19 +2487,19 @@
           </a:p>
           <a:p xmlns:a="http://schemas.openxmlformats.org/drawingml/2006/main">
             <a:pPr algn="l">
-              <a:defRPr sz="1050" b="0">
-                <a:solidFill>
-                  <a:srgbClr val="61718A"/>
-                </a:solidFill>
-                <a:latin typeface="Helvetica Neue"/>
-                <a:ea typeface="Helvetica Neue"/>
-                <a:cs typeface="Helvetica Neue"/>
-              </a:defRPr>
-            </a:pPr>
-            <a:r>
-              <a:rPr sz="1050" b="0">
-                <a:solidFill>
-                  <a:srgbClr val="61718A"/>
+              <a:defRPr sz="975" b="0">
+                <a:solidFill>
+                  <a:srgbClr val="52677D"/>
+                </a:solidFill>
+                <a:latin typeface="Helvetica Neue"/>
+                <a:ea typeface="Helvetica Neue"/>
+                <a:cs typeface="Helvetica Neue"/>
+              </a:defRPr>
+            </a:pPr>
+            <a:r>
+              <a:rPr sz="975" b="0">
+                <a:solidFill>
+                  <a:srgbClr val="52677D"/>
                 </a:solidFill>
                 <a:latin typeface="Helvetica Neue"/>
                 <a:ea typeface="Helvetica Neue"/>
@@ -2481,7 +2513,7 @@
     </p:spTree>
     <p:extLst>
       <p:ext uri="{BB962C8B-B14F-4D97-AF65-F5344CB8AC3E}">
-        <p14:creationId xmlns:p14="http://schemas.microsoft.com/office/powerpoint/2010/main" val="1421383511"/>
+        <p14:creationId xmlns:p14="http://schemas.microsoft.com/office/powerpoint/2010/main" val="576476643"/>
       </p:ext>
     </p:extLst>
   </p:cSld>
@@ -2512,7 +2544,7 @@
           <p:cNvPr id="15" name="">
             <a:extLst xmlns:a="http://schemas.openxmlformats.org/drawingml/2006/main">
               <a:ext uri="{FF2B5EF4-FFF2-40B4-BE49-F238E27FC236}">
-                <a16:creationId xmlns:a16="http://schemas.microsoft.com/office/drawing/2014/main" id="{1F20237E-97E0-43CC-9CE0-972AA5467F64}"/>
+                <a16:creationId xmlns:a16="http://schemas.microsoft.com/office/drawing/2014/main" id="{1A17821E-0308-4DEB-BF74-C18481EE631E}"/>
               </a:ext>
             </a:extLst>
           </p:cNvPr>
@@ -2543,7 +2575,7 @@
             <a:pPr algn="l">
               <a:defRPr sz="1125" b="1">
                 <a:solidFill>
-                  <a:srgbClr val="2563EB"/>
+                  <a:srgbClr val="52677D"/>
                 </a:solidFill>
                 <a:latin typeface="Helvetica Neue"/>
                 <a:ea typeface="Helvetica Neue"/>
@@ -2553,7 +2585,7 @@
             <a:r>
               <a:rPr sz="1125" b="1">
                 <a:solidFill>
-                  <a:srgbClr val="2563EB"/>
+                  <a:srgbClr val="52677D"/>
                 </a:solidFill>
                 <a:latin typeface="Helvetica Neue"/>
                 <a:ea typeface="Helvetica Neue"/>
@@ -2569,7 +2601,7 @@
           <p:cNvPr id="2" name="">
             <a:extLst xmlns:a="http://schemas.openxmlformats.org/drawingml/2006/main">
               <a:ext uri="{FF2B5EF4-FFF2-40B4-BE49-F238E27FC236}">
-                <a16:creationId xmlns:a16="http://schemas.microsoft.com/office/drawing/2014/main" id="{291BE840-F3D4-49BE-8D93-BFBC888217F0}"/>
+                <a16:creationId xmlns:a16="http://schemas.microsoft.com/office/drawing/2014/main" id="{75FE9725-D476-41EB-BE66-E153CD10CFC4}"/>
               </a:ext>
             </a:extLst>
           </p:cNvPr>
@@ -2600,7 +2632,7 @@
             <a:pPr algn="l">
               <a:defRPr sz="2250" b="1">
                 <a:solidFill>
-                  <a:srgbClr val="092454"/>
+                  <a:srgbClr val="1C2E4A"/>
                 </a:solidFill>
                 <a:latin typeface="Helvetica Neue"/>
                 <a:ea typeface="Helvetica Neue"/>
@@ -2610,7 +2642,7 @@
             <a:r>
               <a:rPr sz="2250" b="1">
                 <a:solidFill>
-                  <a:srgbClr val="092454"/>
+                  <a:srgbClr val="1C2E4A"/>
                 </a:solidFill>
                 <a:latin typeface="Helvetica Neue"/>
                 <a:ea typeface="Helvetica Neue"/>
@@ -2626,7 +2658,7 @@
           <p:cNvPr id="3" name="">
             <a:extLst xmlns:a="http://schemas.openxmlformats.org/drawingml/2006/main">
               <a:ext uri="{FF2B5EF4-FFF2-40B4-BE49-F238E27FC236}">
-                <a16:creationId xmlns:a16="http://schemas.microsoft.com/office/drawing/2014/main" id="{49240D6B-F7C0-4984-A333-5FA011BB1092}"/>
+                <a16:creationId xmlns:a16="http://schemas.microsoft.com/office/drawing/2014/main" id="{5ED85644-E212-4E20-975F-3D35CB7EB0C2}"/>
               </a:ext>
             </a:extLst>
           </p:cNvPr>
@@ -2646,7 +2678,7 @@
             </a:avLst>
           </a:prstGeom>
           <a:solidFill xmlns:a="http://schemas.openxmlformats.org/drawingml/2006/main">
-            <a:srgbClr val="EEF7FF"/>
+            <a:srgbClr val="D1CFC9"/>
           </a:solidFill>
           <a:ln xmlns:a="http://schemas.openxmlformats.org/drawingml/2006/main" w="0">
             <a:noFill/>
@@ -2658,7 +2690,7 @@
           <p:cNvPr id="4" name="">
             <a:extLst xmlns:a="http://schemas.openxmlformats.org/drawingml/2006/main">
               <a:ext uri="{FF2B5EF4-FFF2-40B4-BE49-F238E27FC236}">
-                <a16:creationId xmlns:a16="http://schemas.microsoft.com/office/drawing/2014/main" id="{F5990A5F-809F-4BB7-ABA8-20944EB706E3}"/>
+                <a16:creationId xmlns:a16="http://schemas.microsoft.com/office/drawing/2014/main" id="{3113054E-BF06-4898-81A7-C4351926985A}"/>
               </a:ext>
             </a:extLst>
           </p:cNvPr>
@@ -2689,7 +2721,7 @@
             <a:pPr algn="l">
               <a:defRPr sz="1125" b="1">
                 <a:solidFill>
-                  <a:srgbClr val="2563EB"/>
+                  <a:srgbClr val="52677D"/>
                 </a:solidFill>
                 <a:latin typeface="Helvetica Neue"/>
                 <a:ea typeface="Helvetica Neue"/>
@@ -2699,7 +2731,7 @@
             <a:r>
               <a:rPr sz="1125" b="1">
                 <a:solidFill>
-                  <a:srgbClr val="2563EB"/>
+                  <a:srgbClr val="52677D"/>
                 </a:solidFill>
                 <a:latin typeface="Helvetica Neue"/>
                 <a:ea typeface="Helvetica Neue"/>
@@ -2715,7 +2747,7 @@
           <p:cNvPr id="5" name="">
             <a:extLst xmlns:a="http://schemas.openxmlformats.org/drawingml/2006/main">
               <a:ext uri="{FF2B5EF4-FFF2-40B4-BE49-F238E27FC236}">
-                <a16:creationId xmlns:a16="http://schemas.microsoft.com/office/drawing/2014/main" id="{AAAF1EC4-82DD-4E30-A493-0669C68B38E8}"/>
+                <a16:creationId xmlns:a16="http://schemas.microsoft.com/office/drawing/2014/main" id="{4FE5F8B7-7BAE-4B3B-8B5C-87F4341584C8}"/>
               </a:ext>
             </a:extLst>
           </p:cNvPr>
@@ -2746,7 +2778,7 @@
             <a:pPr algn="l">
               <a:defRPr sz="1800" b="1">
                 <a:solidFill>
-                  <a:srgbClr val="092454"/>
+                  <a:srgbClr val="1C2E4A"/>
                 </a:solidFill>
                 <a:latin typeface="Helvetica Neue"/>
                 <a:ea typeface="Helvetica Neue"/>
@@ -2756,7 +2788,7 @@
             <a:r>
               <a:rPr sz="1800" b="1">
                 <a:solidFill>
-                  <a:srgbClr val="092454"/>
+                  <a:srgbClr val="1C2E4A"/>
                 </a:solidFill>
                 <a:latin typeface="Helvetica Neue"/>
                 <a:ea typeface="Helvetica Neue"/>
@@ -2772,7 +2804,7 @@
           <p:cNvPr id="6" name="">
             <a:extLst xmlns:a="http://schemas.openxmlformats.org/drawingml/2006/main">
               <a:ext uri="{FF2B5EF4-FFF2-40B4-BE49-F238E27FC236}">
-                <a16:creationId xmlns:a16="http://schemas.microsoft.com/office/drawing/2014/main" id="{867AED14-216F-4866-BAA8-D73F4836006D}"/>
+                <a16:creationId xmlns:a16="http://schemas.microsoft.com/office/drawing/2014/main" id="{754C7441-659F-4F73-A11A-84A5BB6F305B}"/>
               </a:ext>
             </a:extLst>
           </p:cNvPr>
@@ -2803,7 +2835,7 @@
             <a:pPr algn="l">
               <a:defRPr sz="1800" b="1">
                 <a:solidFill>
-                  <a:srgbClr val="092454"/>
+                  <a:srgbClr val="1C2E4A"/>
                 </a:solidFill>
                 <a:latin typeface="Helvetica Neue"/>
                 <a:ea typeface="Helvetica Neue"/>
@@ -2813,7 +2845,7 @@
             <a:r>
               <a:rPr sz="1800" b="1">
                 <a:solidFill>
-                  <a:srgbClr val="092454"/>
+                  <a:srgbClr val="1C2E4A"/>
                 </a:solidFill>
                 <a:latin typeface="Helvetica Neue"/>
                 <a:ea typeface="Helvetica Neue"/>
@@ -2829,7 +2861,7 @@
           <p:cNvPr id="7" name="">
             <a:extLst xmlns:a="http://schemas.openxmlformats.org/drawingml/2006/main">
               <a:ext uri="{FF2B5EF4-FFF2-40B4-BE49-F238E27FC236}">
-                <a16:creationId xmlns:a16="http://schemas.microsoft.com/office/drawing/2014/main" id="{37A0152F-8F9A-4EAD-8D84-12042DBC4286}"/>
+                <a16:creationId xmlns:a16="http://schemas.microsoft.com/office/drawing/2014/main" id="{E767C5F0-1331-49A6-8241-1EC9A86BE64D}"/>
               </a:ext>
             </a:extLst>
           </p:cNvPr>
@@ -2860,7 +2892,7 @@
             <a:pPr algn="l">
               <a:defRPr sz="1800" b="1">
                 <a:solidFill>
-                  <a:srgbClr val="092454"/>
+                  <a:srgbClr val="1C2E4A"/>
                 </a:solidFill>
                 <a:latin typeface="Helvetica Neue"/>
                 <a:ea typeface="Helvetica Neue"/>
@@ -2870,7 +2902,7 @@
             <a:r>
               <a:rPr sz="1800" b="1">
                 <a:solidFill>
-                  <a:srgbClr val="092454"/>
+                  <a:srgbClr val="1C2E4A"/>
                 </a:solidFill>
                 <a:latin typeface="Helvetica Neue"/>
                 <a:ea typeface="Helvetica Neue"/>
@@ -2886,7 +2918,7 @@
           <p:cNvPr id="8" name="">
             <a:extLst xmlns:a="http://schemas.openxmlformats.org/drawingml/2006/main">
               <a:ext uri="{FF2B5EF4-FFF2-40B4-BE49-F238E27FC236}">
-                <a16:creationId xmlns:a16="http://schemas.microsoft.com/office/drawing/2014/main" id="{B8DD0BFB-891D-44FE-B5CF-695366F4F79E}"/>
+                <a16:creationId xmlns:a16="http://schemas.microsoft.com/office/drawing/2014/main" id="{25CC6777-AED9-431E-8FBA-0EADE9A21AE3}"/>
               </a:ext>
             </a:extLst>
           </p:cNvPr>
@@ -2906,7 +2938,7 @@
             </a:avLst>
           </a:prstGeom>
           <a:solidFill xmlns:a="http://schemas.openxmlformats.org/drawingml/2006/main">
-            <a:srgbClr val="FFD43B"/>
+            <a:srgbClr val="D1CFC9"/>
           </a:solidFill>
           <a:ln xmlns:a="http://schemas.openxmlformats.org/drawingml/2006/main" w="0">
             <a:noFill/>
@@ -2918,7 +2950,7 @@
           <p:cNvPr id="9" name="">
             <a:extLst xmlns:a="http://schemas.openxmlformats.org/drawingml/2006/main">
               <a:ext uri="{FF2B5EF4-FFF2-40B4-BE49-F238E27FC236}">
-                <a16:creationId xmlns:a16="http://schemas.microsoft.com/office/drawing/2014/main" id="{0CC46C8D-9832-47D8-BE76-248940A7D9AB}"/>
+                <a16:creationId xmlns:a16="http://schemas.microsoft.com/office/drawing/2014/main" id="{2A7A0A1F-0CD8-4299-9713-586F473C5C86}"/>
               </a:ext>
             </a:extLst>
           </p:cNvPr>
@@ -2949,7 +2981,7 @@
             <a:pPr algn="l">
               <a:defRPr sz="1125" b="1">
                 <a:solidFill>
-                  <a:srgbClr val="092454"/>
+                  <a:srgbClr val="1C2E4A"/>
                 </a:solidFill>
                 <a:latin typeface="Helvetica Neue"/>
                 <a:ea typeface="Helvetica Neue"/>
@@ -2959,7 +2991,7 @@
             <a:r>
               <a:rPr sz="1125" b="1">
                 <a:solidFill>
-                  <a:srgbClr val="092454"/>
+                  <a:srgbClr val="1C2E4A"/>
                 </a:solidFill>
                 <a:latin typeface="Helvetica Neue"/>
                 <a:ea typeface="Helvetica Neue"/>
@@ -2975,7 +3007,7 @@
           <p:cNvPr id="10" name="">
             <a:extLst xmlns:a="http://schemas.openxmlformats.org/drawingml/2006/main">
               <a:ext uri="{FF2B5EF4-FFF2-40B4-BE49-F238E27FC236}">
-                <a16:creationId xmlns:a16="http://schemas.microsoft.com/office/drawing/2014/main" id="{0805FEC9-E071-47A9-87A4-62EBA69BC278}"/>
+                <a16:creationId xmlns:a16="http://schemas.microsoft.com/office/drawing/2014/main" id="{3EA55751-27A1-4A7F-8D44-600764FA9451}"/>
               </a:ext>
             </a:extLst>
           </p:cNvPr>
@@ -3006,7 +3038,7 @@
             <a:pPr algn="l">
               <a:defRPr sz="2025" b="1">
                 <a:solidFill>
-                  <a:srgbClr val="092454"/>
+                  <a:srgbClr val="1C2E4A"/>
                 </a:solidFill>
                 <a:latin typeface="Helvetica Neue"/>
                 <a:ea typeface="Helvetica Neue"/>
@@ -3016,7 +3048,7 @@
             <a:r>
               <a:rPr sz="2025" b="1">
                 <a:solidFill>
-                  <a:srgbClr val="092454"/>
+                  <a:srgbClr val="1C2E4A"/>
                 </a:solidFill>
                 <a:latin typeface="Helvetica Neue"/>
                 <a:ea typeface="Helvetica Neue"/>
@@ -3032,7 +3064,7 @@
           <p:cNvPr id="11" name="">
             <a:extLst xmlns:a="http://schemas.openxmlformats.org/drawingml/2006/main">
               <a:ext uri="{FF2B5EF4-FFF2-40B4-BE49-F238E27FC236}">
-                <a16:creationId xmlns:a16="http://schemas.microsoft.com/office/drawing/2014/main" id="{F0658B43-1E3A-413F-B1EB-6044B5E46835}"/>
+                <a16:creationId xmlns:a16="http://schemas.microsoft.com/office/drawing/2014/main" id="{BC46974B-CDD1-47F9-B812-841DF77C5952}"/>
               </a:ext>
             </a:extLst>
           </p:cNvPr>
@@ -3063,7 +3095,7 @@
             <a:pPr algn="l">
               <a:defRPr sz="1650" b="0">
                 <a:solidFill>
-                  <a:srgbClr val="092454"/>
+                  <a:srgbClr val="1C2E4A"/>
                 </a:solidFill>
                 <a:latin typeface="Helvetica Neue"/>
                 <a:ea typeface="Helvetica Neue"/>
@@ -3073,7 +3105,7 @@
             <a:r>
               <a:rPr sz="1650" b="0">
                 <a:solidFill>
-                  <a:srgbClr val="092454"/>
+                  <a:srgbClr val="1C2E4A"/>
                 </a:solidFill>
                 <a:latin typeface="Helvetica Neue"/>
                 <a:ea typeface="Helvetica Neue"/>
@@ -3089,7 +3121,7 @@
           <p:cNvPr id="12" name="">
             <a:extLst xmlns:a="http://schemas.openxmlformats.org/drawingml/2006/main">
               <a:ext uri="{FF2B5EF4-FFF2-40B4-BE49-F238E27FC236}">
-                <a16:creationId xmlns:a16="http://schemas.microsoft.com/office/drawing/2014/main" id="{3FCE2BB0-6276-435C-9084-651952ADB8EF}"/>
+                <a16:creationId xmlns:a16="http://schemas.microsoft.com/office/drawing/2014/main" id="{F41890EC-5F11-48E0-BF9D-E70C77287D71}"/>
               </a:ext>
             </a:extLst>
           </p:cNvPr>
@@ -3107,7 +3139,7 @@
             <a:avLst/>
           </a:prstGeom>
           <a:solidFill xmlns:a="http://schemas.openxmlformats.org/drawingml/2006/main">
-            <a:srgbClr val="D8E5F2"/>
+            <a:srgbClr val="BDC4D4"/>
           </a:solidFill>
           <a:ln xmlns:a="http://schemas.openxmlformats.org/drawingml/2006/main" w="0">
             <a:noFill/>
@@ -3119,7 +3151,7 @@
           <p:cNvPr id="13" name="">
             <a:extLst xmlns:a="http://schemas.openxmlformats.org/drawingml/2006/main">
               <a:ext uri="{FF2B5EF4-FFF2-40B4-BE49-F238E27FC236}">
-                <a16:creationId xmlns:a16="http://schemas.microsoft.com/office/drawing/2014/main" id="{1A5DEB5C-4254-464F-88BA-A44044C4CFE3}"/>
+                <a16:creationId xmlns:a16="http://schemas.microsoft.com/office/drawing/2014/main" id="{23AE1FCA-0D5D-4CC8-902A-21D1BC046797}"/>
               </a:ext>
             </a:extLst>
           </p:cNvPr>
@@ -3150,7 +3182,7 @@
             <a:pPr algn="l">
               <a:defRPr sz="750" b="0">
                 <a:solidFill>
-                  <a:srgbClr val="61718A"/>
+                  <a:srgbClr val="52677D"/>
                 </a:solidFill>
                 <a:latin typeface="Helvetica Neue"/>
                 <a:ea typeface="Helvetica Neue"/>
@@ -3160,7 +3192,7 @@
             <a:r>
               <a:rPr sz="750" b="0">
                 <a:solidFill>
-                  <a:srgbClr val="61718A"/>
+                  <a:srgbClr val="52677D"/>
                 </a:solidFill>
                 <a:latin typeface="Helvetica Neue"/>
                 <a:ea typeface="Helvetica Neue"/>
@@ -3176,7 +3208,7 @@
           <p:cNvPr id="14" name="">
             <a:extLst xmlns:a="http://schemas.openxmlformats.org/drawingml/2006/main">
               <a:ext uri="{FF2B5EF4-FFF2-40B4-BE49-F238E27FC236}">
-                <a16:creationId xmlns:a16="http://schemas.microsoft.com/office/drawing/2014/main" id="{0D1CC456-79BF-4E43-86FB-BA3F8E554558}"/>
+                <a16:creationId xmlns:a16="http://schemas.microsoft.com/office/drawing/2014/main" id="{E6165C21-1747-41BF-88D1-9AF7CEFB3BF8}"/>
               </a:ext>
             </a:extLst>
           </p:cNvPr>
@@ -3207,7 +3239,7 @@
             <a:pPr algn="r">
               <a:defRPr sz="825" b="1">
                 <a:solidFill>
-                  <a:srgbClr val="2563EB"/>
+                  <a:srgbClr val="52677D"/>
                 </a:solidFill>
                 <a:latin typeface="Helvetica Neue"/>
                 <a:ea typeface="Helvetica Neue"/>
@@ -3217,7 +3249,7 @@
             <a:r>
               <a:rPr sz="825" b="1">
                 <a:solidFill>
-                  <a:srgbClr val="2563EB"/>
+                  <a:srgbClr val="52677D"/>
                 </a:solidFill>
                 <a:latin typeface="Helvetica Neue"/>
                 <a:ea typeface="Helvetica Neue"/>
@@ -3231,7 +3263,7 @@
     </p:spTree>
     <p:extLst>
       <p:ext uri="{BB962C8B-B14F-4D97-AF65-F5344CB8AC3E}">
-        <p14:creationId xmlns:p14="http://schemas.microsoft.com/office/powerpoint/2010/main" val="1375075367"/>
+        <p14:creationId xmlns:p14="http://schemas.microsoft.com/office/powerpoint/2010/main" val="1454325800"/>
       </p:ext>
     </p:extLst>
   </p:cSld>
@@ -3244,7 +3276,7 @@
     <p:bg>
       <p:bgPr>
         <a:solidFill xmlns:a="http://schemas.openxmlformats.org/drawingml/2006/main">
-          <a:srgbClr val="EEF7FF"/>
+          <a:srgbClr val="D1CFC9"/>
         </a:solidFill>
       </p:bgPr>
     </p:bg>
@@ -3262,7 +3294,7 @@
           <p:cNvPr id="25" name="">
             <a:extLst xmlns:a="http://schemas.openxmlformats.org/drawingml/2006/main">
               <a:ext uri="{FF2B5EF4-FFF2-40B4-BE49-F238E27FC236}">
-                <a16:creationId xmlns:a16="http://schemas.microsoft.com/office/drawing/2014/main" id="{0D1B064D-5C4F-4251-9605-92D925DA229C}"/>
+                <a16:creationId xmlns:a16="http://schemas.microsoft.com/office/drawing/2014/main" id="{6C2258F8-3C33-4EA1-9590-5FB6A3C4946D}"/>
               </a:ext>
             </a:extLst>
           </p:cNvPr>
@@ -3293,7 +3325,7 @@
             <a:pPr algn="l">
               <a:defRPr sz="1125" b="1">
                 <a:solidFill>
-                  <a:srgbClr val="2563EB"/>
+                  <a:srgbClr val="52677D"/>
                 </a:solidFill>
                 <a:latin typeface="Helvetica Neue"/>
                 <a:ea typeface="Helvetica Neue"/>
@@ -3303,7 +3335,7 @@
             <a:r>
               <a:rPr sz="1125" b="1">
                 <a:solidFill>
-                  <a:srgbClr val="2563EB"/>
+                  <a:srgbClr val="52677D"/>
                 </a:solidFill>
                 <a:latin typeface="Helvetica Neue"/>
                 <a:ea typeface="Helvetica Neue"/>
@@ -3319,7 +3351,7 @@
           <p:cNvPr id="2" name="">
             <a:extLst xmlns:a="http://schemas.openxmlformats.org/drawingml/2006/main">
               <a:ext uri="{FF2B5EF4-FFF2-40B4-BE49-F238E27FC236}">
-                <a16:creationId xmlns:a16="http://schemas.microsoft.com/office/drawing/2014/main" id="{979398C8-7383-473C-A915-45F950557D17}"/>
+                <a16:creationId xmlns:a16="http://schemas.microsoft.com/office/drawing/2014/main" id="{D31CA68E-0E1F-4A54-A96E-B767B223EF5D}"/>
               </a:ext>
             </a:extLst>
           </p:cNvPr>
@@ -3350,7 +3382,7 @@
             <a:pPr algn="l">
               <a:defRPr sz="2850" b="1">
                 <a:solidFill>
-                  <a:srgbClr val="092454"/>
+                  <a:srgbClr val="1C2E4A"/>
                 </a:solidFill>
                 <a:latin typeface="Helvetica Neue"/>
                 <a:ea typeface="Helvetica Neue"/>
@@ -3360,7 +3392,7 @@
             <a:r>
               <a:rPr sz="2850" b="1">
                 <a:solidFill>
-                  <a:srgbClr val="092454"/>
+                  <a:srgbClr val="1C2E4A"/>
                 </a:solidFill>
                 <a:latin typeface="Helvetica Neue"/>
                 <a:ea typeface="Helvetica Neue"/>
@@ -3376,7 +3408,7 @@
           <p:cNvPr id="3" name="">
             <a:extLst xmlns:a="http://schemas.openxmlformats.org/drawingml/2006/main">
               <a:ext uri="{FF2B5EF4-FFF2-40B4-BE49-F238E27FC236}">
-                <a16:creationId xmlns:a16="http://schemas.microsoft.com/office/drawing/2014/main" id="{1EFF4238-B889-4BC6-8375-B44FD5009E63}"/>
+                <a16:creationId xmlns:a16="http://schemas.microsoft.com/office/drawing/2014/main" id="{3DA0AB7F-C319-4FA8-BCD8-BC21DAD5F19E}"/>
               </a:ext>
             </a:extLst>
           </p:cNvPr>
@@ -3407,7 +3439,7 @@
             <a:pPr algn="l">
               <a:defRPr sz="1425" b="0">
                 <a:solidFill>
-                  <a:srgbClr val="61718A"/>
+                  <a:srgbClr val="52677D"/>
                 </a:solidFill>
                 <a:latin typeface="Helvetica Neue"/>
                 <a:ea typeface="Helvetica Neue"/>
@@ -3417,7 +3449,7 @@
             <a:r>
               <a:rPr sz="1425" b="0">
                 <a:solidFill>
-                  <a:srgbClr val="61718A"/>
+                  <a:srgbClr val="52677D"/>
                 </a:solidFill>
                 <a:latin typeface="Helvetica Neue"/>
                 <a:ea typeface="Helvetica Neue"/>
@@ -3433,7 +3465,7 @@
           <p:cNvPr id="4" name="">
             <a:extLst xmlns:a="http://schemas.openxmlformats.org/drawingml/2006/main">
               <a:ext uri="{FF2B5EF4-FFF2-40B4-BE49-F238E27FC236}">
-                <a16:creationId xmlns:a16="http://schemas.microsoft.com/office/drawing/2014/main" id="{73D453E2-1645-4662-8272-948740376FE6}"/>
+                <a16:creationId xmlns:a16="http://schemas.microsoft.com/office/drawing/2014/main" id="{09FCE4CA-D19F-4CBE-9D1E-16C85E13FF65}"/>
               </a:ext>
             </a:extLst>
           </p:cNvPr>
@@ -3464,7 +3496,7 @@
             <a:pPr algn="l">
               <a:defRPr sz="1200" b="1">
                 <a:solidFill>
-                  <a:srgbClr val="2563EB"/>
+                  <a:srgbClr val="52677D"/>
                 </a:solidFill>
                 <a:latin typeface="Helvetica Neue"/>
                 <a:ea typeface="Helvetica Neue"/>
@@ -3474,7 +3506,7 @@
             <a:r>
               <a:rPr sz="1200" b="1">
                 <a:solidFill>
-                  <a:srgbClr val="2563EB"/>
+                  <a:srgbClr val="52677D"/>
                 </a:solidFill>
                 <a:latin typeface="Helvetica Neue"/>
                 <a:ea typeface="Helvetica Neue"/>
@@ -3490,7 +3522,7 @@
           <p:cNvPr id="5" name="">
             <a:extLst xmlns:a="http://schemas.openxmlformats.org/drawingml/2006/main">
               <a:ext uri="{FF2B5EF4-FFF2-40B4-BE49-F238E27FC236}">
-                <a16:creationId xmlns:a16="http://schemas.microsoft.com/office/drawing/2014/main" id="{46C44DD9-8295-4194-B607-F1AAA768D580}"/>
+                <a16:creationId xmlns:a16="http://schemas.microsoft.com/office/drawing/2014/main" id="{25C48267-D51C-418B-81C7-22E7DF44AF05}"/>
               </a:ext>
             </a:extLst>
           </p:cNvPr>
@@ -3521,7 +3553,7 @@
             <a:pPr algn="l">
               <a:defRPr sz="1275" b="1">
                 <a:solidFill>
-                  <a:srgbClr val="092454"/>
+                  <a:srgbClr val="1C2E4A"/>
                 </a:solidFill>
                 <a:latin typeface="Helvetica Neue"/>
                 <a:ea typeface="Helvetica Neue"/>
@@ -3531,7 +3563,7 @@
             <a:r>
               <a:rPr sz="1275" b="1">
                 <a:solidFill>
-                  <a:srgbClr val="092454"/>
+                  <a:srgbClr val="1C2E4A"/>
                 </a:solidFill>
                 <a:latin typeface="Helvetica Neue"/>
                 <a:ea typeface="Helvetica Neue"/>
@@ -3547,7 +3579,7 @@
           <p:cNvPr id="6" name="">
             <a:extLst xmlns:a="http://schemas.openxmlformats.org/drawingml/2006/main">
               <a:ext uri="{FF2B5EF4-FFF2-40B4-BE49-F238E27FC236}">
-                <a16:creationId xmlns:a16="http://schemas.microsoft.com/office/drawing/2014/main" id="{771B0F43-D587-4B44-8532-06FD104CB107}"/>
+                <a16:creationId xmlns:a16="http://schemas.microsoft.com/office/drawing/2014/main" id="{905F35D2-A9A8-4061-8261-28C18FB24478}"/>
               </a:ext>
             </a:extLst>
           </p:cNvPr>
@@ -3578,7 +3610,7 @@
             <a:pPr algn="l">
               <a:defRPr sz="900" b="0">
                 <a:solidFill>
-                  <a:srgbClr val="61718A"/>
+                  <a:srgbClr val="52677D"/>
                 </a:solidFill>
                 <a:latin typeface="Helvetica Neue"/>
                 <a:ea typeface="Helvetica Neue"/>
@@ -3588,7 +3620,7 @@
             <a:r>
               <a:rPr sz="900" b="0">
                 <a:solidFill>
-                  <a:srgbClr val="61718A"/>
+                  <a:srgbClr val="52677D"/>
                 </a:solidFill>
                 <a:latin typeface="Helvetica Neue"/>
                 <a:ea typeface="Helvetica Neue"/>
@@ -3604,7 +3636,7 @@
           <p:cNvPr id="7" name="">
             <a:extLst xmlns:a="http://schemas.openxmlformats.org/drawingml/2006/main">
               <a:ext uri="{FF2B5EF4-FFF2-40B4-BE49-F238E27FC236}">
-                <a16:creationId xmlns:a16="http://schemas.microsoft.com/office/drawing/2014/main" id="{86F3E978-3D2D-4FA3-825A-969F80CACA66}"/>
+                <a16:creationId xmlns:a16="http://schemas.microsoft.com/office/drawing/2014/main" id="{2C3E0EC1-205C-4711-A779-9BBFCFA4A764}"/>
               </a:ext>
             </a:extLst>
           </p:cNvPr>
@@ -3635,7 +3667,7 @@
             <a:pPr algn="l">
               <a:defRPr sz="1200" b="1">
                 <a:solidFill>
-                  <a:srgbClr val="2563EB"/>
+                  <a:srgbClr val="52677D"/>
                 </a:solidFill>
                 <a:latin typeface="Helvetica Neue"/>
                 <a:ea typeface="Helvetica Neue"/>
@@ -3645,7 +3677,7 @@
             <a:r>
               <a:rPr sz="1200" b="1">
                 <a:solidFill>
-                  <a:srgbClr val="2563EB"/>
+                  <a:srgbClr val="52677D"/>
                 </a:solidFill>
                 <a:latin typeface="Helvetica Neue"/>
                 <a:ea typeface="Helvetica Neue"/>
@@ -3661,7 +3693,7 @@
           <p:cNvPr id="8" name="">
             <a:extLst xmlns:a="http://schemas.openxmlformats.org/drawingml/2006/main">
               <a:ext uri="{FF2B5EF4-FFF2-40B4-BE49-F238E27FC236}">
-                <a16:creationId xmlns:a16="http://schemas.microsoft.com/office/drawing/2014/main" id="{1DEFA87E-2C91-4F75-A563-2C74A781FF5A}"/>
+                <a16:creationId xmlns:a16="http://schemas.microsoft.com/office/drawing/2014/main" id="{95189D5C-7E65-471A-A287-AA98364253F3}"/>
               </a:ext>
             </a:extLst>
           </p:cNvPr>
@@ -3692,7 +3724,7 @@
             <a:pPr algn="l">
               <a:defRPr sz="1275" b="1">
                 <a:solidFill>
-                  <a:srgbClr val="092454"/>
+                  <a:srgbClr val="1C2E4A"/>
                 </a:solidFill>
                 <a:latin typeface="Helvetica Neue"/>
                 <a:ea typeface="Helvetica Neue"/>
@@ -3702,7 +3734,7 @@
             <a:r>
               <a:rPr sz="1275" b="1">
                 <a:solidFill>
-                  <a:srgbClr val="092454"/>
+                  <a:srgbClr val="1C2E4A"/>
                 </a:solidFill>
                 <a:latin typeface="Helvetica Neue"/>
                 <a:ea typeface="Helvetica Neue"/>
@@ -3718,7 +3750,7 @@
           <p:cNvPr id="9" name="">
             <a:extLst xmlns:a="http://schemas.openxmlformats.org/drawingml/2006/main">
               <a:ext uri="{FF2B5EF4-FFF2-40B4-BE49-F238E27FC236}">
-                <a16:creationId xmlns:a16="http://schemas.microsoft.com/office/drawing/2014/main" id="{B9B38324-9733-4B82-A73E-2602810016E6}"/>
+                <a16:creationId xmlns:a16="http://schemas.microsoft.com/office/drawing/2014/main" id="{87C64DB5-CB15-477F-9F31-E7554A7E4335}"/>
               </a:ext>
             </a:extLst>
           </p:cNvPr>
@@ -3749,7 +3781,7 @@
             <a:pPr algn="l">
               <a:defRPr sz="900" b="0">
                 <a:solidFill>
-                  <a:srgbClr val="61718A"/>
+                  <a:srgbClr val="52677D"/>
                 </a:solidFill>
                 <a:latin typeface="Helvetica Neue"/>
                 <a:ea typeface="Helvetica Neue"/>
@@ -3759,7 +3791,7 @@
             <a:r>
               <a:rPr sz="900" b="0">
                 <a:solidFill>
-                  <a:srgbClr val="61718A"/>
+                  <a:srgbClr val="52677D"/>
                 </a:solidFill>
                 <a:latin typeface="Helvetica Neue"/>
                 <a:ea typeface="Helvetica Neue"/>
@@ -3775,7 +3807,7 @@
           <p:cNvPr id="10" name="">
             <a:extLst xmlns:a="http://schemas.openxmlformats.org/drawingml/2006/main">
               <a:ext uri="{FF2B5EF4-FFF2-40B4-BE49-F238E27FC236}">
-                <a16:creationId xmlns:a16="http://schemas.microsoft.com/office/drawing/2014/main" id="{25FA6D29-638E-4974-B37E-9F0DAC4D974A}"/>
+                <a16:creationId xmlns:a16="http://schemas.microsoft.com/office/drawing/2014/main" id="{4CD4FC5C-0413-4B4F-A65F-FBD5AF4C3784}"/>
               </a:ext>
             </a:extLst>
           </p:cNvPr>
@@ -3806,7 +3838,7 @@
             <a:pPr algn="l">
               <a:defRPr sz="1200" b="1">
                 <a:solidFill>
-                  <a:srgbClr val="2563EB"/>
+                  <a:srgbClr val="52677D"/>
                 </a:solidFill>
                 <a:latin typeface="Helvetica Neue"/>
                 <a:ea typeface="Helvetica Neue"/>
@@ -3816,7 +3848,7 @@
             <a:r>
               <a:rPr sz="1200" b="1">
                 <a:solidFill>
-                  <a:srgbClr val="2563EB"/>
+                  <a:srgbClr val="52677D"/>
                 </a:solidFill>
                 <a:latin typeface="Helvetica Neue"/>
                 <a:ea typeface="Helvetica Neue"/>
@@ -3832,7 +3864,7 @@
           <p:cNvPr id="11" name="">
             <a:extLst xmlns:a="http://schemas.openxmlformats.org/drawingml/2006/main">
               <a:ext uri="{FF2B5EF4-FFF2-40B4-BE49-F238E27FC236}">
-                <a16:creationId xmlns:a16="http://schemas.microsoft.com/office/drawing/2014/main" id="{95AFF4EC-1B98-45A4-AEED-7CAA0D24277E}"/>
+                <a16:creationId xmlns:a16="http://schemas.microsoft.com/office/drawing/2014/main" id="{3B4E76FF-CCEB-4C36-8591-DAB748891534}"/>
               </a:ext>
             </a:extLst>
           </p:cNvPr>
@@ -3863,7 +3895,7 @@
             <a:pPr algn="l">
               <a:defRPr sz="1275" b="1">
                 <a:solidFill>
-                  <a:srgbClr val="092454"/>
+                  <a:srgbClr val="1C2E4A"/>
                 </a:solidFill>
                 <a:latin typeface="Helvetica Neue"/>
                 <a:ea typeface="Helvetica Neue"/>
@@ -3873,7 +3905,7 @@
             <a:r>
               <a:rPr sz="1275" b="1">
                 <a:solidFill>
-                  <a:srgbClr val="092454"/>
+                  <a:srgbClr val="1C2E4A"/>
                 </a:solidFill>
                 <a:latin typeface="Helvetica Neue"/>
                 <a:ea typeface="Helvetica Neue"/>
@@ -3889,7 +3921,7 @@
           <p:cNvPr id="12" name="">
             <a:extLst xmlns:a="http://schemas.openxmlformats.org/drawingml/2006/main">
               <a:ext uri="{FF2B5EF4-FFF2-40B4-BE49-F238E27FC236}">
-                <a16:creationId xmlns:a16="http://schemas.microsoft.com/office/drawing/2014/main" id="{B551EE56-318A-4906-A7D2-93B500BA14EE}"/>
+                <a16:creationId xmlns:a16="http://schemas.microsoft.com/office/drawing/2014/main" id="{BBB48041-69DB-4AA1-8CC9-D8A0B560DE0D}"/>
               </a:ext>
             </a:extLst>
           </p:cNvPr>
@@ -3920,7 +3952,7 @@
             <a:pPr algn="l">
               <a:defRPr sz="900" b="0">
                 <a:solidFill>
-                  <a:srgbClr val="61718A"/>
+                  <a:srgbClr val="52677D"/>
                 </a:solidFill>
                 <a:latin typeface="Helvetica Neue"/>
                 <a:ea typeface="Helvetica Neue"/>
@@ -3930,7 +3962,7 @@
             <a:r>
               <a:rPr sz="900" b="0">
                 <a:solidFill>
-                  <a:srgbClr val="61718A"/>
+                  <a:srgbClr val="52677D"/>
                 </a:solidFill>
                 <a:latin typeface="Helvetica Neue"/>
                 <a:ea typeface="Helvetica Neue"/>
@@ -3946,7 +3978,7 @@
           <p:cNvPr id="13" name="">
             <a:extLst xmlns:a="http://schemas.openxmlformats.org/drawingml/2006/main">
               <a:ext uri="{FF2B5EF4-FFF2-40B4-BE49-F238E27FC236}">
-                <a16:creationId xmlns:a16="http://schemas.microsoft.com/office/drawing/2014/main" id="{832B2EEC-596A-45F7-8EAD-7C37A671355C}"/>
+                <a16:creationId xmlns:a16="http://schemas.microsoft.com/office/drawing/2014/main" id="{17711A78-CA42-444E-B5D6-DE03DEB8627F}"/>
               </a:ext>
             </a:extLst>
           </p:cNvPr>
@@ -3977,7 +4009,7 @@
             <a:pPr algn="l">
               <a:defRPr sz="1200" b="1">
                 <a:solidFill>
-                  <a:srgbClr val="2563EB"/>
+                  <a:srgbClr val="52677D"/>
                 </a:solidFill>
                 <a:latin typeface="Helvetica Neue"/>
                 <a:ea typeface="Helvetica Neue"/>
@@ -3987,7 +4019,7 @@
             <a:r>
               <a:rPr sz="1200" b="1">
                 <a:solidFill>
-                  <a:srgbClr val="2563EB"/>
+                  <a:srgbClr val="52677D"/>
                 </a:solidFill>
                 <a:latin typeface="Helvetica Neue"/>
                 <a:ea typeface="Helvetica Neue"/>
@@ -4003,7 +4035,7 @@
           <p:cNvPr id="14" name="">
             <a:extLst xmlns:a="http://schemas.openxmlformats.org/drawingml/2006/main">
               <a:ext uri="{FF2B5EF4-FFF2-40B4-BE49-F238E27FC236}">
-                <a16:creationId xmlns:a16="http://schemas.microsoft.com/office/drawing/2014/main" id="{833FF412-822C-489D-9C1D-8DA9D9C10C8D}"/>
+                <a16:creationId xmlns:a16="http://schemas.microsoft.com/office/drawing/2014/main" id="{C2B1B150-AFC7-4882-A256-3C86D6B07789}"/>
               </a:ext>
             </a:extLst>
           </p:cNvPr>
@@ -4034,7 +4066,7 @@
             <a:pPr algn="l">
               <a:defRPr sz="1275" b="1">
                 <a:solidFill>
-                  <a:srgbClr val="092454"/>
+                  <a:srgbClr val="1C2E4A"/>
                 </a:solidFill>
                 <a:latin typeface="Helvetica Neue"/>
                 <a:ea typeface="Helvetica Neue"/>
@@ -4044,7 +4076,7 @@
             <a:r>
               <a:rPr sz="1275" b="1">
                 <a:solidFill>
-                  <a:srgbClr val="092454"/>
+                  <a:srgbClr val="1C2E4A"/>
                 </a:solidFill>
                 <a:latin typeface="Helvetica Neue"/>
                 <a:ea typeface="Helvetica Neue"/>
@@ -4060,7 +4092,7 @@
           <p:cNvPr id="15" name="">
             <a:extLst xmlns:a="http://schemas.openxmlformats.org/drawingml/2006/main">
               <a:ext uri="{FF2B5EF4-FFF2-40B4-BE49-F238E27FC236}">
-                <a16:creationId xmlns:a16="http://schemas.microsoft.com/office/drawing/2014/main" id="{8FD4AC09-FD76-4211-AE61-5CD912A48951}"/>
+                <a16:creationId xmlns:a16="http://schemas.microsoft.com/office/drawing/2014/main" id="{C89E04FD-6F0D-4683-BD4E-95BE68E3C3AD}"/>
               </a:ext>
             </a:extLst>
           </p:cNvPr>
@@ -4091,7 +4123,7 @@
             <a:pPr algn="l">
               <a:defRPr sz="900" b="0">
                 <a:solidFill>
-                  <a:srgbClr val="61718A"/>
+                  <a:srgbClr val="52677D"/>
                 </a:solidFill>
                 <a:latin typeface="Helvetica Neue"/>
                 <a:ea typeface="Helvetica Neue"/>
@@ -4101,7 +4133,7 @@
             <a:r>
               <a:rPr sz="900" b="0">
                 <a:solidFill>
-                  <a:srgbClr val="61718A"/>
+                  <a:srgbClr val="52677D"/>
                 </a:solidFill>
                 <a:latin typeface="Helvetica Neue"/>
                 <a:ea typeface="Helvetica Neue"/>
@@ -4117,7 +4149,7 @@
           <p:cNvPr id="16" name="">
             <a:extLst xmlns:a="http://schemas.openxmlformats.org/drawingml/2006/main">
               <a:ext uri="{FF2B5EF4-FFF2-40B4-BE49-F238E27FC236}">
-                <a16:creationId xmlns:a16="http://schemas.microsoft.com/office/drawing/2014/main" id="{344557EA-9E1B-42C7-BA73-5248F1FF639C}"/>
+                <a16:creationId xmlns:a16="http://schemas.microsoft.com/office/drawing/2014/main" id="{8929690E-7110-45CB-A42E-EF9980E0FA26}"/>
               </a:ext>
             </a:extLst>
           </p:cNvPr>
@@ -4148,7 +4180,7 @@
             <a:pPr algn="l">
               <a:defRPr sz="1200" b="1">
                 <a:solidFill>
-                  <a:srgbClr val="2563EB"/>
+                  <a:srgbClr val="52677D"/>
                 </a:solidFill>
                 <a:latin typeface="Helvetica Neue"/>
                 <a:ea typeface="Helvetica Neue"/>
@@ -4158,7 +4190,7 @@
             <a:r>
               <a:rPr sz="1200" b="1">
                 <a:solidFill>
-                  <a:srgbClr val="2563EB"/>
+                  <a:srgbClr val="52677D"/>
                 </a:solidFill>
                 <a:latin typeface="Helvetica Neue"/>
                 <a:ea typeface="Helvetica Neue"/>
@@ -4174,7 +4206,7 @@
           <p:cNvPr id="17" name="">
             <a:extLst xmlns:a="http://schemas.openxmlformats.org/drawingml/2006/main">
               <a:ext uri="{FF2B5EF4-FFF2-40B4-BE49-F238E27FC236}">
-                <a16:creationId xmlns:a16="http://schemas.microsoft.com/office/drawing/2014/main" id="{1BB82F0C-3901-41DC-BFA6-0754F71EF1FF}"/>
+                <a16:creationId xmlns:a16="http://schemas.microsoft.com/office/drawing/2014/main" id="{FFCA1AFC-7E6D-4696-8872-754BAE362220}"/>
               </a:ext>
             </a:extLst>
           </p:cNvPr>
@@ -4205,7 +4237,7 @@
             <a:pPr algn="l">
               <a:defRPr sz="1275" b="1">
                 <a:solidFill>
-                  <a:srgbClr val="092454"/>
+                  <a:srgbClr val="1C2E4A"/>
                 </a:solidFill>
                 <a:latin typeface="Helvetica Neue"/>
                 <a:ea typeface="Helvetica Neue"/>
@@ -4215,7 +4247,7 @@
             <a:r>
               <a:rPr sz="1275" b="1">
                 <a:solidFill>
-                  <a:srgbClr val="092454"/>
+                  <a:srgbClr val="1C2E4A"/>
                 </a:solidFill>
                 <a:latin typeface="Helvetica Neue"/>
                 <a:ea typeface="Helvetica Neue"/>
@@ -4231,7 +4263,7 @@
           <p:cNvPr id="18" name="">
             <a:extLst xmlns:a="http://schemas.openxmlformats.org/drawingml/2006/main">
               <a:ext uri="{FF2B5EF4-FFF2-40B4-BE49-F238E27FC236}">
-                <a16:creationId xmlns:a16="http://schemas.microsoft.com/office/drawing/2014/main" id="{5711D2EA-0D3E-43BB-A280-1C143042228F}"/>
+                <a16:creationId xmlns:a16="http://schemas.microsoft.com/office/drawing/2014/main" id="{5687253F-0C1F-4570-BC90-0516E85263D1}"/>
               </a:ext>
             </a:extLst>
           </p:cNvPr>
@@ -4262,7 +4294,7 @@
             <a:pPr algn="l">
               <a:defRPr sz="900" b="0">
                 <a:solidFill>
-                  <a:srgbClr val="61718A"/>
+                  <a:srgbClr val="52677D"/>
                 </a:solidFill>
                 <a:latin typeface="Helvetica Neue"/>
                 <a:ea typeface="Helvetica Neue"/>
@@ -4272,7 +4304,7 @@
             <a:r>
               <a:rPr sz="900" b="0">
                 <a:solidFill>
-                  <a:srgbClr val="61718A"/>
+                  <a:srgbClr val="52677D"/>
                 </a:solidFill>
                 <a:latin typeface="Helvetica Neue"/>
                 <a:ea typeface="Helvetica Neue"/>
@@ -4288,7 +4320,7 @@
           <p:cNvPr id="19" name="">
             <a:extLst xmlns:a="http://schemas.openxmlformats.org/drawingml/2006/main">
               <a:ext uri="{FF2B5EF4-FFF2-40B4-BE49-F238E27FC236}">
-                <a16:creationId xmlns:a16="http://schemas.microsoft.com/office/drawing/2014/main" id="{D817F8E5-28BF-4582-8D77-EA38A0F56F4C}"/>
+                <a16:creationId xmlns:a16="http://schemas.microsoft.com/office/drawing/2014/main" id="{F3C96BAE-DF61-4652-92AE-1F9074A63DAF}"/>
               </a:ext>
             </a:extLst>
           </p:cNvPr>
@@ -4319,7 +4351,7 @@
             <a:pPr algn="l">
               <a:defRPr sz="1200" b="1">
                 <a:solidFill>
-                  <a:srgbClr val="2563EB"/>
+                  <a:srgbClr val="52677D"/>
                 </a:solidFill>
                 <a:latin typeface="Helvetica Neue"/>
                 <a:ea typeface="Helvetica Neue"/>
@@ -4329,7 +4361,7 @@
             <a:r>
               <a:rPr sz="1200" b="1">
                 <a:solidFill>
-                  <a:srgbClr val="2563EB"/>
+                  <a:srgbClr val="52677D"/>
                 </a:solidFill>
                 <a:latin typeface="Helvetica Neue"/>
                 <a:ea typeface="Helvetica Neue"/>
@@ -4345,7 +4377,7 @@
           <p:cNvPr id="20" name="">
             <a:extLst xmlns:a="http://schemas.openxmlformats.org/drawingml/2006/main">
               <a:ext uri="{FF2B5EF4-FFF2-40B4-BE49-F238E27FC236}">
-                <a16:creationId xmlns:a16="http://schemas.microsoft.com/office/drawing/2014/main" id="{B005016D-5230-462F-BF16-8ECC00DFAC6B}"/>
+                <a16:creationId xmlns:a16="http://schemas.microsoft.com/office/drawing/2014/main" id="{CFAC9519-C76A-48B5-B7B2-7C33959C893A}"/>
               </a:ext>
             </a:extLst>
           </p:cNvPr>
@@ -4376,7 +4408,7 @@
             <a:pPr algn="l">
               <a:defRPr sz="1275" b="1">
                 <a:solidFill>
-                  <a:srgbClr val="092454"/>
+                  <a:srgbClr val="1C2E4A"/>
                 </a:solidFill>
                 <a:latin typeface="Helvetica Neue"/>
                 <a:ea typeface="Helvetica Neue"/>
@@ -4386,7 +4418,7 @@
             <a:r>
               <a:rPr sz="1275" b="1">
                 <a:solidFill>
-                  <a:srgbClr val="092454"/>
+                  <a:srgbClr val="1C2E4A"/>
                 </a:solidFill>
                 <a:latin typeface="Helvetica Neue"/>
                 <a:ea typeface="Helvetica Neue"/>
@@ -4402,7 +4434,7 @@
           <p:cNvPr id="21" name="">
             <a:extLst xmlns:a="http://schemas.openxmlformats.org/drawingml/2006/main">
               <a:ext uri="{FF2B5EF4-FFF2-40B4-BE49-F238E27FC236}">
-                <a16:creationId xmlns:a16="http://schemas.microsoft.com/office/drawing/2014/main" id="{61F364B4-2618-41DE-869E-412F44E4DFFC}"/>
+                <a16:creationId xmlns:a16="http://schemas.microsoft.com/office/drawing/2014/main" id="{0C5D9307-3B6E-4D28-A9B6-09F90F995992}"/>
               </a:ext>
             </a:extLst>
           </p:cNvPr>
@@ -4433,7 +4465,7 @@
             <a:pPr algn="l">
               <a:defRPr sz="900" b="0">
                 <a:solidFill>
-                  <a:srgbClr val="61718A"/>
+                  <a:srgbClr val="52677D"/>
                 </a:solidFill>
                 <a:latin typeface="Helvetica Neue"/>
                 <a:ea typeface="Helvetica Neue"/>
@@ -4443,7 +4475,7 @@
             <a:r>
               <a:rPr sz="900" b="0">
                 <a:solidFill>
-                  <a:srgbClr val="61718A"/>
+                  <a:srgbClr val="52677D"/>
                 </a:solidFill>
                 <a:latin typeface="Helvetica Neue"/>
                 <a:ea typeface="Helvetica Neue"/>
@@ -4459,7 +4491,7 @@
           <p:cNvPr id="22" name="">
             <a:extLst xmlns:a="http://schemas.openxmlformats.org/drawingml/2006/main">
               <a:ext uri="{FF2B5EF4-FFF2-40B4-BE49-F238E27FC236}">
-                <a16:creationId xmlns:a16="http://schemas.microsoft.com/office/drawing/2014/main" id="{37544BF2-C53C-452E-B0CD-A2BB811C100F}"/>
+                <a16:creationId xmlns:a16="http://schemas.microsoft.com/office/drawing/2014/main" id="{3EA8E897-EEF8-44D8-9C26-7AB4AE70DC6B}"/>
               </a:ext>
             </a:extLst>
           </p:cNvPr>
@@ -4477,7 +4509,7 @@
             <a:avLst/>
           </a:prstGeom>
           <a:solidFill xmlns:a="http://schemas.openxmlformats.org/drawingml/2006/main">
-            <a:srgbClr val="D8E5F2"/>
+            <a:srgbClr val="BDC4D4"/>
           </a:solidFill>
           <a:ln xmlns:a="http://schemas.openxmlformats.org/drawingml/2006/main" w="0">
             <a:noFill/>
@@ -4489,7 +4521,7 @@
           <p:cNvPr id="23" name="">
             <a:extLst xmlns:a="http://schemas.openxmlformats.org/drawingml/2006/main">
               <a:ext uri="{FF2B5EF4-FFF2-40B4-BE49-F238E27FC236}">
-                <a16:creationId xmlns:a16="http://schemas.microsoft.com/office/drawing/2014/main" id="{D170F635-1998-4394-B088-BFAF12833B84}"/>
+                <a16:creationId xmlns:a16="http://schemas.microsoft.com/office/drawing/2014/main" id="{8F69B9E4-6D36-481B-9D1E-F8596DA7C160}"/>
               </a:ext>
             </a:extLst>
           </p:cNvPr>
@@ -4520,7 +4552,7 @@
             <a:pPr algn="l">
               <a:defRPr sz="750" b="0">
                 <a:solidFill>
-                  <a:srgbClr val="61718A"/>
+                  <a:srgbClr val="52677D"/>
                 </a:solidFill>
                 <a:latin typeface="Helvetica Neue"/>
                 <a:ea typeface="Helvetica Neue"/>
@@ -4530,7 +4562,7 @@
             <a:r>
               <a:rPr sz="750" b="0">
                 <a:solidFill>
-                  <a:srgbClr val="61718A"/>
+                  <a:srgbClr val="52677D"/>
                 </a:solidFill>
                 <a:latin typeface="Helvetica Neue"/>
                 <a:ea typeface="Helvetica Neue"/>
@@ -4546,7 +4578,7 @@
           <p:cNvPr id="24" name="">
             <a:extLst xmlns:a="http://schemas.openxmlformats.org/drawingml/2006/main">
               <a:ext uri="{FF2B5EF4-FFF2-40B4-BE49-F238E27FC236}">
-                <a16:creationId xmlns:a16="http://schemas.microsoft.com/office/drawing/2014/main" id="{C4D4D5B4-698D-46E1-9B4C-CB7BEF6BF704}"/>
+                <a16:creationId xmlns:a16="http://schemas.microsoft.com/office/drawing/2014/main" id="{3AD1A138-9D27-46CD-8917-98F0DD3107E0}"/>
               </a:ext>
             </a:extLst>
           </p:cNvPr>
@@ -4577,7 +4609,7 @@
             <a:pPr algn="r">
               <a:defRPr sz="825" b="1">
                 <a:solidFill>
-                  <a:srgbClr val="2563EB"/>
+                  <a:srgbClr val="52677D"/>
                 </a:solidFill>
                 <a:latin typeface="Helvetica Neue"/>
                 <a:ea typeface="Helvetica Neue"/>
@@ -4587,7 +4619,7 @@
             <a:r>
               <a:rPr sz="825" b="1">
                 <a:solidFill>
-                  <a:srgbClr val="2563EB"/>
+                  <a:srgbClr val="52677D"/>
                 </a:solidFill>
                 <a:latin typeface="Helvetica Neue"/>
                 <a:ea typeface="Helvetica Neue"/>
@@ -4601,7 +4633,7 @@
     </p:spTree>
     <p:extLst>
       <p:ext uri="{BB962C8B-B14F-4D97-AF65-F5344CB8AC3E}">
-        <p14:creationId xmlns:p14="http://schemas.microsoft.com/office/powerpoint/2010/main" val="701550788"/>
+        <p14:creationId xmlns:p14="http://schemas.microsoft.com/office/powerpoint/2010/main" val="2143953170"/>
       </p:ext>
     </p:extLst>
   </p:cSld>
@@ -4614,7 +4646,7 @@
     <p:bg>
       <p:bgPr>
         <a:solidFill xmlns:a="http://schemas.openxmlformats.org/drawingml/2006/main">
-          <a:srgbClr val="061A3A"/>
+          <a:srgbClr val="0F1A2B"/>
         </a:solidFill>
       </p:bgPr>
     </p:bg>
@@ -4632,7 +4664,7 @@
           <p:cNvPr id="10" name="">
             <a:extLst xmlns:a="http://schemas.openxmlformats.org/drawingml/2006/main">
               <a:ext uri="{FF2B5EF4-FFF2-40B4-BE49-F238E27FC236}">
-                <a16:creationId xmlns:a16="http://schemas.microsoft.com/office/drawing/2014/main" id="{2D2E332F-3258-4F3C-A71A-BF6FB86E5CDA}"/>
+                <a16:creationId xmlns:a16="http://schemas.microsoft.com/office/drawing/2014/main" id="{17922873-8087-471D-AD5B-4E993463BC28}"/>
               </a:ext>
             </a:extLst>
           </p:cNvPr>
@@ -4663,7 +4695,7 @@
             <a:pPr algn="l">
               <a:defRPr sz="1125" b="1">
                 <a:solidFill>
-                  <a:srgbClr val="FFD43B"/>
+                  <a:srgbClr val="D1CFC9"/>
                 </a:solidFill>
                 <a:latin typeface="Helvetica Neue"/>
                 <a:ea typeface="Helvetica Neue"/>
@@ -4673,7 +4705,7 @@
             <a:r>
               <a:rPr sz="1125" b="1">
                 <a:solidFill>
-                  <a:srgbClr val="FFD43B"/>
+                  <a:srgbClr val="D1CFC9"/>
                 </a:solidFill>
                 <a:latin typeface="Helvetica Neue"/>
                 <a:ea typeface="Helvetica Neue"/>
@@ -4689,7 +4721,7 @@
           <p:cNvPr id="2" name="">
             <a:extLst xmlns:a="http://schemas.openxmlformats.org/drawingml/2006/main">
               <a:ext uri="{FF2B5EF4-FFF2-40B4-BE49-F238E27FC236}">
-                <a16:creationId xmlns:a16="http://schemas.microsoft.com/office/drawing/2014/main" id="{B57AEE71-ED03-4FFD-B4DF-292D0A28D8C1}"/>
+                <a16:creationId xmlns:a16="http://schemas.microsoft.com/office/drawing/2014/main" id="{7C914526-FFE6-401B-B239-7A799DE18FFF}"/>
               </a:ext>
             </a:extLst>
           </p:cNvPr>
@@ -4746,7 +4778,7 @@
           <p:cNvPr id="3" name="">
             <a:extLst xmlns:a="http://schemas.openxmlformats.org/drawingml/2006/main">
               <a:ext uri="{FF2B5EF4-FFF2-40B4-BE49-F238E27FC236}">
-                <a16:creationId xmlns:a16="http://schemas.microsoft.com/office/drawing/2014/main" id="{41BD8894-0EA7-4F0A-A42E-9C119272CF1C}"/>
+                <a16:creationId xmlns:a16="http://schemas.microsoft.com/office/drawing/2014/main" id="{A546338D-6AC2-4CA2-BD1D-C9B93A6BC4EE}"/>
               </a:ext>
             </a:extLst>
           </p:cNvPr>
@@ -4777,7 +4809,7 @@
             <a:pPr algn="l">
               <a:defRPr sz="8700" b="1">
                 <a:solidFill>
-                  <a:srgbClr val="FFD43B"/>
+                  <a:srgbClr val="D1CFC9"/>
                 </a:solidFill>
                 <a:latin typeface="Helvetica Neue"/>
                 <a:ea typeface="Helvetica Neue"/>
@@ -4787,7 +4819,7 @@
             <a:r>
               <a:rPr sz="8700" b="1">
                 <a:solidFill>
-                  <a:srgbClr val="FFD43B"/>
+                  <a:srgbClr val="D1CFC9"/>
                 </a:solidFill>
                 <a:latin typeface="Helvetica Neue"/>
                 <a:ea typeface="Helvetica Neue"/>
@@ -4803,7 +4835,7 @@
           <p:cNvPr id="4" name="">
             <a:extLst xmlns:a="http://schemas.openxmlformats.org/drawingml/2006/main">
               <a:ext uri="{FF2B5EF4-FFF2-40B4-BE49-F238E27FC236}">
-                <a16:creationId xmlns:a16="http://schemas.microsoft.com/office/drawing/2014/main" id="{C7650546-4C71-4F57-9480-9ACCEDE1E000}"/>
+                <a16:creationId xmlns:a16="http://schemas.microsoft.com/office/drawing/2014/main" id="{265AEBA1-CDBA-4245-9BFC-2466190C6DAB}"/>
               </a:ext>
             </a:extLst>
           </p:cNvPr>
@@ -4860,7 +4892,7 @@
           <p:cNvPr id="5" name="">
             <a:extLst xmlns:a="http://schemas.openxmlformats.org/drawingml/2006/main">
               <a:ext uri="{FF2B5EF4-FFF2-40B4-BE49-F238E27FC236}">
-                <a16:creationId xmlns:a16="http://schemas.microsoft.com/office/drawing/2014/main" id="{FE2FF617-35AC-4353-9657-C51565BAFC91}"/>
+                <a16:creationId xmlns:a16="http://schemas.microsoft.com/office/drawing/2014/main" id="{264FE48E-7AD1-4177-945F-E621B50FCA51}"/>
               </a:ext>
             </a:extLst>
           </p:cNvPr>
@@ -4878,7 +4910,7 @@
             <a:avLst/>
           </a:prstGeom>
           <a:solidFill xmlns:a="http://schemas.openxmlformats.org/drawingml/2006/main">
-            <a:srgbClr val="31507E"/>
+            <a:srgbClr val="52677D"/>
           </a:solidFill>
           <a:ln xmlns:a="http://schemas.openxmlformats.org/drawingml/2006/main" w="0">
             <a:noFill/>
@@ -4890,7 +4922,7 @@
           <p:cNvPr id="6" name="">
             <a:extLst xmlns:a="http://schemas.openxmlformats.org/drawingml/2006/main">
               <a:ext uri="{FF2B5EF4-FFF2-40B4-BE49-F238E27FC236}">
-                <a16:creationId xmlns:a16="http://schemas.microsoft.com/office/drawing/2014/main" id="{781EA2AA-E4A3-4A77-A940-557B26BD9EC5}"/>
+                <a16:creationId xmlns:a16="http://schemas.microsoft.com/office/drawing/2014/main" id="{30FCE745-DCE4-4C9B-8FAB-386A55F17C9F}"/>
               </a:ext>
             </a:extLst>
           </p:cNvPr>
@@ -4921,7 +4953,7 @@
             <a:pPr algn="l">
               <a:defRPr sz="1800" b="0">
                 <a:solidFill>
-                  <a:srgbClr val="BFE6FF"/>
+                  <a:srgbClr val="BDC4D4"/>
                 </a:solidFill>
                 <a:latin typeface="Helvetica Neue"/>
                 <a:ea typeface="Helvetica Neue"/>
@@ -4931,7 +4963,7 @@
             <a:r>
               <a:rPr sz="1800" b="0">
                 <a:solidFill>
-                  <a:srgbClr val="BFE6FF"/>
+                  <a:srgbClr val="BDC4D4"/>
                 </a:solidFill>
                 <a:latin typeface="Helvetica Neue"/>
                 <a:ea typeface="Helvetica Neue"/>
@@ -4947,7 +4979,7 @@
           <p:cNvPr id="7" name="">
             <a:extLst xmlns:a="http://schemas.openxmlformats.org/drawingml/2006/main">
               <a:ext uri="{FF2B5EF4-FFF2-40B4-BE49-F238E27FC236}">
-                <a16:creationId xmlns:a16="http://schemas.microsoft.com/office/drawing/2014/main" id="{E605EBF9-1257-48EE-A06E-CCE12C1DCB36}"/>
+                <a16:creationId xmlns:a16="http://schemas.microsoft.com/office/drawing/2014/main" id="{A3C20714-AAA6-408C-957F-8407B9700DAE}"/>
               </a:ext>
             </a:extLst>
           </p:cNvPr>
@@ -4965,7 +4997,7 @@
             <a:avLst/>
           </a:prstGeom>
           <a:solidFill xmlns:a="http://schemas.openxmlformats.org/drawingml/2006/main">
-            <a:srgbClr val="31507E"/>
+            <a:srgbClr val="52677D"/>
           </a:solidFill>
           <a:ln xmlns:a="http://schemas.openxmlformats.org/drawingml/2006/main" w="0">
             <a:noFill/>
@@ -4977,7 +5009,7 @@
           <p:cNvPr id="8" name="">
             <a:extLst xmlns:a="http://schemas.openxmlformats.org/drawingml/2006/main">
               <a:ext uri="{FF2B5EF4-FFF2-40B4-BE49-F238E27FC236}">
-                <a16:creationId xmlns:a16="http://schemas.microsoft.com/office/drawing/2014/main" id="{CC328E4C-DAD3-4551-8FCB-2DB35716F4DF}"/>
+                <a16:creationId xmlns:a16="http://schemas.microsoft.com/office/drawing/2014/main" id="{A35FA5FD-63C0-40EA-9D84-CD5B0FFC5E8A}"/>
               </a:ext>
             </a:extLst>
           </p:cNvPr>
@@ -5008,7 +5040,7 @@
             <a:pPr algn="l">
               <a:defRPr sz="750" b="0">
                 <a:solidFill>
-                  <a:srgbClr val="BFE6FF"/>
+                  <a:srgbClr val="BDC4D4"/>
                 </a:solidFill>
                 <a:latin typeface="Helvetica Neue"/>
                 <a:ea typeface="Helvetica Neue"/>
@@ -5018,7 +5050,7 @@
             <a:r>
               <a:rPr sz="750" b="0">
                 <a:solidFill>
-                  <a:srgbClr val="BFE6FF"/>
+                  <a:srgbClr val="BDC4D4"/>
                 </a:solidFill>
                 <a:latin typeface="Helvetica Neue"/>
                 <a:ea typeface="Helvetica Neue"/>
@@ -5034,7 +5066,7 @@
           <p:cNvPr id="9" name="">
             <a:extLst xmlns:a="http://schemas.openxmlformats.org/drawingml/2006/main">
               <a:ext uri="{FF2B5EF4-FFF2-40B4-BE49-F238E27FC236}">
-                <a16:creationId xmlns:a16="http://schemas.microsoft.com/office/drawing/2014/main" id="{E69C6C39-F66C-4E5B-BB25-DF006D64433A}"/>
+                <a16:creationId xmlns:a16="http://schemas.microsoft.com/office/drawing/2014/main" id="{F4B7AF2D-6EA9-4699-B947-10D5D96ED4BF}"/>
               </a:ext>
             </a:extLst>
           </p:cNvPr>
@@ -5065,7 +5097,7 @@
             <a:pPr algn="r">
               <a:defRPr sz="825" b="1">
                 <a:solidFill>
-                  <a:srgbClr val="FFD43B"/>
+                  <a:srgbClr val="D1CFC9"/>
                 </a:solidFill>
                 <a:latin typeface="Helvetica Neue"/>
                 <a:ea typeface="Helvetica Neue"/>
@@ -5075,7 +5107,7 @@
             <a:r>
               <a:rPr sz="825" b="1">
                 <a:solidFill>
-                  <a:srgbClr val="FFD43B"/>
+                  <a:srgbClr val="D1CFC9"/>
                 </a:solidFill>
                 <a:latin typeface="Helvetica Neue"/>
                 <a:ea typeface="Helvetica Neue"/>
@@ -5089,7 +5121,7 @@
     </p:spTree>
     <p:extLst>
       <p:ext uri="{BB962C8B-B14F-4D97-AF65-F5344CB8AC3E}">
-        <p14:creationId xmlns:p14="http://schemas.microsoft.com/office/powerpoint/2010/main" val="1929273731"/>
+        <p14:creationId xmlns:p14="http://schemas.microsoft.com/office/powerpoint/2010/main" val="63276957"/>
       </p:ext>
     </p:extLst>
   </p:cSld>
@@ -5120,7 +5152,7 @@
           <p:cNvPr id="33" name="">
             <a:extLst xmlns:a="http://schemas.openxmlformats.org/drawingml/2006/main">
               <a:ext uri="{FF2B5EF4-FFF2-40B4-BE49-F238E27FC236}">
-                <a16:creationId xmlns:a16="http://schemas.microsoft.com/office/drawing/2014/main" id="{06F0B9FE-9C68-4E8F-9AC9-D891D12E7DDB}"/>
+                <a16:creationId xmlns:a16="http://schemas.microsoft.com/office/drawing/2014/main" id="{6863FA53-B892-440F-90BB-C97CBA4EFB78}"/>
               </a:ext>
             </a:extLst>
           </p:cNvPr>
@@ -5151,7 +5183,7 @@
             <a:pPr algn="l">
               <a:defRPr sz="1125" b="1">
                 <a:solidFill>
-                  <a:srgbClr val="2563EB"/>
+                  <a:srgbClr val="52677D"/>
                 </a:solidFill>
                 <a:latin typeface="Helvetica Neue"/>
                 <a:ea typeface="Helvetica Neue"/>
@@ -5161,7 +5193,7 @@
             <a:r>
               <a:rPr sz="1125" b="1">
                 <a:solidFill>
-                  <a:srgbClr val="2563EB"/>
+                  <a:srgbClr val="52677D"/>
                 </a:solidFill>
                 <a:latin typeface="Helvetica Neue"/>
                 <a:ea typeface="Helvetica Neue"/>
@@ -5177,7 +5209,7 @@
           <p:cNvPr id="2" name="">
             <a:extLst xmlns:a="http://schemas.openxmlformats.org/drawingml/2006/main">
               <a:ext uri="{FF2B5EF4-FFF2-40B4-BE49-F238E27FC236}">
-                <a16:creationId xmlns:a16="http://schemas.microsoft.com/office/drawing/2014/main" id="{D832FCED-D53F-4025-89BA-F2F1D4C56499}"/>
+                <a16:creationId xmlns:a16="http://schemas.microsoft.com/office/drawing/2014/main" id="{590DD6AF-0DC4-4FEE-A2F8-1E1A729D16F4}"/>
               </a:ext>
             </a:extLst>
           </p:cNvPr>
@@ -5208,7 +5240,7 @@
             <a:pPr algn="l">
               <a:defRPr sz="2850" b="1">
                 <a:solidFill>
-                  <a:srgbClr val="092454"/>
+                  <a:srgbClr val="1C2E4A"/>
                 </a:solidFill>
                 <a:latin typeface="Helvetica Neue"/>
                 <a:ea typeface="Helvetica Neue"/>
@@ -5218,7 +5250,7 @@
             <a:r>
               <a:rPr sz="2850" b="1">
                 <a:solidFill>
-                  <a:srgbClr val="092454"/>
+                  <a:srgbClr val="1C2E4A"/>
                 </a:solidFill>
                 <a:latin typeface="Helvetica Neue"/>
                 <a:ea typeface="Helvetica Neue"/>
@@ -5234,7 +5266,7 @@
           <p:cNvPr id="3" name="">
             <a:extLst xmlns:a="http://schemas.openxmlformats.org/drawingml/2006/main">
               <a:ext uri="{FF2B5EF4-FFF2-40B4-BE49-F238E27FC236}">
-                <a16:creationId xmlns:a16="http://schemas.microsoft.com/office/drawing/2014/main" id="{493C304A-0EFA-4060-8B73-E826158D1153}"/>
+                <a16:creationId xmlns:a16="http://schemas.microsoft.com/office/drawing/2014/main" id="{9A1CEBF9-6B8A-4DBF-B371-F6212B6F5BFF}"/>
               </a:ext>
             </a:extLst>
           </p:cNvPr>
@@ -5265,7 +5297,7 @@
             <a:pPr algn="l">
               <a:defRPr sz="1425" b="0">
                 <a:solidFill>
-                  <a:srgbClr val="61718A"/>
+                  <a:srgbClr val="52677D"/>
                 </a:solidFill>
                 <a:latin typeface="Helvetica Neue"/>
                 <a:ea typeface="Helvetica Neue"/>
@@ -5275,7 +5307,7 @@
             <a:r>
               <a:rPr sz="1425" b="0">
                 <a:solidFill>
-                  <a:srgbClr val="61718A"/>
+                  <a:srgbClr val="52677D"/>
                 </a:solidFill>
                 <a:latin typeface="Helvetica Neue"/>
                 <a:ea typeface="Helvetica Neue"/>
@@ -5291,7 +5323,7 @@
           <p:cNvPr id="4" name="">
             <a:extLst xmlns:a="http://schemas.openxmlformats.org/drawingml/2006/main">
               <a:ext uri="{FF2B5EF4-FFF2-40B4-BE49-F238E27FC236}">
-                <a16:creationId xmlns:a16="http://schemas.microsoft.com/office/drawing/2014/main" id="{E26F270C-F874-48F6-980B-94DAE55DF6FA}"/>
+                <a16:creationId xmlns:a16="http://schemas.microsoft.com/office/drawing/2014/main" id="{03564838-2FFF-479E-998F-02CD11939546}"/>
               </a:ext>
             </a:extLst>
           </p:cNvPr>
@@ -5315,7 +5347,7 @@
           </a:solidFill>
           <a:ln xmlns:a="http://schemas.openxmlformats.org/drawingml/2006/main" w="28575">
             <a:solidFill>
-              <a:srgbClr val="2563EB"/>
+              <a:srgbClr val="52677D"/>
             </a:solidFill>
           </a:ln>
         </p:spPr>
@@ -5325,7 +5357,7 @@
           <p:cNvPr id="5" name="">
             <a:extLst xmlns:a="http://schemas.openxmlformats.org/drawingml/2006/main">
               <a:ext uri="{FF2B5EF4-FFF2-40B4-BE49-F238E27FC236}">
-                <a16:creationId xmlns:a16="http://schemas.microsoft.com/office/drawing/2014/main" id="{B553A4EA-4CD0-4BA0-831F-60022396E148}"/>
+                <a16:creationId xmlns:a16="http://schemas.microsoft.com/office/drawing/2014/main" id="{7D5DBE48-A7D9-4492-8ED1-C47C1146F26C}"/>
               </a:ext>
             </a:extLst>
           </p:cNvPr>
@@ -5345,7 +5377,7 @@
             </a:avLst>
           </a:prstGeom>
           <a:solidFill xmlns:a="http://schemas.openxmlformats.org/drawingml/2006/main">
-            <a:srgbClr val="2563EB"/>
+            <a:srgbClr val="52677D"/>
           </a:solidFill>
           <a:ln xmlns:a="http://schemas.openxmlformats.org/drawingml/2006/main" w="0">
             <a:noFill/>
@@ -5357,7 +5389,7 @@
           <p:cNvPr id="6" name="">
             <a:extLst xmlns:a="http://schemas.openxmlformats.org/drawingml/2006/main">
               <a:ext uri="{FF2B5EF4-FFF2-40B4-BE49-F238E27FC236}">
-                <a16:creationId xmlns:a16="http://schemas.microsoft.com/office/drawing/2014/main" id="{1D366FD2-CB7A-4851-97D7-10FF98EFAD3C}"/>
+                <a16:creationId xmlns:a16="http://schemas.microsoft.com/office/drawing/2014/main" id="{EAE92A98-F048-41B9-8CA6-C522881E065F}"/>
               </a:ext>
             </a:extLst>
           </p:cNvPr>
@@ -5414,7 +5446,7 @@
           <p:cNvPr id="7" name="">
             <a:extLst xmlns:a="http://schemas.openxmlformats.org/drawingml/2006/main">
               <a:ext uri="{FF2B5EF4-FFF2-40B4-BE49-F238E27FC236}">
-                <a16:creationId xmlns:a16="http://schemas.microsoft.com/office/drawing/2014/main" id="{B90374B5-CBD0-41DE-B28F-4B9536032540}"/>
+                <a16:creationId xmlns:a16="http://schemas.microsoft.com/office/drawing/2014/main" id="{BADDD36D-A1D2-4897-8C50-AAB75113259D}"/>
               </a:ext>
             </a:extLst>
           </p:cNvPr>
@@ -5432,7 +5464,7 @@
             <a:avLst/>
           </a:prstGeom>
           <a:solidFill xmlns:a="http://schemas.openxmlformats.org/drawingml/2006/main">
-            <a:srgbClr val="2563EB"/>
+            <a:srgbClr val="52677D"/>
           </a:solidFill>
           <a:ln xmlns:a="http://schemas.openxmlformats.org/drawingml/2006/main" w="0">
             <a:noFill/>
@@ -5444,7 +5476,7 @@
           <p:cNvPr id="8" name="">
             <a:extLst xmlns:a="http://schemas.openxmlformats.org/drawingml/2006/main">
               <a:ext uri="{FF2B5EF4-FFF2-40B4-BE49-F238E27FC236}">
-                <a16:creationId xmlns:a16="http://schemas.microsoft.com/office/drawing/2014/main" id="{F0A3030C-30B7-4F1B-8C34-D8D0BAEED04E}"/>
+                <a16:creationId xmlns:a16="http://schemas.microsoft.com/office/drawing/2014/main" id="{040B0E4F-44A1-4512-A533-71BB133EEB6F}"/>
               </a:ext>
             </a:extLst>
           </p:cNvPr>
@@ -5475,7 +5507,7 @@
             <a:pPr algn="l">
               <a:defRPr sz="1425" b="0">
                 <a:solidFill>
-                  <a:srgbClr val="10213D"/>
+                  <a:srgbClr val="0F1A2B"/>
                 </a:solidFill>
                 <a:latin typeface="Helvetica Neue"/>
                 <a:ea typeface="Helvetica Neue"/>
@@ -5485,7 +5517,7 @@
             <a:r>
               <a:rPr sz="1425" b="0">
                 <a:solidFill>
-                  <a:srgbClr val="10213D"/>
+                  <a:srgbClr val="0F1A2B"/>
                 </a:solidFill>
                 <a:latin typeface="Helvetica Neue"/>
                 <a:ea typeface="Helvetica Neue"/>
@@ -5501,7 +5533,7 @@
           <p:cNvPr id="9" name="">
             <a:extLst xmlns:a="http://schemas.openxmlformats.org/drawingml/2006/main">
               <a:ext uri="{FF2B5EF4-FFF2-40B4-BE49-F238E27FC236}">
-                <a16:creationId xmlns:a16="http://schemas.microsoft.com/office/drawing/2014/main" id="{7F90EE31-9910-4B25-956F-6BA5E3666D75}"/>
+                <a16:creationId xmlns:a16="http://schemas.microsoft.com/office/drawing/2014/main" id="{FAA98884-3599-4FE3-966F-6F70E0E75E10}"/>
               </a:ext>
             </a:extLst>
           </p:cNvPr>
@@ -5519,7 +5551,7 @@
             <a:avLst/>
           </a:prstGeom>
           <a:solidFill xmlns:a="http://schemas.openxmlformats.org/drawingml/2006/main">
-            <a:srgbClr val="2563EB"/>
+            <a:srgbClr val="52677D"/>
           </a:solidFill>
           <a:ln xmlns:a="http://schemas.openxmlformats.org/drawingml/2006/main" w="0">
             <a:noFill/>
@@ -5531,7 +5563,7 @@
           <p:cNvPr id="10" name="">
             <a:extLst xmlns:a="http://schemas.openxmlformats.org/drawingml/2006/main">
               <a:ext uri="{FF2B5EF4-FFF2-40B4-BE49-F238E27FC236}">
-                <a16:creationId xmlns:a16="http://schemas.microsoft.com/office/drawing/2014/main" id="{EEFE2497-15A0-46CB-AF57-AB4DC4974DD7}"/>
+                <a16:creationId xmlns:a16="http://schemas.microsoft.com/office/drawing/2014/main" id="{B3228C90-093E-4705-86B8-C527D1F22099}"/>
               </a:ext>
             </a:extLst>
           </p:cNvPr>
@@ -5562,7 +5594,7 @@
             <a:pPr algn="l">
               <a:defRPr sz="1425" b="0">
                 <a:solidFill>
-                  <a:srgbClr val="10213D"/>
+                  <a:srgbClr val="0F1A2B"/>
                 </a:solidFill>
                 <a:latin typeface="Helvetica Neue"/>
                 <a:ea typeface="Helvetica Neue"/>
@@ -5572,7 +5604,7 @@
             <a:r>
               <a:rPr sz="1425" b="0">
                 <a:solidFill>
-                  <a:srgbClr val="10213D"/>
+                  <a:srgbClr val="0F1A2B"/>
                 </a:solidFill>
                 <a:latin typeface="Helvetica Neue"/>
                 <a:ea typeface="Helvetica Neue"/>
@@ -5588,7 +5620,7 @@
           <p:cNvPr id="11" name="">
             <a:extLst xmlns:a="http://schemas.openxmlformats.org/drawingml/2006/main">
               <a:ext uri="{FF2B5EF4-FFF2-40B4-BE49-F238E27FC236}">
-                <a16:creationId xmlns:a16="http://schemas.microsoft.com/office/drawing/2014/main" id="{AB1D7501-A10D-4F25-9DC3-317E232BFE7C}"/>
+                <a16:creationId xmlns:a16="http://schemas.microsoft.com/office/drawing/2014/main" id="{BC3EF987-DC1A-442B-B15D-F6D7C4C79BF0}"/>
               </a:ext>
             </a:extLst>
           </p:cNvPr>
@@ -5606,7 +5638,7 @@
             <a:avLst/>
           </a:prstGeom>
           <a:solidFill xmlns:a="http://schemas.openxmlformats.org/drawingml/2006/main">
-            <a:srgbClr val="2563EB"/>
+            <a:srgbClr val="52677D"/>
           </a:solidFill>
           <a:ln xmlns:a="http://schemas.openxmlformats.org/drawingml/2006/main" w="0">
             <a:noFill/>
@@ -5618,7 +5650,7 @@
           <p:cNvPr id="12" name="">
             <a:extLst xmlns:a="http://schemas.openxmlformats.org/drawingml/2006/main">
               <a:ext uri="{FF2B5EF4-FFF2-40B4-BE49-F238E27FC236}">
-                <a16:creationId xmlns:a16="http://schemas.microsoft.com/office/drawing/2014/main" id="{88B314EF-A604-4648-BF51-4B4876CE90FF}"/>
+                <a16:creationId xmlns:a16="http://schemas.microsoft.com/office/drawing/2014/main" id="{22C6F95E-2C58-4314-AE71-A5B90F524F67}"/>
               </a:ext>
             </a:extLst>
           </p:cNvPr>
@@ -5649,7 +5681,7 @@
             <a:pPr algn="l">
               <a:defRPr sz="1425" b="0">
                 <a:solidFill>
-                  <a:srgbClr val="10213D"/>
+                  <a:srgbClr val="0F1A2B"/>
                 </a:solidFill>
                 <a:latin typeface="Helvetica Neue"/>
                 <a:ea typeface="Helvetica Neue"/>
@@ -5659,7 +5691,7 @@
             <a:r>
               <a:rPr sz="1425" b="0">
                 <a:solidFill>
-                  <a:srgbClr val="10213D"/>
+                  <a:srgbClr val="0F1A2B"/>
                 </a:solidFill>
                 <a:latin typeface="Helvetica Neue"/>
                 <a:ea typeface="Helvetica Neue"/>
@@ -5675,7 +5707,7 @@
           <p:cNvPr id="13" name="">
             <a:extLst xmlns:a="http://schemas.openxmlformats.org/drawingml/2006/main">
               <a:ext uri="{FF2B5EF4-FFF2-40B4-BE49-F238E27FC236}">
-                <a16:creationId xmlns:a16="http://schemas.microsoft.com/office/drawing/2014/main" id="{D4AC64DC-DA22-4EC0-BCAA-121C928DA764}"/>
+                <a16:creationId xmlns:a16="http://schemas.microsoft.com/office/drawing/2014/main" id="{EB4EC5AC-8625-425E-B15F-6C9B89FF411F}"/>
               </a:ext>
             </a:extLst>
           </p:cNvPr>
@@ -5693,7 +5725,7 @@
             <a:avLst/>
           </a:prstGeom>
           <a:solidFill xmlns:a="http://schemas.openxmlformats.org/drawingml/2006/main">
-            <a:srgbClr val="2563EB"/>
+            <a:srgbClr val="52677D"/>
           </a:solidFill>
           <a:ln xmlns:a="http://schemas.openxmlformats.org/drawingml/2006/main" w="0">
             <a:noFill/>
@@ -5705,7 +5737,7 @@
           <p:cNvPr id="14" name="">
             <a:extLst xmlns:a="http://schemas.openxmlformats.org/drawingml/2006/main">
               <a:ext uri="{FF2B5EF4-FFF2-40B4-BE49-F238E27FC236}">
-                <a16:creationId xmlns:a16="http://schemas.microsoft.com/office/drawing/2014/main" id="{47D09811-1634-438B-A685-BBC03213B2FA}"/>
+                <a16:creationId xmlns:a16="http://schemas.microsoft.com/office/drawing/2014/main" id="{E02F7397-F6BD-424E-9E1D-487017DB9778}"/>
               </a:ext>
             </a:extLst>
           </p:cNvPr>
@@ -5736,7 +5768,7 @@
             <a:pPr algn="l">
               <a:defRPr sz="1425" b="0">
                 <a:solidFill>
-                  <a:srgbClr val="10213D"/>
+                  <a:srgbClr val="0F1A2B"/>
                 </a:solidFill>
                 <a:latin typeface="Helvetica Neue"/>
                 <a:ea typeface="Helvetica Neue"/>
@@ -5746,7 +5778,7 @@
             <a:r>
               <a:rPr sz="1425" b="0">
                 <a:solidFill>
-                  <a:srgbClr val="10213D"/>
+                  <a:srgbClr val="0F1A2B"/>
                 </a:solidFill>
                 <a:latin typeface="Helvetica Neue"/>
                 <a:ea typeface="Helvetica Neue"/>
@@ -5762,7 +5794,7 @@
           <p:cNvPr id="15" name="">
             <a:extLst xmlns:a="http://schemas.openxmlformats.org/drawingml/2006/main">
               <a:ext uri="{FF2B5EF4-FFF2-40B4-BE49-F238E27FC236}">
-                <a16:creationId xmlns:a16="http://schemas.microsoft.com/office/drawing/2014/main" id="{E7B45E62-78C4-4EBD-B0CD-4E34D73D0743}"/>
+                <a16:creationId xmlns:a16="http://schemas.microsoft.com/office/drawing/2014/main" id="{087BCA85-A393-48FC-9FDB-AAC82E51FCB6}"/>
               </a:ext>
             </a:extLst>
           </p:cNvPr>
@@ -5780,7 +5812,7 @@
             <a:avLst/>
           </a:prstGeom>
           <a:solidFill xmlns:a="http://schemas.openxmlformats.org/drawingml/2006/main">
-            <a:srgbClr val="2563EB"/>
+            <a:srgbClr val="52677D"/>
           </a:solidFill>
           <a:ln xmlns:a="http://schemas.openxmlformats.org/drawingml/2006/main" w="0">
             <a:noFill/>
@@ -5792,7 +5824,7 @@
           <p:cNvPr id="16" name="">
             <a:extLst xmlns:a="http://schemas.openxmlformats.org/drawingml/2006/main">
               <a:ext uri="{FF2B5EF4-FFF2-40B4-BE49-F238E27FC236}">
-                <a16:creationId xmlns:a16="http://schemas.microsoft.com/office/drawing/2014/main" id="{04A588F2-3001-4070-97A6-B3A109167316}"/>
+                <a16:creationId xmlns:a16="http://schemas.microsoft.com/office/drawing/2014/main" id="{BEE54368-C9D5-450F-8607-D6CBC540BD68}"/>
               </a:ext>
             </a:extLst>
           </p:cNvPr>
@@ -5823,7 +5855,7 @@
             <a:pPr algn="l">
               <a:defRPr sz="1425" b="0">
                 <a:solidFill>
-                  <a:srgbClr val="10213D"/>
+                  <a:srgbClr val="0F1A2B"/>
                 </a:solidFill>
                 <a:latin typeface="Helvetica Neue"/>
                 <a:ea typeface="Helvetica Neue"/>
@@ -5833,7 +5865,7 @@
             <a:r>
               <a:rPr sz="1425" b="0">
                 <a:solidFill>
-                  <a:srgbClr val="10213D"/>
+                  <a:srgbClr val="0F1A2B"/>
                 </a:solidFill>
                 <a:latin typeface="Helvetica Neue"/>
                 <a:ea typeface="Helvetica Neue"/>
@@ -5849,7 +5881,7 @@
           <p:cNvPr id="17" name="">
             <a:extLst xmlns:a="http://schemas.openxmlformats.org/drawingml/2006/main">
               <a:ext uri="{FF2B5EF4-FFF2-40B4-BE49-F238E27FC236}">
-                <a16:creationId xmlns:a16="http://schemas.microsoft.com/office/drawing/2014/main" id="{96FE3C82-7EBC-407E-91BC-87E5157C65A4}"/>
+                <a16:creationId xmlns:a16="http://schemas.microsoft.com/office/drawing/2014/main" id="{0B04B344-BEA6-4388-BFF2-AEB94D508F09}"/>
               </a:ext>
             </a:extLst>
           </p:cNvPr>
@@ -5873,7 +5905,7 @@
           </a:solidFill>
           <a:ln xmlns:a="http://schemas.openxmlformats.org/drawingml/2006/main" w="28575">
             <a:solidFill>
-              <a:srgbClr val="FF7C70"/>
+              <a:srgbClr val="52677D"/>
             </a:solidFill>
           </a:ln>
         </p:spPr>
@@ -5883,7 +5915,7 @@
           <p:cNvPr id="18" name="">
             <a:extLst xmlns:a="http://schemas.openxmlformats.org/drawingml/2006/main">
               <a:ext uri="{FF2B5EF4-FFF2-40B4-BE49-F238E27FC236}">
-                <a16:creationId xmlns:a16="http://schemas.microsoft.com/office/drawing/2014/main" id="{495E9DC3-DA80-4385-B785-B08A5917B616}"/>
+                <a16:creationId xmlns:a16="http://schemas.microsoft.com/office/drawing/2014/main" id="{2B06C0B0-62E0-45F8-9043-AAC27B3E13F3}"/>
               </a:ext>
             </a:extLst>
           </p:cNvPr>
@@ -5903,7 +5935,7 @@
             </a:avLst>
           </a:prstGeom>
           <a:solidFill xmlns:a="http://schemas.openxmlformats.org/drawingml/2006/main">
-            <a:srgbClr val="FF7C70"/>
+            <a:srgbClr val="52677D"/>
           </a:solidFill>
           <a:ln xmlns:a="http://schemas.openxmlformats.org/drawingml/2006/main" w="0">
             <a:noFill/>
@@ -5915,7 +5947,7 @@
           <p:cNvPr id="19" name="">
             <a:extLst xmlns:a="http://schemas.openxmlformats.org/drawingml/2006/main">
               <a:ext uri="{FF2B5EF4-FFF2-40B4-BE49-F238E27FC236}">
-                <a16:creationId xmlns:a16="http://schemas.microsoft.com/office/drawing/2014/main" id="{05C6CBB9-8084-4B8C-88FD-7364299B5DD3}"/>
+                <a16:creationId xmlns:a16="http://schemas.microsoft.com/office/drawing/2014/main" id="{DF04BEC1-910C-459A-8013-52A23F9CE3EC}"/>
               </a:ext>
             </a:extLst>
           </p:cNvPr>
@@ -5972,7 +6004,7 @@
           <p:cNvPr id="20" name="">
             <a:extLst xmlns:a="http://schemas.openxmlformats.org/drawingml/2006/main">
               <a:ext uri="{FF2B5EF4-FFF2-40B4-BE49-F238E27FC236}">
-                <a16:creationId xmlns:a16="http://schemas.microsoft.com/office/drawing/2014/main" id="{36F07644-9FA8-4F34-9552-9DBB09CAD51E}"/>
+                <a16:creationId xmlns:a16="http://schemas.microsoft.com/office/drawing/2014/main" id="{98A4F29C-AB96-4ED2-93CE-65EB9E74B70E}"/>
               </a:ext>
             </a:extLst>
           </p:cNvPr>
@@ -5990,7 +6022,7 @@
             <a:avLst/>
           </a:prstGeom>
           <a:solidFill xmlns:a="http://schemas.openxmlformats.org/drawingml/2006/main">
-            <a:srgbClr val="FF7C70"/>
+            <a:srgbClr val="52677D"/>
           </a:solidFill>
           <a:ln xmlns:a="http://schemas.openxmlformats.org/drawingml/2006/main" w="0">
             <a:noFill/>
@@ -6002,7 +6034,7 @@
           <p:cNvPr id="21" name="">
             <a:extLst xmlns:a="http://schemas.openxmlformats.org/drawingml/2006/main">
               <a:ext uri="{FF2B5EF4-FFF2-40B4-BE49-F238E27FC236}">
-                <a16:creationId xmlns:a16="http://schemas.microsoft.com/office/drawing/2014/main" id="{D1C27F84-6289-438B-BE52-2A3BACE6A571}"/>
+                <a16:creationId xmlns:a16="http://schemas.microsoft.com/office/drawing/2014/main" id="{B99161CA-955A-455F-9D90-3035A0E261C0}"/>
               </a:ext>
             </a:extLst>
           </p:cNvPr>
@@ -6033,7 +6065,7 @@
             <a:pPr algn="l">
               <a:defRPr sz="1425" b="0">
                 <a:solidFill>
-                  <a:srgbClr val="10213D"/>
+                  <a:srgbClr val="0F1A2B"/>
                 </a:solidFill>
                 <a:latin typeface="Helvetica Neue"/>
                 <a:ea typeface="Helvetica Neue"/>
@@ -6043,7 +6075,7 @@
             <a:r>
               <a:rPr sz="1425" b="0">
                 <a:solidFill>
-                  <a:srgbClr val="10213D"/>
+                  <a:srgbClr val="0F1A2B"/>
                 </a:solidFill>
                 <a:latin typeface="Helvetica Neue"/>
                 <a:ea typeface="Helvetica Neue"/>
@@ -6059,7 +6091,7 @@
           <p:cNvPr id="22" name="">
             <a:extLst xmlns:a="http://schemas.openxmlformats.org/drawingml/2006/main">
               <a:ext uri="{FF2B5EF4-FFF2-40B4-BE49-F238E27FC236}">
-                <a16:creationId xmlns:a16="http://schemas.microsoft.com/office/drawing/2014/main" id="{9BCCC45F-5B25-40BA-9FA6-3228BE724FBC}"/>
+                <a16:creationId xmlns:a16="http://schemas.microsoft.com/office/drawing/2014/main" id="{F0FACDB7-0CF8-469A-AC3F-BBF942839DE8}"/>
               </a:ext>
             </a:extLst>
           </p:cNvPr>
@@ -6077,7 +6109,7 @@
             <a:avLst/>
           </a:prstGeom>
           <a:solidFill xmlns:a="http://schemas.openxmlformats.org/drawingml/2006/main">
-            <a:srgbClr val="FF7C70"/>
+            <a:srgbClr val="52677D"/>
           </a:solidFill>
           <a:ln xmlns:a="http://schemas.openxmlformats.org/drawingml/2006/main" w="0">
             <a:noFill/>
@@ -6089,7 +6121,7 @@
           <p:cNvPr id="23" name="">
             <a:extLst xmlns:a="http://schemas.openxmlformats.org/drawingml/2006/main">
               <a:ext uri="{FF2B5EF4-FFF2-40B4-BE49-F238E27FC236}">
-                <a16:creationId xmlns:a16="http://schemas.microsoft.com/office/drawing/2014/main" id="{85FBB38F-D28F-4BF6-8A68-C843F048890A}"/>
+                <a16:creationId xmlns:a16="http://schemas.microsoft.com/office/drawing/2014/main" id="{2500A10B-E1F7-403C-848C-3636667E3433}"/>
               </a:ext>
             </a:extLst>
           </p:cNvPr>
@@ -6120,7 +6152,7 @@
             <a:pPr algn="l">
               <a:defRPr sz="1425" b="0">
                 <a:solidFill>
-                  <a:srgbClr val="10213D"/>
+                  <a:srgbClr val="0F1A2B"/>
                 </a:solidFill>
                 <a:latin typeface="Helvetica Neue"/>
                 <a:ea typeface="Helvetica Neue"/>
@@ -6130,7 +6162,7 @@
             <a:r>
               <a:rPr sz="1425" b="0">
                 <a:solidFill>
-                  <a:srgbClr val="10213D"/>
+                  <a:srgbClr val="0F1A2B"/>
                 </a:solidFill>
                 <a:latin typeface="Helvetica Neue"/>
                 <a:ea typeface="Helvetica Neue"/>
@@ -6146,7 +6178,7 @@
           <p:cNvPr id="24" name="">
             <a:extLst xmlns:a="http://schemas.openxmlformats.org/drawingml/2006/main">
               <a:ext uri="{FF2B5EF4-FFF2-40B4-BE49-F238E27FC236}">
-                <a16:creationId xmlns:a16="http://schemas.microsoft.com/office/drawing/2014/main" id="{6ADBBB44-0D5A-4D52-9E8B-A55F1CB7D238}"/>
+                <a16:creationId xmlns:a16="http://schemas.microsoft.com/office/drawing/2014/main" id="{8A4CDED2-1AA4-4C49-A7D3-454CC865D331}"/>
               </a:ext>
             </a:extLst>
           </p:cNvPr>
@@ -6164,7 +6196,7 @@
             <a:avLst/>
           </a:prstGeom>
           <a:solidFill xmlns:a="http://schemas.openxmlformats.org/drawingml/2006/main">
-            <a:srgbClr val="FF7C70"/>
+            <a:srgbClr val="52677D"/>
           </a:solidFill>
           <a:ln xmlns:a="http://schemas.openxmlformats.org/drawingml/2006/main" w="0">
             <a:noFill/>
@@ -6176,7 +6208,7 @@
           <p:cNvPr id="25" name="">
             <a:extLst xmlns:a="http://schemas.openxmlformats.org/drawingml/2006/main">
               <a:ext uri="{FF2B5EF4-FFF2-40B4-BE49-F238E27FC236}">
-                <a16:creationId xmlns:a16="http://schemas.microsoft.com/office/drawing/2014/main" id="{45191704-0EFB-45B3-9B92-6EB0D5EE9FF6}"/>
+                <a16:creationId xmlns:a16="http://schemas.microsoft.com/office/drawing/2014/main" id="{DCF10F93-6283-4EE6-9B8D-94EA1ECC6734}"/>
               </a:ext>
             </a:extLst>
           </p:cNvPr>
@@ -6207,7 +6239,7 @@
             <a:pPr algn="l">
               <a:defRPr sz="1425" b="0">
                 <a:solidFill>
-                  <a:srgbClr val="10213D"/>
+                  <a:srgbClr val="0F1A2B"/>
                 </a:solidFill>
                 <a:latin typeface="Helvetica Neue"/>
                 <a:ea typeface="Helvetica Neue"/>
@@ -6217,7 +6249,7 @@
             <a:r>
               <a:rPr sz="1425" b="0">
                 <a:solidFill>
-                  <a:srgbClr val="10213D"/>
+                  <a:srgbClr val="0F1A2B"/>
                 </a:solidFill>
                 <a:latin typeface="Helvetica Neue"/>
                 <a:ea typeface="Helvetica Neue"/>
@@ -6233,7 +6265,7 @@
           <p:cNvPr id="26" name="">
             <a:extLst xmlns:a="http://schemas.openxmlformats.org/drawingml/2006/main">
               <a:ext uri="{FF2B5EF4-FFF2-40B4-BE49-F238E27FC236}">
-                <a16:creationId xmlns:a16="http://schemas.microsoft.com/office/drawing/2014/main" id="{FEAC27FD-F29C-4EC6-ADBE-E03738DB166B}"/>
+                <a16:creationId xmlns:a16="http://schemas.microsoft.com/office/drawing/2014/main" id="{9D32E9B7-579C-49ED-B947-519EEB64142E}"/>
               </a:ext>
             </a:extLst>
           </p:cNvPr>
@@ -6251,7 +6283,7 @@
             <a:avLst/>
           </a:prstGeom>
           <a:solidFill xmlns:a="http://schemas.openxmlformats.org/drawingml/2006/main">
-            <a:srgbClr val="FF7C70"/>
+            <a:srgbClr val="52677D"/>
           </a:solidFill>
           <a:ln xmlns:a="http://schemas.openxmlformats.org/drawingml/2006/main" w="0">
             <a:noFill/>
@@ -6263,7 +6295,7 @@
           <p:cNvPr id="27" name="">
             <a:extLst xmlns:a="http://schemas.openxmlformats.org/drawingml/2006/main">
               <a:ext uri="{FF2B5EF4-FFF2-40B4-BE49-F238E27FC236}">
-                <a16:creationId xmlns:a16="http://schemas.microsoft.com/office/drawing/2014/main" id="{01722E0D-8262-4F96-9FD8-CA5DF9F30D3D}"/>
+                <a16:creationId xmlns:a16="http://schemas.microsoft.com/office/drawing/2014/main" id="{3F8C6C05-D61F-454A-B742-AF23BB8C6931}"/>
               </a:ext>
             </a:extLst>
           </p:cNvPr>
@@ -6294,7 +6326,7 @@
             <a:pPr algn="l">
               <a:defRPr sz="1425" b="0">
                 <a:solidFill>
-                  <a:srgbClr val="10213D"/>
+                  <a:srgbClr val="0F1A2B"/>
                 </a:solidFill>
                 <a:latin typeface="Helvetica Neue"/>
                 <a:ea typeface="Helvetica Neue"/>
@@ -6304,7 +6336,7 @@
             <a:r>
               <a:rPr sz="1425" b="0">
                 <a:solidFill>
-                  <a:srgbClr val="10213D"/>
+                  <a:srgbClr val="0F1A2B"/>
                 </a:solidFill>
                 <a:latin typeface="Helvetica Neue"/>
                 <a:ea typeface="Helvetica Neue"/>
@@ -6320,7 +6352,7 @@
           <p:cNvPr id="28" name="">
             <a:extLst xmlns:a="http://schemas.openxmlformats.org/drawingml/2006/main">
               <a:ext uri="{FF2B5EF4-FFF2-40B4-BE49-F238E27FC236}">
-                <a16:creationId xmlns:a16="http://schemas.microsoft.com/office/drawing/2014/main" id="{E80250CE-9D30-4F92-860C-06288DFE69F1}"/>
+                <a16:creationId xmlns:a16="http://schemas.microsoft.com/office/drawing/2014/main" id="{77A0C71A-F67E-454E-8858-B33157DF30B6}"/>
               </a:ext>
             </a:extLst>
           </p:cNvPr>
@@ -6338,7 +6370,7 @@
             <a:avLst/>
           </a:prstGeom>
           <a:solidFill xmlns:a="http://schemas.openxmlformats.org/drawingml/2006/main">
-            <a:srgbClr val="FF7C70"/>
+            <a:srgbClr val="52677D"/>
           </a:solidFill>
           <a:ln xmlns:a="http://schemas.openxmlformats.org/drawingml/2006/main" w="0">
             <a:noFill/>
@@ -6350,7 +6382,7 @@
           <p:cNvPr id="29" name="">
             <a:extLst xmlns:a="http://schemas.openxmlformats.org/drawingml/2006/main">
               <a:ext uri="{FF2B5EF4-FFF2-40B4-BE49-F238E27FC236}">
-                <a16:creationId xmlns:a16="http://schemas.microsoft.com/office/drawing/2014/main" id="{DC10C243-021E-44DC-B27C-F9B8FB21F30C}"/>
+                <a16:creationId xmlns:a16="http://schemas.microsoft.com/office/drawing/2014/main" id="{963BAB99-D1D4-4D94-942B-866D8DBA299E}"/>
               </a:ext>
             </a:extLst>
           </p:cNvPr>
@@ -6381,7 +6413,7 @@
             <a:pPr algn="l">
               <a:defRPr sz="1425" b="0">
                 <a:solidFill>
-                  <a:srgbClr val="10213D"/>
+                  <a:srgbClr val="0F1A2B"/>
                 </a:solidFill>
                 <a:latin typeface="Helvetica Neue"/>
                 <a:ea typeface="Helvetica Neue"/>
@@ -6391,7 +6423,7 @@
             <a:r>
               <a:rPr sz="1425" b="0">
                 <a:solidFill>
-                  <a:srgbClr val="10213D"/>
+                  <a:srgbClr val="0F1A2B"/>
                 </a:solidFill>
                 <a:latin typeface="Helvetica Neue"/>
                 <a:ea typeface="Helvetica Neue"/>
@@ -6407,7 +6439,7 @@
           <p:cNvPr id="30" name="">
             <a:extLst xmlns:a="http://schemas.openxmlformats.org/drawingml/2006/main">
               <a:ext uri="{FF2B5EF4-FFF2-40B4-BE49-F238E27FC236}">
-                <a16:creationId xmlns:a16="http://schemas.microsoft.com/office/drawing/2014/main" id="{6C601618-761D-42F3-AF13-583492B6C7E5}"/>
+                <a16:creationId xmlns:a16="http://schemas.microsoft.com/office/drawing/2014/main" id="{BAFB94B0-8DD7-46F9-8154-FF358C895748}"/>
               </a:ext>
             </a:extLst>
           </p:cNvPr>
@@ -6425,7 +6457,7 @@
             <a:avLst/>
           </a:prstGeom>
           <a:solidFill xmlns:a="http://schemas.openxmlformats.org/drawingml/2006/main">
-            <a:srgbClr val="D8E5F2"/>
+            <a:srgbClr val="BDC4D4"/>
           </a:solidFill>
           <a:ln xmlns:a="http://schemas.openxmlformats.org/drawingml/2006/main" w="0">
             <a:noFill/>
@@ -6437,7 +6469,7 @@
           <p:cNvPr id="31" name="">
             <a:extLst xmlns:a="http://schemas.openxmlformats.org/drawingml/2006/main">
               <a:ext uri="{FF2B5EF4-FFF2-40B4-BE49-F238E27FC236}">
-                <a16:creationId xmlns:a16="http://schemas.microsoft.com/office/drawing/2014/main" id="{C4303943-9F70-4D3F-B24F-B8EC075EE972}"/>
+                <a16:creationId xmlns:a16="http://schemas.microsoft.com/office/drawing/2014/main" id="{927141CC-8D6B-464E-B8F8-3D26D1390228}"/>
               </a:ext>
             </a:extLst>
           </p:cNvPr>
@@ -6468,7 +6500,7 @@
             <a:pPr algn="l">
               <a:defRPr sz="750" b="0">
                 <a:solidFill>
-                  <a:srgbClr val="61718A"/>
+                  <a:srgbClr val="52677D"/>
                 </a:solidFill>
                 <a:latin typeface="Helvetica Neue"/>
                 <a:ea typeface="Helvetica Neue"/>
@@ -6478,7 +6510,7 @@
             <a:r>
               <a:rPr sz="750" b="0">
                 <a:solidFill>
-                  <a:srgbClr val="61718A"/>
+                  <a:srgbClr val="52677D"/>
                 </a:solidFill>
                 <a:latin typeface="Helvetica Neue"/>
                 <a:ea typeface="Helvetica Neue"/>
@@ -6494,7 +6526,7 @@
           <p:cNvPr id="32" name="">
             <a:extLst xmlns:a="http://schemas.openxmlformats.org/drawingml/2006/main">
               <a:ext uri="{FF2B5EF4-FFF2-40B4-BE49-F238E27FC236}">
-                <a16:creationId xmlns:a16="http://schemas.microsoft.com/office/drawing/2014/main" id="{BA5953C7-4529-434F-BE41-4123840FABCB}"/>
+                <a16:creationId xmlns:a16="http://schemas.microsoft.com/office/drawing/2014/main" id="{0F230530-6F21-4AB5-B635-ADB1885CC17F}"/>
               </a:ext>
             </a:extLst>
           </p:cNvPr>
@@ -6525,7 +6557,7 @@
             <a:pPr algn="r">
               <a:defRPr sz="825" b="1">
                 <a:solidFill>
-                  <a:srgbClr val="2563EB"/>
+                  <a:srgbClr val="52677D"/>
                 </a:solidFill>
                 <a:latin typeface="Helvetica Neue"/>
                 <a:ea typeface="Helvetica Neue"/>
@@ -6535,7 +6567,7 @@
             <a:r>
               <a:rPr sz="825" b="1">
                 <a:solidFill>
-                  <a:srgbClr val="2563EB"/>
+                  <a:srgbClr val="52677D"/>
                 </a:solidFill>
                 <a:latin typeface="Helvetica Neue"/>
                 <a:ea typeface="Helvetica Neue"/>
@@ -6549,7 +6581,7 @@
     </p:spTree>
     <p:extLst>
       <p:ext uri="{BB962C8B-B14F-4D97-AF65-F5344CB8AC3E}">
-        <p14:creationId xmlns:p14="http://schemas.microsoft.com/office/powerpoint/2010/main" val="2145636531"/>
+        <p14:creationId xmlns:p14="http://schemas.microsoft.com/office/powerpoint/2010/main" val="1569495031"/>
       </p:ext>
     </p:extLst>
   </p:cSld>
@@ -6580,7 +6612,7 @@
           <p:cNvPr id="24" name="">
             <a:extLst xmlns:a="http://schemas.openxmlformats.org/drawingml/2006/main">
               <a:ext uri="{FF2B5EF4-FFF2-40B4-BE49-F238E27FC236}">
-                <a16:creationId xmlns:a16="http://schemas.microsoft.com/office/drawing/2014/main" id="{6FAE0DBF-485C-4204-AF50-5D69FFB30345}"/>
+                <a16:creationId xmlns:a16="http://schemas.microsoft.com/office/drawing/2014/main" id="{AE9D0D6D-2CE2-448F-882A-071E52F1C1D6}"/>
               </a:ext>
             </a:extLst>
           </p:cNvPr>
@@ -6598,7 +6630,7 @@
             <a:avLst/>
           </a:prstGeom>
           <a:solidFill xmlns:a="http://schemas.openxmlformats.org/drawingml/2006/main">
-            <a:srgbClr val="2563EB"/>
+            <a:srgbClr val="1C2E4A"/>
           </a:solidFill>
           <a:ln xmlns:a="http://schemas.openxmlformats.org/drawingml/2006/main" w="0">
             <a:noFill/>
@@ -6610,7 +6642,7 @@
           <p:cNvPr id="2" name="">
             <a:extLst xmlns:a="http://schemas.openxmlformats.org/drawingml/2006/main">
               <a:ext uri="{FF2B5EF4-FFF2-40B4-BE49-F238E27FC236}">
-                <a16:creationId xmlns:a16="http://schemas.microsoft.com/office/drawing/2014/main" id="{5C7D59F1-E02B-4BE8-85D1-2A43A8499B75}"/>
+                <a16:creationId xmlns:a16="http://schemas.microsoft.com/office/drawing/2014/main" id="{A384C649-3320-4406-8F38-D343F345CE7F}"/>
               </a:ext>
             </a:extLst>
           </p:cNvPr>
@@ -6641,7 +6673,7 @@
             <a:pPr algn="l">
               <a:defRPr sz="1125" b="1">
                 <a:solidFill>
-                  <a:srgbClr val="2563EB"/>
+                  <a:srgbClr val="52677D"/>
                 </a:solidFill>
                 <a:latin typeface="Helvetica Neue"/>
                 <a:ea typeface="Helvetica Neue"/>
@@ -6651,7 +6683,7 @@
             <a:r>
               <a:rPr sz="1125" b="1">
                 <a:solidFill>
-                  <a:srgbClr val="2563EB"/>
+                  <a:srgbClr val="52677D"/>
                 </a:solidFill>
                 <a:latin typeface="Helvetica Neue"/>
                 <a:ea typeface="Helvetica Neue"/>
@@ -6667,7 +6699,7 @@
           <p:cNvPr id="3" name="">
             <a:extLst xmlns:a="http://schemas.openxmlformats.org/drawingml/2006/main">
               <a:ext uri="{FF2B5EF4-FFF2-40B4-BE49-F238E27FC236}">
-                <a16:creationId xmlns:a16="http://schemas.microsoft.com/office/drawing/2014/main" id="{054093C7-720C-48AC-A8A4-412811A59581}"/>
+                <a16:creationId xmlns:a16="http://schemas.microsoft.com/office/drawing/2014/main" id="{9A248654-8A77-4C9F-9568-DA5B17ADBE15}"/>
               </a:ext>
             </a:extLst>
           </p:cNvPr>
@@ -6687,7 +6719,7 @@
             </a:avLst>
           </a:prstGeom>
           <a:solidFill xmlns:a="http://schemas.openxmlformats.org/drawingml/2006/main">
-            <a:srgbClr val="FFD43B"/>
+            <a:srgbClr val="D1CFC9"/>
           </a:solidFill>
           <a:ln xmlns:a="http://schemas.openxmlformats.org/drawingml/2006/main" w="0">
             <a:noFill/>
@@ -6699,7 +6731,7 @@
           <p:cNvPr id="4" name="">
             <a:extLst xmlns:a="http://schemas.openxmlformats.org/drawingml/2006/main">
               <a:ext uri="{FF2B5EF4-FFF2-40B4-BE49-F238E27FC236}">
-                <a16:creationId xmlns:a16="http://schemas.microsoft.com/office/drawing/2014/main" id="{0BBD8AE7-8333-4DE2-8CDD-75A495B9FE59}"/>
+                <a16:creationId xmlns:a16="http://schemas.microsoft.com/office/drawing/2014/main" id="{460683EF-5EE1-430F-A667-1B8372615035}"/>
               </a:ext>
             </a:extLst>
           </p:cNvPr>
@@ -6730,7 +6762,7 @@
             <a:pPr algn="ctr">
               <a:defRPr sz="1275" b="1">
                 <a:solidFill>
-                  <a:srgbClr val="092454"/>
+                  <a:srgbClr val="1C2E4A"/>
                 </a:solidFill>
                 <a:latin typeface="Helvetica Neue"/>
                 <a:ea typeface="Helvetica Neue"/>
@@ -6740,7 +6772,7 @@
             <a:r>
               <a:rPr sz="1275" b="1">
                 <a:solidFill>
-                  <a:srgbClr val="092454"/>
+                  <a:srgbClr val="1C2E4A"/>
                 </a:solidFill>
                 <a:latin typeface="Helvetica Neue"/>
                 <a:ea typeface="Helvetica Neue"/>
@@ -6756,7 +6788,7 @@
           <p:cNvPr id="5" name="">
             <a:extLst xmlns:a="http://schemas.openxmlformats.org/drawingml/2006/main">
               <a:ext uri="{FF2B5EF4-FFF2-40B4-BE49-F238E27FC236}">
-                <a16:creationId xmlns:a16="http://schemas.microsoft.com/office/drawing/2014/main" id="{66BD89F1-6912-4E1A-A4BA-104B21852B1C}"/>
+                <a16:creationId xmlns:a16="http://schemas.microsoft.com/office/drawing/2014/main" id="{B56C508F-B089-421D-BF18-59D88640C95D}"/>
               </a:ext>
             </a:extLst>
           </p:cNvPr>
@@ -6787,7 +6819,7 @@
             <a:pPr algn="l">
               <a:defRPr sz="2850" b="1">
                 <a:solidFill>
-                  <a:srgbClr val="092454"/>
+                  <a:srgbClr val="1C2E4A"/>
                 </a:solidFill>
                 <a:latin typeface="Helvetica Neue"/>
                 <a:ea typeface="Helvetica Neue"/>
@@ -6797,7 +6829,7 @@
             <a:r>
               <a:rPr sz="2850" b="1">
                 <a:solidFill>
-                  <a:srgbClr val="092454"/>
+                  <a:srgbClr val="1C2E4A"/>
                 </a:solidFill>
                 <a:latin typeface="Helvetica Neue"/>
                 <a:ea typeface="Helvetica Neue"/>
@@ -6813,7 +6845,7 @@
           <p:cNvPr id="6" name="">
             <a:extLst xmlns:a="http://schemas.openxmlformats.org/drawingml/2006/main">
               <a:ext uri="{FF2B5EF4-FFF2-40B4-BE49-F238E27FC236}">
-                <a16:creationId xmlns:a16="http://schemas.microsoft.com/office/drawing/2014/main" id="{567CD8AE-4219-45BB-8620-4246C9395BD4}"/>
+                <a16:creationId xmlns:a16="http://schemas.microsoft.com/office/drawing/2014/main" id="{E15670CF-3559-44EE-81DB-30E4CED049E2}"/>
               </a:ext>
             </a:extLst>
           </p:cNvPr>
@@ -6833,7 +6865,7 @@
             </a:avLst>
           </a:prstGeom>
           <a:solidFill xmlns:a="http://schemas.openxmlformats.org/drawingml/2006/main">
-            <a:srgbClr val="EEF7FF"/>
+            <a:srgbClr val="D1CFC9"/>
           </a:solidFill>
           <a:ln xmlns:a="http://schemas.openxmlformats.org/drawingml/2006/main" w="0">
             <a:noFill/>
@@ -6845,7 +6877,7 @@
           <p:cNvPr id="7" name="">
             <a:extLst xmlns:a="http://schemas.openxmlformats.org/drawingml/2006/main">
               <a:ext uri="{FF2B5EF4-FFF2-40B4-BE49-F238E27FC236}">
-                <a16:creationId xmlns:a16="http://schemas.microsoft.com/office/drawing/2014/main" id="{2AFAEE98-766F-4189-9F7D-4478E1E0947D}"/>
+                <a16:creationId xmlns:a16="http://schemas.microsoft.com/office/drawing/2014/main" id="{580A7BF8-DE34-49DE-8ACE-EA9825240156}"/>
               </a:ext>
             </a:extLst>
           </p:cNvPr>
@@ -6876,7 +6908,7 @@
             <a:pPr algn="ctr">
               <a:defRPr sz="1350" b="1">
                 <a:solidFill>
-                  <a:srgbClr val="2563EB"/>
+                  <a:srgbClr val="52677D"/>
                 </a:solidFill>
                 <a:latin typeface="Helvetica Neue"/>
                 <a:ea typeface="Helvetica Neue"/>
@@ -6886,7 +6918,7 @@
             <a:r>
               <a:rPr sz="1350" b="1">
                 <a:solidFill>
-                  <a:srgbClr val="2563EB"/>
+                  <a:srgbClr val="52677D"/>
                 </a:solidFill>
                 <a:latin typeface="Helvetica Neue"/>
                 <a:ea typeface="Helvetica Neue"/>
@@ -6902,7 +6934,7 @@
           <p:cNvPr id="8" name="">
             <a:extLst xmlns:a="http://schemas.openxmlformats.org/drawingml/2006/main">
               <a:ext uri="{FF2B5EF4-FFF2-40B4-BE49-F238E27FC236}">
-                <a16:creationId xmlns:a16="http://schemas.microsoft.com/office/drawing/2014/main" id="{B74A53C2-C656-4FC5-9894-8C02FC554FAE}"/>
+                <a16:creationId xmlns:a16="http://schemas.microsoft.com/office/drawing/2014/main" id="{0EA123AF-B4B7-482F-9192-C5FF3F2BC9B4}"/>
               </a:ext>
             </a:extLst>
           </p:cNvPr>
@@ -6933,7 +6965,7 @@
             <a:pPr algn="l">
               <a:defRPr sz="1575" b="0">
                 <a:solidFill>
-                  <a:srgbClr val="10213D"/>
+                  <a:srgbClr val="0F1A2B"/>
                 </a:solidFill>
                 <a:latin typeface="Helvetica Neue"/>
                 <a:ea typeface="Helvetica Neue"/>
@@ -6943,7 +6975,7 @@
             <a:r>
               <a:rPr sz="1575" b="0">
                 <a:solidFill>
-                  <a:srgbClr val="10213D"/>
+                  <a:srgbClr val="0F1A2B"/>
                 </a:solidFill>
                 <a:latin typeface="Helvetica Neue"/>
                 <a:ea typeface="Helvetica Neue"/>
@@ -6959,7 +6991,7 @@
           <p:cNvPr id="9" name="">
             <a:extLst xmlns:a="http://schemas.openxmlformats.org/drawingml/2006/main">
               <a:ext uri="{FF2B5EF4-FFF2-40B4-BE49-F238E27FC236}">
-                <a16:creationId xmlns:a16="http://schemas.microsoft.com/office/drawing/2014/main" id="{8F97D125-146D-456C-8CDA-C287E5167670}"/>
+                <a16:creationId xmlns:a16="http://schemas.microsoft.com/office/drawing/2014/main" id="{483F8007-6319-4E12-A34C-004AC73DE7E2}"/>
               </a:ext>
             </a:extLst>
           </p:cNvPr>
@@ -6979,7 +7011,7 @@
             </a:avLst>
           </a:prstGeom>
           <a:solidFill xmlns:a="http://schemas.openxmlformats.org/drawingml/2006/main">
-            <a:srgbClr val="EEF7FF"/>
+            <a:srgbClr val="D1CFC9"/>
           </a:solidFill>
           <a:ln xmlns:a="http://schemas.openxmlformats.org/drawingml/2006/main" w="0">
             <a:noFill/>
@@ -6991,7 +7023,7 @@
           <p:cNvPr id="10" name="">
             <a:extLst xmlns:a="http://schemas.openxmlformats.org/drawingml/2006/main">
               <a:ext uri="{FF2B5EF4-FFF2-40B4-BE49-F238E27FC236}">
-                <a16:creationId xmlns:a16="http://schemas.microsoft.com/office/drawing/2014/main" id="{3055D943-D039-4551-B9FE-521F56BD790C}"/>
+                <a16:creationId xmlns:a16="http://schemas.microsoft.com/office/drawing/2014/main" id="{13CEB047-D835-41DC-A78E-8E7E64166B5B}"/>
               </a:ext>
             </a:extLst>
           </p:cNvPr>
@@ -7022,7 +7054,7 @@
             <a:pPr algn="ctr">
               <a:defRPr sz="1350" b="1">
                 <a:solidFill>
-                  <a:srgbClr val="2563EB"/>
+                  <a:srgbClr val="52677D"/>
                 </a:solidFill>
                 <a:latin typeface="Helvetica Neue"/>
                 <a:ea typeface="Helvetica Neue"/>
@@ -7032,7 +7064,7 @@
             <a:r>
               <a:rPr sz="1350" b="1">
                 <a:solidFill>
-                  <a:srgbClr val="2563EB"/>
+                  <a:srgbClr val="52677D"/>
                 </a:solidFill>
                 <a:latin typeface="Helvetica Neue"/>
                 <a:ea typeface="Helvetica Neue"/>
@@ -7048,7 +7080,7 @@
           <p:cNvPr id="11" name="">
             <a:extLst xmlns:a="http://schemas.openxmlformats.org/drawingml/2006/main">
               <a:ext uri="{FF2B5EF4-FFF2-40B4-BE49-F238E27FC236}">
-                <a16:creationId xmlns:a16="http://schemas.microsoft.com/office/drawing/2014/main" id="{B9CF735C-9F51-496E-9AE1-EB79C224C11F}"/>
+                <a16:creationId xmlns:a16="http://schemas.microsoft.com/office/drawing/2014/main" id="{F047917E-70C4-4A47-BB66-07BDA14947B2}"/>
               </a:ext>
             </a:extLst>
           </p:cNvPr>
@@ -7079,7 +7111,7 @@
             <a:pPr algn="l">
               <a:defRPr sz="1575" b="0">
                 <a:solidFill>
-                  <a:srgbClr val="10213D"/>
+                  <a:srgbClr val="0F1A2B"/>
                 </a:solidFill>
                 <a:latin typeface="Helvetica Neue"/>
                 <a:ea typeface="Helvetica Neue"/>
@@ -7089,7 +7121,7 @@
             <a:r>
               <a:rPr sz="1575" b="0">
                 <a:solidFill>
-                  <a:srgbClr val="10213D"/>
+                  <a:srgbClr val="0F1A2B"/>
                 </a:solidFill>
                 <a:latin typeface="Helvetica Neue"/>
                 <a:ea typeface="Helvetica Neue"/>
@@ -7105,7 +7137,7 @@
           <p:cNvPr id="12" name="">
             <a:extLst xmlns:a="http://schemas.openxmlformats.org/drawingml/2006/main">
               <a:ext uri="{FF2B5EF4-FFF2-40B4-BE49-F238E27FC236}">
-                <a16:creationId xmlns:a16="http://schemas.microsoft.com/office/drawing/2014/main" id="{9F3AAD2E-1AFD-48E3-9578-0797E9973C5E}"/>
+                <a16:creationId xmlns:a16="http://schemas.microsoft.com/office/drawing/2014/main" id="{026559EF-5A65-471F-93CA-235F2BFF1F69}"/>
               </a:ext>
             </a:extLst>
           </p:cNvPr>
@@ -7125,7 +7157,7 @@
             </a:avLst>
           </a:prstGeom>
           <a:solidFill xmlns:a="http://schemas.openxmlformats.org/drawingml/2006/main">
-            <a:srgbClr val="EEF7FF"/>
+            <a:srgbClr val="D1CFC9"/>
           </a:solidFill>
           <a:ln xmlns:a="http://schemas.openxmlformats.org/drawingml/2006/main" w="0">
             <a:noFill/>
@@ -7137,7 +7169,7 @@
           <p:cNvPr id="13" name="">
             <a:extLst xmlns:a="http://schemas.openxmlformats.org/drawingml/2006/main">
               <a:ext uri="{FF2B5EF4-FFF2-40B4-BE49-F238E27FC236}">
-                <a16:creationId xmlns:a16="http://schemas.microsoft.com/office/drawing/2014/main" id="{B8381B40-F13B-4545-A426-28EDCF301030}"/>
+                <a16:creationId xmlns:a16="http://schemas.microsoft.com/office/drawing/2014/main" id="{21CD250F-1C42-4194-B28A-77E01692ED02}"/>
               </a:ext>
             </a:extLst>
           </p:cNvPr>
@@ -7168,7 +7200,7 @@
             <a:pPr algn="ctr">
               <a:defRPr sz="1350" b="1">
                 <a:solidFill>
-                  <a:srgbClr val="2563EB"/>
+                  <a:srgbClr val="52677D"/>
                 </a:solidFill>
                 <a:latin typeface="Helvetica Neue"/>
                 <a:ea typeface="Helvetica Neue"/>
@@ -7178,7 +7210,7 @@
             <a:r>
               <a:rPr sz="1350" b="1">
                 <a:solidFill>
-                  <a:srgbClr val="2563EB"/>
+                  <a:srgbClr val="52677D"/>
                 </a:solidFill>
                 <a:latin typeface="Helvetica Neue"/>
                 <a:ea typeface="Helvetica Neue"/>
@@ -7194,7 +7226,7 @@
           <p:cNvPr id="14" name="">
             <a:extLst xmlns:a="http://schemas.openxmlformats.org/drawingml/2006/main">
               <a:ext uri="{FF2B5EF4-FFF2-40B4-BE49-F238E27FC236}">
-                <a16:creationId xmlns:a16="http://schemas.microsoft.com/office/drawing/2014/main" id="{605DA1FE-0FE2-4185-8A09-332F35958858}"/>
+                <a16:creationId xmlns:a16="http://schemas.microsoft.com/office/drawing/2014/main" id="{93A0338D-B338-4E74-8184-D69C4C1A4762}"/>
               </a:ext>
             </a:extLst>
           </p:cNvPr>
@@ -7225,7 +7257,7 @@
             <a:pPr algn="l">
               <a:defRPr sz="1575" b="0">
                 <a:solidFill>
-                  <a:srgbClr val="10213D"/>
+                  <a:srgbClr val="0F1A2B"/>
                 </a:solidFill>
                 <a:latin typeface="Helvetica Neue"/>
                 <a:ea typeface="Helvetica Neue"/>
@@ -7235,7 +7267,7 @@
             <a:r>
               <a:rPr sz="1575" b="0">
                 <a:solidFill>
-                  <a:srgbClr val="10213D"/>
+                  <a:srgbClr val="0F1A2B"/>
                 </a:solidFill>
                 <a:latin typeface="Helvetica Neue"/>
                 <a:ea typeface="Helvetica Neue"/>
@@ -7251,7 +7283,7 @@
           <p:cNvPr id="15" name="">
             <a:extLst xmlns:a="http://schemas.openxmlformats.org/drawingml/2006/main">
               <a:ext uri="{FF2B5EF4-FFF2-40B4-BE49-F238E27FC236}">
-                <a16:creationId xmlns:a16="http://schemas.microsoft.com/office/drawing/2014/main" id="{54773DB0-178E-4702-BDA2-A6B6F765FAAC}"/>
+                <a16:creationId xmlns:a16="http://schemas.microsoft.com/office/drawing/2014/main" id="{A6767AA2-9474-4378-96D7-14C8741B6627}"/>
               </a:ext>
             </a:extLst>
           </p:cNvPr>
@@ -7271,7 +7303,7 @@
             </a:avLst>
           </a:prstGeom>
           <a:solidFill xmlns:a="http://schemas.openxmlformats.org/drawingml/2006/main">
-            <a:srgbClr val="EEF7FF"/>
+            <a:srgbClr val="D1CFC9"/>
           </a:solidFill>
           <a:ln xmlns:a="http://schemas.openxmlformats.org/drawingml/2006/main" w="0">
             <a:noFill/>
@@ -7283,7 +7315,7 @@
           <p:cNvPr id="16" name="">
             <a:extLst xmlns:a="http://schemas.openxmlformats.org/drawingml/2006/main">
               <a:ext uri="{FF2B5EF4-FFF2-40B4-BE49-F238E27FC236}">
-                <a16:creationId xmlns:a16="http://schemas.microsoft.com/office/drawing/2014/main" id="{4AAA5128-AEF6-4EDC-8FF2-20FFED9C4AFA}"/>
+                <a16:creationId xmlns:a16="http://schemas.microsoft.com/office/drawing/2014/main" id="{07730A6E-F6C9-4E5F-8F2B-E57654981183}"/>
               </a:ext>
             </a:extLst>
           </p:cNvPr>
@@ -7314,7 +7346,7 @@
             <a:pPr algn="l">
               <a:defRPr sz="1125" b="0">
                 <a:solidFill>
-                  <a:srgbClr val="092454"/>
+                  <a:srgbClr val="1C2E4A"/>
                 </a:solidFill>
                 <a:latin typeface="Helvetica Neue"/>
                 <a:ea typeface="Helvetica Neue"/>
@@ -7324,7 +7356,7 @@
             <a:r>
               <a:rPr sz="1125" b="0">
                 <a:solidFill>
-                  <a:srgbClr val="092454"/>
+                  <a:srgbClr val="1C2E4A"/>
                 </a:solidFill>
                 <a:latin typeface="Helvetica Neue"/>
                 <a:ea typeface="Helvetica Neue"/>
@@ -7340,7 +7372,7 @@
           <p:cNvPr id="17" name="">
             <a:extLst xmlns:a="http://schemas.openxmlformats.org/drawingml/2006/main">
               <a:ext uri="{FF2B5EF4-FFF2-40B4-BE49-F238E27FC236}">
-                <a16:creationId xmlns:a16="http://schemas.microsoft.com/office/drawing/2014/main" id="{776608E2-3D7D-4F91-A219-2FA2376786EE}"/>
+                <a16:creationId xmlns:a16="http://schemas.microsoft.com/office/drawing/2014/main" id="{D27828B8-6338-4046-B700-447D56470915}"/>
               </a:ext>
             </a:extLst>
           </p:cNvPr>
@@ -7360,7 +7392,7 @@
             </a:avLst>
           </a:prstGeom>
           <a:solidFill xmlns:a="http://schemas.openxmlformats.org/drawingml/2006/main">
-            <a:srgbClr val="092454"/>
+            <a:srgbClr val="1C2E4A"/>
           </a:solidFill>
           <a:ln xmlns:a="http://schemas.openxmlformats.org/drawingml/2006/main" w="0">
             <a:noFill/>
@@ -7372,7 +7404,7 @@
           <p:cNvPr id="18" name="">
             <a:extLst xmlns:a="http://schemas.openxmlformats.org/drawingml/2006/main">
               <a:ext uri="{FF2B5EF4-FFF2-40B4-BE49-F238E27FC236}">
-                <a16:creationId xmlns:a16="http://schemas.microsoft.com/office/drawing/2014/main" id="{3BC09C71-203E-4140-89C2-7178811A1836}"/>
+                <a16:creationId xmlns:a16="http://schemas.microsoft.com/office/drawing/2014/main" id="{452E80B8-E1C3-414E-867B-5B1B49F4E401}"/>
               </a:ext>
             </a:extLst>
           </p:cNvPr>
@@ -7403,7 +7435,7 @@
             <a:pPr algn="l">
               <a:defRPr sz="1050" b="1">
                 <a:solidFill>
-                  <a:srgbClr val="FFD43B"/>
+                  <a:srgbClr val="D1CFC9"/>
                 </a:solidFill>
                 <a:latin typeface="Helvetica Neue"/>
                 <a:ea typeface="Helvetica Neue"/>
@@ -7413,7 +7445,7 @@
             <a:r>
               <a:rPr sz="1050" b="1">
                 <a:solidFill>
-                  <a:srgbClr val="FFD43B"/>
+                  <a:srgbClr val="D1CFC9"/>
                 </a:solidFill>
                 <a:latin typeface="Helvetica Neue"/>
                 <a:ea typeface="Helvetica Neue"/>
@@ -7429,7 +7461,7 @@
           <p:cNvPr id="19" name="">
             <a:extLst xmlns:a="http://schemas.openxmlformats.org/drawingml/2006/main">
               <a:ext uri="{FF2B5EF4-FFF2-40B4-BE49-F238E27FC236}">
-                <a16:creationId xmlns:a16="http://schemas.microsoft.com/office/drawing/2014/main" id="{B03743EB-651E-4E7A-BB03-C64E53F5F3B8}"/>
+                <a16:creationId xmlns:a16="http://schemas.microsoft.com/office/drawing/2014/main" id="{512244EC-4325-48C2-BD4D-68167E93B31C}"/>
               </a:ext>
             </a:extLst>
           </p:cNvPr>
@@ -7486,7 +7518,7 @@
           <p:cNvPr id="20" name="">
             <a:extLst xmlns:a="http://schemas.openxmlformats.org/drawingml/2006/main">
               <a:ext uri="{FF2B5EF4-FFF2-40B4-BE49-F238E27FC236}">
-                <a16:creationId xmlns:a16="http://schemas.microsoft.com/office/drawing/2014/main" id="{319EFC54-CE0D-4563-A0B2-E294513AEEEF}"/>
+                <a16:creationId xmlns:a16="http://schemas.microsoft.com/office/drawing/2014/main" id="{842C6855-1BB8-4BBB-9576-B1FE69E2C7D2}"/>
               </a:ext>
             </a:extLst>
           </p:cNvPr>
@@ -7517,7 +7549,7 @@
             <a:pPr algn="l">
               <a:defRPr sz="1125" b="0">
                 <a:solidFill>
-                  <a:srgbClr val="BFE6FF"/>
+                  <a:srgbClr val="BDC4D4"/>
                 </a:solidFill>
                 <a:latin typeface="Helvetica Neue"/>
                 <a:ea typeface="Helvetica Neue"/>
@@ -7527,7 +7559,7 @@
             <a:r>
               <a:rPr sz="1125" b="0">
                 <a:solidFill>
-                  <a:srgbClr val="BFE6FF"/>
+                  <a:srgbClr val="BDC4D4"/>
                 </a:solidFill>
                 <a:latin typeface="Helvetica Neue"/>
                 <a:ea typeface="Helvetica Neue"/>
@@ -7543,7 +7575,7 @@
           <p:cNvPr id="21" name="">
             <a:extLst xmlns:a="http://schemas.openxmlformats.org/drawingml/2006/main">
               <a:ext uri="{FF2B5EF4-FFF2-40B4-BE49-F238E27FC236}">
-                <a16:creationId xmlns:a16="http://schemas.microsoft.com/office/drawing/2014/main" id="{0FB52C67-37F1-4E32-8762-D23FAF162ED2}"/>
+                <a16:creationId xmlns:a16="http://schemas.microsoft.com/office/drawing/2014/main" id="{FC8651E0-C5A8-40E5-8BEB-6072B7ABD023}"/>
               </a:ext>
             </a:extLst>
           </p:cNvPr>
@@ -7561,7 +7593,7 @@
             <a:avLst/>
           </a:prstGeom>
           <a:solidFill xmlns:a="http://schemas.openxmlformats.org/drawingml/2006/main">
-            <a:srgbClr val="D8E5F2"/>
+            <a:srgbClr val="BDC4D4"/>
           </a:solidFill>
           <a:ln xmlns:a="http://schemas.openxmlformats.org/drawingml/2006/main" w="0">
             <a:noFill/>
@@ -7573,7 +7605,7 @@
           <p:cNvPr id="22" name="">
             <a:extLst xmlns:a="http://schemas.openxmlformats.org/drawingml/2006/main">
               <a:ext uri="{FF2B5EF4-FFF2-40B4-BE49-F238E27FC236}">
-                <a16:creationId xmlns:a16="http://schemas.microsoft.com/office/drawing/2014/main" id="{BC3F9D56-0A7C-4965-9AE4-EE867D2FF6DD}"/>
+                <a16:creationId xmlns:a16="http://schemas.microsoft.com/office/drawing/2014/main" id="{2E286336-28A2-4B1E-95E6-5454B4CF2CDC}"/>
               </a:ext>
             </a:extLst>
           </p:cNvPr>
@@ -7604,7 +7636,7 @@
             <a:pPr algn="l">
               <a:defRPr sz="750" b="0">
                 <a:solidFill>
-                  <a:srgbClr val="61718A"/>
+                  <a:srgbClr val="52677D"/>
                 </a:solidFill>
                 <a:latin typeface="Helvetica Neue"/>
                 <a:ea typeface="Helvetica Neue"/>
@@ -7614,7 +7646,7 @@
             <a:r>
               <a:rPr sz="750" b="0">
                 <a:solidFill>
-                  <a:srgbClr val="61718A"/>
+                  <a:srgbClr val="52677D"/>
                 </a:solidFill>
                 <a:latin typeface="Helvetica Neue"/>
                 <a:ea typeface="Helvetica Neue"/>
@@ -7630,7 +7662,7 @@
           <p:cNvPr id="23" name="">
             <a:extLst xmlns:a="http://schemas.openxmlformats.org/drawingml/2006/main">
               <a:ext uri="{FF2B5EF4-FFF2-40B4-BE49-F238E27FC236}">
-                <a16:creationId xmlns:a16="http://schemas.microsoft.com/office/drawing/2014/main" id="{27D1EDFA-922E-48B3-93DB-F850899AE6DF}"/>
+                <a16:creationId xmlns:a16="http://schemas.microsoft.com/office/drawing/2014/main" id="{90962CE9-09AC-464A-8A12-154EBD65D1D0}"/>
               </a:ext>
             </a:extLst>
           </p:cNvPr>
@@ -7661,7 +7693,7 @@
             <a:pPr algn="r">
               <a:defRPr sz="825" b="1">
                 <a:solidFill>
-                  <a:srgbClr val="2563EB"/>
+                  <a:srgbClr val="52677D"/>
                 </a:solidFill>
                 <a:latin typeface="Helvetica Neue"/>
                 <a:ea typeface="Helvetica Neue"/>
@@ -7671,7 +7703,7 @@
             <a:r>
               <a:rPr sz="825" b="1">
                 <a:solidFill>
-                  <a:srgbClr val="2563EB"/>
+                  <a:srgbClr val="52677D"/>
                 </a:solidFill>
                 <a:latin typeface="Helvetica Neue"/>
                 <a:ea typeface="Helvetica Neue"/>
@@ -7685,7 +7717,7 @@
     </p:spTree>
     <p:extLst>
       <p:ext uri="{BB962C8B-B14F-4D97-AF65-F5344CB8AC3E}">
-        <p14:creationId xmlns:p14="http://schemas.microsoft.com/office/powerpoint/2010/main" val="411435753"/>
+        <p14:creationId xmlns:p14="http://schemas.microsoft.com/office/powerpoint/2010/main" val="486354810"/>
       </p:ext>
     </p:extLst>
   </p:cSld>
@@ -7716,7 +7748,7 @@
           <p:cNvPr id="24" name="">
             <a:extLst xmlns:a="http://schemas.openxmlformats.org/drawingml/2006/main">
               <a:ext uri="{FF2B5EF4-FFF2-40B4-BE49-F238E27FC236}">
-                <a16:creationId xmlns:a16="http://schemas.microsoft.com/office/drawing/2014/main" id="{77ACA4ED-7F09-4799-B7E3-40252F0FBA2A}"/>
+                <a16:creationId xmlns:a16="http://schemas.microsoft.com/office/drawing/2014/main" id="{67EB3036-26A4-47C0-8536-63A7D8360350}"/>
               </a:ext>
             </a:extLst>
           </p:cNvPr>
@@ -7734,7 +7766,7 @@
             <a:avLst/>
           </a:prstGeom>
           <a:solidFill xmlns:a="http://schemas.openxmlformats.org/drawingml/2006/main">
-            <a:srgbClr val="FF7C70"/>
+            <a:srgbClr val="1C2E4A"/>
           </a:solidFill>
           <a:ln xmlns:a="http://schemas.openxmlformats.org/drawingml/2006/main" w="0">
             <a:noFill/>
@@ -7746,7 +7778,7 @@
           <p:cNvPr id="2" name="">
             <a:extLst xmlns:a="http://schemas.openxmlformats.org/drawingml/2006/main">
               <a:ext uri="{FF2B5EF4-FFF2-40B4-BE49-F238E27FC236}">
-                <a16:creationId xmlns:a16="http://schemas.microsoft.com/office/drawing/2014/main" id="{88C8480A-22FE-4971-839E-18A1C29B20C9}"/>
+                <a16:creationId xmlns:a16="http://schemas.microsoft.com/office/drawing/2014/main" id="{2EFDB3FB-2680-45E1-99BF-1143D1BCDD17}"/>
               </a:ext>
             </a:extLst>
           </p:cNvPr>
@@ -7777,7 +7809,7 @@
             <a:pPr algn="l">
               <a:defRPr sz="1125" b="1">
                 <a:solidFill>
-                  <a:srgbClr val="2563EB"/>
+                  <a:srgbClr val="52677D"/>
                 </a:solidFill>
                 <a:latin typeface="Helvetica Neue"/>
                 <a:ea typeface="Helvetica Neue"/>
@@ -7787,7 +7819,7 @@
             <a:r>
               <a:rPr sz="1125" b="1">
                 <a:solidFill>
-                  <a:srgbClr val="2563EB"/>
+                  <a:srgbClr val="52677D"/>
                 </a:solidFill>
                 <a:latin typeface="Helvetica Neue"/>
                 <a:ea typeface="Helvetica Neue"/>
@@ -7803,7 +7835,7 @@
           <p:cNvPr id="3" name="">
             <a:extLst xmlns:a="http://schemas.openxmlformats.org/drawingml/2006/main">
               <a:ext uri="{FF2B5EF4-FFF2-40B4-BE49-F238E27FC236}">
-                <a16:creationId xmlns:a16="http://schemas.microsoft.com/office/drawing/2014/main" id="{ACFECA09-361F-4DEA-BE11-1B6FE8456180}"/>
+                <a16:creationId xmlns:a16="http://schemas.microsoft.com/office/drawing/2014/main" id="{03918573-F4F4-48EA-B193-05BC7E5E35F0}"/>
               </a:ext>
             </a:extLst>
           </p:cNvPr>
@@ -7823,7 +7855,7 @@
             </a:avLst>
           </a:prstGeom>
           <a:solidFill xmlns:a="http://schemas.openxmlformats.org/drawingml/2006/main">
-            <a:srgbClr val="FFD43B"/>
+            <a:srgbClr val="D1CFC9"/>
           </a:solidFill>
           <a:ln xmlns:a="http://schemas.openxmlformats.org/drawingml/2006/main" w="0">
             <a:noFill/>
@@ -7835,7 +7867,7 @@
           <p:cNvPr id="4" name="">
             <a:extLst xmlns:a="http://schemas.openxmlformats.org/drawingml/2006/main">
               <a:ext uri="{FF2B5EF4-FFF2-40B4-BE49-F238E27FC236}">
-                <a16:creationId xmlns:a16="http://schemas.microsoft.com/office/drawing/2014/main" id="{ED68E286-F132-4D2B-B5E3-042415CEE09B}"/>
+                <a16:creationId xmlns:a16="http://schemas.microsoft.com/office/drawing/2014/main" id="{795EC427-FD59-4334-9797-5CB8EB1914F9}"/>
               </a:ext>
             </a:extLst>
           </p:cNvPr>
@@ -7866,7 +7898,7 @@
             <a:pPr algn="ctr">
               <a:defRPr sz="1275" b="1">
                 <a:solidFill>
-                  <a:srgbClr val="092454"/>
+                  <a:srgbClr val="1C2E4A"/>
                 </a:solidFill>
                 <a:latin typeface="Helvetica Neue"/>
                 <a:ea typeface="Helvetica Neue"/>
@@ -7876,7 +7908,7 @@
             <a:r>
               <a:rPr sz="1275" b="1">
                 <a:solidFill>
-                  <a:srgbClr val="092454"/>
+                  <a:srgbClr val="1C2E4A"/>
                 </a:solidFill>
                 <a:latin typeface="Helvetica Neue"/>
                 <a:ea typeface="Helvetica Neue"/>
@@ -7892,7 +7924,7 @@
           <p:cNvPr id="5" name="">
             <a:extLst xmlns:a="http://schemas.openxmlformats.org/drawingml/2006/main">
               <a:ext uri="{FF2B5EF4-FFF2-40B4-BE49-F238E27FC236}">
-                <a16:creationId xmlns:a16="http://schemas.microsoft.com/office/drawing/2014/main" id="{96F79C03-0A43-4876-8FD8-76A46D9A7445}"/>
+                <a16:creationId xmlns:a16="http://schemas.microsoft.com/office/drawing/2014/main" id="{F90D799C-F031-40C6-8A95-F04142BAF103}"/>
               </a:ext>
             </a:extLst>
           </p:cNvPr>
@@ -7923,7 +7955,7 @@
             <a:pPr algn="l">
               <a:defRPr sz="2550" b="1">
                 <a:solidFill>
-                  <a:srgbClr val="092454"/>
+                  <a:srgbClr val="1C2E4A"/>
                 </a:solidFill>
                 <a:latin typeface="Helvetica Neue"/>
                 <a:ea typeface="Helvetica Neue"/>
@@ -7933,7 +7965,7 @@
             <a:r>
               <a:rPr sz="2550" b="1">
                 <a:solidFill>
-                  <a:srgbClr val="092454"/>
+                  <a:srgbClr val="1C2E4A"/>
                 </a:solidFill>
                 <a:latin typeface="Helvetica Neue"/>
                 <a:ea typeface="Helvetica Neue"/>
@@ -7949,7 +7981,7 @@
           <p:cNvPr id="6" name="">
             <a:extLst xmlns:a="http://schemas.openxmlformats.org/drawingml/2006/main">
               <a:ext uri="{FF2B5EF4-FFF2-40B4-BE49-F238E27FC236}">
-                <a16:creationId xmlns:a16="http://schemas.microsoft.com/office/drawing/2014/main" id="{FA6481EC-1C9A-455E-8D0A-04CAAF8E8DEA}"/>
+                <a16:creationId xmlns:a16="http://schemas.microsoft.com/office/drawing/2014/main" id="{5E8981DE-475D-43FD-9673-39AA3A1289B5}"/>
               </a:ext>
             </a:extLst>
           </p:cNvPr>
@@ -7969,7 +8001,7 @@
             </a:avLst>
           </a:prstGeom>
           <a:solidFill xmlns:a="http://schemas.openxmlformats.org/drawingml/2006/main">
-            <a:srgbClr val="EEF7FF"/>
+            <a:srgbClr val="D1CFC9"/>
           </a:solidFill>
           <a:ln xmlns:a="http://schemas.openxmlformats.org/drawingml/2006/main" w="0">
             <a:noFill/>
@@ -7981,7 +8013,7 @@
           <p:cNvPr id="7" name="">
             <a:extLst xmlns:a="http://schemas.openxmlformats.org/drawingml/2006/main">
               <a:ext uri="{FF2B5EF4-FFF2-40B4-BE49-F238E27FC236}">
-                <a16:creationId xmlns:a16="http://schemas.microsoft.com/office/drawing/2014/main" id="{F5DB2BFC-141A-4C07-8367-70067EC9C9F8}"/>
+                <a16:creationId xmlns:a16="http://schemas.microsoft.com/office/drawing/2014/main" id="{50281F89-1683-4326-9640-AC31A3FBF2B4}"/>
               </a:ext>
             </a:extLst>
           </p:cNvPr>
@@ -8012,7 +8044,7 @@
             <a:pPr algn="ctr">
               <a:defRPr sz="1350" b="1">
                 <a:solidFill>
-                  <a:srgbClr val="2563EB"/>
+                  <a:srgbClr val="52677D"/>
                 </a:solidFill>
                 <a:latin typeface="Helvetica Neue"/>
                 <a:ea typeface="Helvetica Neue"/>
@@ -8022,7 +8054,7 @@
             <a:r>
               <a:rPr sz="1350" b="1">
                 <a:solidFill>
-                  <a:srgbClr val="2563EB"/>
+                  <a:srgbClr val="52677D"/>
                 </a:solidFill>
                 <a:latin typeface="Helvetica Neue"/>
                 <a:ea typeface="Helvetica Neue"/>
@@ -8038,7 +8070,7 @@
           <p:cNvPr id="8" name="">
             <a:extLst xmlns:a="http://schemas.openxmlformats.org/drawingml/2006/main">
               <a:ext uri="{FF2B5EF4-FFF2-40B4-BE49-F238E27FC236}">
-                <a16:creationId xmlns:a16="http://schemas.microsoft.com/office/drawing/2014/main" id="{AD6867B2-10CB-435C-88A1-2C8F2F015006}"/>
+                <a16:creationId xmlns:a16="http://schemas.microsoft.com/office/drawing/2014/main" id="{CDAB9CDD-4418-4D80-ABC6-9F3512195955}"/>
               </a:ext>
             </a:extLst>
           </p:cNvPr>
@@ -8069,7 +8101,7 @@
             <a:pPr algn="l">
               <a:defRPr sz="1575" b="0">
                 <a:solidFill>
-                  <a:srgbClr val="10213D"/>
+                  <a:srgbClr val="0F1A2B"/>
                 </a:solidFill>
                 <a:latin typeface="Helvetica Neue"/>
                 <a:ea typeface="Helvetica Neue"/>
@@ -8079,7 +8111,7 @@
             <a:r>
               <a:rPr sz="1575" b="0">
                 <a:solidFill>
-                  <a:srgbClr val="10213D"/>
+                  <a:srgbClr val="0F1A2B"/>
                 </a:solidFill>
                 <a:latin typeface="Helvetica Neue"/>
                 <a:ea typeface="Helvetica Neue"/>
@@ -8095,7 +8127,7 @@
           <p:cNvPr id="9" name="">
             <a:extLst xmlns:a="http://schemas.openxmlformats.org/drawingml/2006/main">
               <a:ext uri="{FF2B5EF4-FFF2-40B4-BE49-F238E27FC236}">
-                <a16:creationId xmlns:a16="http://schemas.microsoft.com/office/drawing/2014/main" id="{08F06C56-F77B-4CBA-A592-6328AD0B4540}"/>
+                <a16:creationId xmlns:a16="http://schemas.microsoft.com/office/drawing/2014/main" id="{CA5CF122-BCD7-4510-AF96-E507ED7B7BD6}"/>
               </a:ext>
             </a:extLst>
           </p:cNvPr>
@@ -8115,7 +8147,7 @@
             </a:avLst>
           </a:prstGeom>
           <a:solidFill xmlns:a="http://schemas.openxmlformats.org/drawingml/2006/main">
-            <a:srgbClr val="EEF7FF"/>
+            <a:srgbClr val="D1CFC9"/>
           </a:solidFill>
           <a:ln xmlns:a="http://schemas.openxmlformats.org/drawingml/2006/main" w="0">
             <a:noFill/>
@@ -8127,7 +8159,7 @@
           <p:cNvPr id="10" name="">
             <a:extLst xmlns:a="http://schemas.openxmlformats.org/drawingml/2006/main">
               <a:ext uri="{FF2B5EF4-FFF2-40B4-BE49-F238E27FC236}">
-                <a16:creationId xmlns:a16="http://schemas.microsoft.com/office/drawing/2014/main" id="{1492DCF7-B077-4A51-8C1E-D0D6BB850DE3}"/>
+                <a16:creationId xmlns:a16="http://schemas.microsoft.com/office/drawing/2014/main" id="{88585140-A6D1-4A3D-9D39-3D110998F2D1}"/>
               </a:ext>
             </a:extLst>
           </p:cNvPr>
@@ -8158,7 +8190,7 @@
             <a:pPr algn="ctr">
               <a:defRPr sz="1350" b="1">
                 <a:solidFill>
-                  <a:srgbClr val="2563EB"/>
+                  <a:srgbClr val="52677D"/>
                 </a:solidFill>
                 <a:latin typeface="Helvetica Neue"/>
                 <a:ea typeface="Helvetica Neue"/>
@@ -8168,7 +8200,7 @@
             <a:r>
               <a:rPr sz="1350" b="1">
                 <a:solidFill>
-                  <a:srgbClr val="2563EB"/>
+                  <a:srgbClr val="52677D"/>
                 </a:solidFill>
                 <a:latin typeface="Helvetica Neue"/>
                 <a:ea typeface="Helvetica Neue"/>
@@ -8184,7 +8216,7 @@
           <p:cNvPr id="11" name="">
             <a:extLst xmlns:a="http://schemas.openxmlformats.org/drawingml/2006/main">
               <a:ext uri="{FF2B5EF4-FFF2-40B4-BE49-F238E27FC236}">
-                <a16:creationId xmlns:a16="http://schemas.microsoft.com/office/drawing/2014/main" id="{85B8F0E7-3B81-4FE3-8C19-E1741DEA1F02}"/>
+                <a16:creationId xmlns:a16="http://schemas.microsoft.com/office/drawing/2014/main" id="{DEBD7AF1-D39D-4FFE-9A00-FF3CE84EBB37}"/>
               </a:ext>
             </a:extLst>
           </p:cNvPr>
@@ -8215,7 +8247,7 @@
             <a:pPr algn="l">
               <a:defRPr sz="1575" b="0">
                 <a:solidFill>
-                  <a:srgbClr val="10213D"/>
+                  <a:srgbClr val="0F1A2B"/>
                 </a:solidFill>
                 <a:latin typeface="Helvetica Neue"/>
                 <a:ea typeface="Helvetica Neue"/>
@@ -8225,7 +8257,7 @@
             <a:r>
               <a:rPr sz="1575" b="0">
                 <a:solidFill>
-                  <a:srgbClr val="10213D"/>
+                  <a:srgbClr val="0F1A2B"/>
                 </a:solidFill>
                 <a:latin typeface="Helvetica Neue"/>
                 <a:ea typeface="Helvetica Neue"/>
@@ -8241,7 +8273,7 @@
           <p:cNvPr id="12" name="">
             <a:extLst xmlns:a="http://schemas.openxmlformats.org/drawingml/2006/main">
               <a:ext uri="{FF2B5EF4-FFF2-40B4-BE49-F238E27FC236}">
-                <a16:creationId xmlns:a16="http://schemas.microsoft.com/office/drawing/2014/main" id="{418C5CD3-4DA6-45CA-89A7-39E8E9C25598}"/>
+                <a16:creationId xmlns:a16="http://schemas.microsoft.com/office/drawing/2014/main" id="{5E9D2566-9AF5-440E-B926-F5B229B4FB8E}"/>
               </a:ext>
             </a:extLst>
           </p:cNvPr>
@@ -8261,7 +8293,7 @@
             </a:avLst>
           </a:prstGeom>
           <a:solidFill xmlns:a="http://schemas.openxmlformats.org/drawingml/2006/main">
-            <a:srgbClr val="EEF7FF"/>
+            <a:srgbClr val="D1CFC9"/>
           </a:solidFill>
           <a:ln xmlns:a="http://schemas.openxmlformats.org/drawingml/2006/main" w="0">
             <a:noFill/>
@@ -8273,7 +8305,7 @@
           <p:cNvPr id="13" name="">
             <a:extLst xmlns:a="http://schemas.openxmlformats.org/drawingml/2006/main">
               <a:ext uri="{FF2B5EF4-FFF2-40B4-BE49-F238E27FC236}">
-                <a16:creationId xmlns:a16="http://schemas.microsoft.com/office/drawing/2014/main" id="{831ECE3E-E40E-49D9-A4BC-12F85289948C}"/>
+                <a16:creationId xmlns:a16="http://schemas.microsoft.com/office/drawing/2014/main" id="{106EDC28-9C74-468F-94DA-EA90DB68F054}"/>
               </a:ext>
             </a:extLst>
           </p:cNvPr>
@@ -8304,7 +8336,7 @@
             <a:pPr algn="ctr">
               <a:defRPr sz="1350" b="1">
                 <a:solidFill>
-                  <a:srgbClr val="2563EB"/>
+                  <a:srgbClr val="52677D"/>
                 </a:solidFill>
                 <a:latin typeface="Helvetica Neue"/>
                 <a:ea typeface="Helvetica Neue"/>
@@ -8314,7 +8346,7 @@
             <a:r>
               <a:rPr sz="1350" b="1">
                 <a:solidFill>
-                  <a:srgbClr val="2563EB"/>
+                  <a:srgbClr val="52677D"/>
                 </a:solidFill>
                 <a:latin typeface="Helvetica Neue"/>
                 <a:ea typeface="Helvetica Neue"/>
@@ -8330,7 +8362,7 @@
           <p:cNvPr id="14" name="">
             <a:extLst xmlns:a="http://schemas.openxmlformats.org/drawingml/2006/main">
               <a:ext uri="{FF2B5EF4-FFF2-40B4-BE49-F238E27FC236}">
-                <a16:creationId xmlns:a16="http://schemas.microsoft.com/office/drawing/2014/main" id="{35790D11-7EF1-49D6-A5C4-3AB0EE29588D}"/>
+                <a16:creationId xmlns:a16="http://schemas.microsoft.com/office/drawing/2014/main" id="{D7E8329C-D874-4403-97F0-24581C9905CE}"/>
               </a:ext>
             </a:extLst>
           </p:cNvPr>
@@ -8361,7 +8393,7 @@
             <a:pPr algn="l">
               <a:defRPr sz="1575" b="0">
                 <a:solidFill>
-                  <a:srgbClr val="10213D"/>
+                  <a:srgbClr val="0F1A2B"/>
                 </a:solidFill>
                 <a:latin typeface="Helvetica Neue"/>
                 <a:ea typeface="Helvetica Neue"/>
@@ -8371,7 +8403,7 @@
             <a:r>
               <a:rPr sz="1575" b="0">
                 <a:solidFill>
-                  <a:srgbClr val="10213D"/>
+                  <a:srgbClr val="0F1A2B"/>
                 </a:solidFill>
                 <a:latin typeface="Helvetica Neue"/>
                 <a:ea typeface="Helvetica Neue"/>
@@ -8387,7 +8419,7 @@
           <p:cNvPr id="15" name="">
             <a:extLst xmlns:a="http://schemas.openxmlformats.org/drawingml/2006/main">
               <a:ext uri="{FF2B5EF4-FFF2-40B4-BE49-F238E27FC236}">
-                <a16:creationId xmlns:a16="http://schemas.microsoft.com/office/drawing/2014/main" id="{7A96AE20-9E34-410B-9E93-3A272DE83E52}"/>
+                <a16:creationId xmlns:a16="http://schemas.microsoft.com/office/drawing/2014/main" id="{D4219E91-127B-4CFA-BDE2-49932FEBCD0E}"/>
               </a:ext>
             </a:extLst>
           </p:cNvPr>
@@ -8407,7 +8439,7 @@
             </a:avLst>
           </a:prstGeom>
           <a:solidFill xmlns:a="http://schemas.openxmlformats.org/drawingml/2006/main">
-            <a:srgbClr val="EEF7FF"/>
+            <a:srgbClr val="D1CFC9"/>
           </a:solidFill>
           <a:ln xmlns:a="http://schemas.openxmlformats.org/drawingml/2006/main" w="0">
             <a:noFill/>
@@ -8419,7 +8451,7 @@
           <p:cNvPr id="16" name="">
             <a:extLst xmlns:a="http://schemas.openxmlformats.org/drawingml/2006/main">
               <a:ext uri="{FF2B5EF4-FFF2-40B4-BE49-F238E27FC236}">
-                <a16:creationId xmlns:a16="http://schemas.microsoft.com/office/drawing/2014/main" id="{7A889E81-4EB9-4101-A41A-2E6A8803C52A}"/>
+                <a16:creationId xmlns:a16="http://schemas.microsoft.com/office/drawing/2014/main" id="{4B8290F1-942D-4F99-85DE-47B765F7222D}"/>
               </a:ext>
             </a:extLst>
           </p:cNvPr>
@@ -8450,7 +8482,7 @@
             <a:pPr algn="l">
               <a:defRPr sz="1125" b="0">
                 <a:solidFill>
-                  <a:srgbClr val="092454"/>
+                  <a:srgbClr val="1C2E4A"/>
                 </a:solidFill>
                 <a:latin typeface="Helvetica Neue"/>
                 <a:ea typeface="Helvetica Neue"/>
@@ -8460,7 +8492,7 @@
             <a:r>
               <a:rPr sz="1125" b="0">
                 <a:solidFill>
-                  <a:srgbClr val="092454"/>
+                  <a:srgbClr val="1C2E4A"/>
                 </a:solidFill>
                 <a:latin typeface="Helvetica Neue"/>
                 <a:ea typeface="Helvetica Neue"/>
@@ -8476,7 +8508,7 @@
           <p:cNvPr id="17" name="">
             <a:extLst xmlns:a="http://schemas.openxmlformats.org/drawingml/2006/main">
               <a:ext uri="{FF2B5EF4-FFF2-40B4-BE49-F238E27FC236}">
-                <a16:creationId xmlns:a16="http://schemas.microsoft.com/office/drawing/2014/main" id="{49040437-0F00-4916-9F10-06CE23657199}"/>
+                <a16:creationId xmlns:a16="http://schemas.microsoft.com/office/drawing/2014/main" id="{9AB9C95F-60DF-4982-BE00-BD4480752AD8}"/>
               </a:ext>
             </a:extLst>
           </p:cNvPr>
@@ -8496,7 +8528,7 @@
             </a:avLst>
           </a:prstGeom>
           <a:solidFill xmlns:a="http://schemas.openxmlformats.org/drawingml/2006/main">
-            <a:srgbClr val="092454"/>
+            <a:srgbClr val="1C2E4A"/>
           </a:solidFill>
           <a:ln xmlns:a="http://schemas.openxmlformats.org/drawingml/2006/main" w="0">
             <a:noFill/>
@@ -8508,7 +8540,7 @@
           <p:cNvPr id="18" name="">
             <a:extLst xmlns:a="http://schemas.openxmlformats.org/drawingml/2006/main">
               <a:ext uri="{FF2B5EF4-FFF2-40B4-BE49-F238E27FC236}">
-                <a16:creationId xmlns:a16="http://schemas.microsoft.com/office/drawing/2014/main" id="{6D3C2A7F-279A-4E26-B404-9D5BCE64D25B}"/>
+                <a16:creationId xmlns:a16="http://schemas.microsoft.com/office/drawing/2014/main" id="{3E723D7A-52A2-4890-94DD-AC94F2FD1DBA}"/>
               </a:ext>
             </a:extLst>
           </p:cNvPr>
@@ -8539,7 +8571,7 @@
             <a:pPr algn="l">
               <a:defRPr sz="1050" b="1">
                 <a:solidFill>
-                  <a:srgbClr val="FFD43B"/>
+                  <a:srgbClr val="D1CFC9"/>
                 </a:solidFill>
                 <a:latin typeface="Helvetica Neue"/>
                 <a:ea typeface="Helvetica Neue"/>
@@ -8549,7 +8581,7 @@
             <a:r>
               <a:rPr sz="1050" b="1">
                 <a:solidFill>
-                  <a:srgbClr val="FFD43B"/>
+                  <a:srgbClr val="D1CFC9"/>
                 </a:solidFill>
                 <a:latin typeface="Helvetica Neue"/>
                 <a:ea typeface="Helvetica Neue"/>
@@ -8565,7 +8597,7 @@
           <p:cNvPr id="19" name="">
             <a:extLst xmlns:a="http://schemas.openxmlformats.org/drawingml/2006/main">
               <a:ext uri="{FF2B5EF4-FFF2-40B4-BE49-F238E27FC236}">
-                <a16:creationId xmlns:a16="http://schemas.microsoft.com/office/drawing/2014/main" id="{9842F73F-FF43-4734-9CC4-4F7D0E8F2E09}"/>
+                <a16:creationId xmlns:a16="http://schemas.microsoft.com/office/drawing/2014/main" id="{32A4C1EC-9C6C-45A4-82FD-93CED37A4DDD}"/>
               </a:ext>
             </a:extLst>
           </p:cNvPr>
@@ -8622,7 +8654,7 @@
           <p:cNvPr id="20" name="">
             <a:extLst xmlns:a="http://schemas.openxmlformats.org/drawingml/2006/main">
               <a:ext uri="{FF2B5EF4-FFF2-40B4-BE49-F238E27FC236}">
-                <a16:creationId xmlns:a16="http://schemas.microsoft.com/office/drawing/2014/main" id="{9039F3AA-B3F0-4CB0-939E-E3A458E0DE8F}"/>
+                <a16:creationId xmlns:a16="http://schemas.microsoft.com/office/drawing/2014/main" id="{AF2C7EE2-38A3-4045-92CF-A960A9296981}"/>
               </a:ext>
             </a:extLst>
           </p:cNvPr>
@@ -8653,7 +8685,7 @@
             <a:pPr algn="l">
               <a:defRPr sz="1125" b="0">
                 <a:solidFill>
-                  <a:srgbClr val="BFE6FF"/>
+                  <a:srgbClr val="BDC4D4"/>
                 </a:solidFill>
                 <a:latin typeface="Helvetica Neue"/>
                 <a:ea typeface="Helvetica Neue"/>
@@ -8663,7 +8695,7 @@
             <a:r>
               <a:rPr sz="1125" b="0">
                 <a:solidFill>
-                  <a:srgbClr val="BFE6FF"/>
+                  <a:srgbClr val="BDC4D4"/>
                 </a:solidFill>
                 <a:latin typeface="Helvetica Neue"/>
                 <a:ea typeface="Helvetica Neue"/>
@@ -8679,7 +8711,7 @@
           <p:cNvPr id="21" name="">
             <a:extLst xmlns:a="http://schemas.openxmlformats.org/drawingml/2006/main">
               <a:ext uri="{FF2B5EF4-FFF2-40B4-BE49-F238E27FC236}">
-                <a16:creationId xmlns:a16="http://schemas.microsoft.com/office/drawing/2014/main" id="{0249D231-B1B2-4046-8B35-C18E425542E5}"/>
+                <a16:creationId xmlns:a16="http://schemas.microsoft.com/office/drawing/2014/main" id="{721F8709-918E-43E4-A7B3-477EB6D03154}"/>
               </a:ext>
             </a:extLst>
           </p:cNvPr>
@@ -8697,7 +8729,7 @@
             <a:avLst/>
           </a:prstGeom>
           <a:solidFill xmlns:a="http://schemas.openxmlformats.org/drawingml/2006/main">
-            <a:srgbClr val="D8E5F2"/>
+            <a:srgbClr val="BDC4D4"/>
           </a:solidFill>
           <a:ln xmlns:a="http://schemas.openxmlformats.org/drawingml/2006/main" w="0">
             <a:noFill/>
@@ -8709,7 +8741,7 @@
           <p:cNvPr id="22" name="">
             <a:extLst xmlns:a="http://schemas.openxmlformats.org/drawingml/2006/main">
               <a:ext uri="{FF2B5EF4-FFF2-40B4-BE49-F238E27FC236}">
-                <a16:creationId xmlns:a16="http://schemas.microsoft.com/office/drawing/2014/main" id="{995744C2-D5CD-4E81-B222-F775B6A4F77A}"/>
+                <a16:creationId xmlns:a16="http://schemas.microsoft.com/office/drawing/2014/main" id="{7FFA8047-B872-4692-AC23-A4B61857BFF3}"/>
               </a:ext>
             </a:extLst>
           </p:cNvPr>
@@ -8740,7 +8772,7 @@
             <a:pPr algn="l">
               <a:defRPr sz="750" b="0">
                 <a:solidFill>
-                  <a:srgbClr val="61718A"/>
+                  <a:srgbClr val="52677D"/>
                 </a:solidFill>
                 <a:latin typeface="Helvetica Neue"/>
                 <a:ea typeface="Helvetica Neue"/>
@@ -8750,7 +8782,7 @@
             <a:r>
               <a:rPr sz="750" b="0">
                 <a:solidFill>
-                  <a:srgbClr val="61718A"/>
+                  <a:srgbClr val="52677D"/>
                 </a:solidFill>
                 <a:latin typeface="Helvetica Neue"/>
                 <a:ea typeface="Helvetica Neue"/>
@@ -8766,7 +8798,7 @@
           <p:cNvPr id="23" name="">
             <a:extLst xmlns:a="http://schemas.openxmlformats.org/drawingml/2006/main">
               <a:ext uri="{FF2B5EF4-FFF2-40B4-BE49-F238E27FC236}">
-                <a16:creationId xmlns:a16="http://schemas.microsoft.com/office/drawing/2014/main" id="{E90BA49E-4B05-4032-9FC5-44BA3D14A0AB}"/>
+                <a16:creationId xmlns:a16="http://schemas.microsoft.com/office/drawing/2014/main" id="{E2C9C3C4-3A45-47EB-9A5D-16A163CDDDBE}"/>
               </a:ext>
             </a:extLst>
           </p:cNvPr>
@@ -8797,7 +8829,7 @@
             <a:pPr algn="r">
               <a:defRPr sz="825" b="1">
                 <a:solidFill>
-                  <a:srgbClr val="2563EB"/>
+                  <a:srgbClr val="52677D"/>
                 </a:solidFill>
                 <a:latin typeface="Helvetica Neue"/>
                 <a:ea typeface="Helvetica Neue"/>
@@ -8807,7 +8839,7 @@
             <a:r>
               <a:rPr sz="825" b="1">
                 <a:solidFill>
-                  <a:srgbClr val="2563EB"/>
+                  <a:srgbClr val="52677D"/>
                 </a:solidFill>
                 <a:latin typeface="Helvetica Neue"/>
                 <a:ea typeface="Helvetica Neue"/>
@@ -8821,7 +8853,7 @@
     </p:spTree>
     <p:extLst>
       <p:ext uri="{BB962C8B-B14F-4D97-AF65-F5344CB8AC3E}">
-        <p14:creationId xmlns:p14="http://schemas.microsoft.com/office/powerpoint/2010/main" val="443672570"/>
+        <p14:creationId xmlns:p14="http://schemas.microsoft.com/office/powerpoint/2010/main" val="611886777"/>
       </p:ext>
     </p:extLst>
   </p:cSld>
@@ -8852,7 +8884,7 @@
           <p:cNvPr id="24" name="">
             <a:extLst xmlns:a="http://schemas.openxmlformats.org/drawingml/2006/main">
               <a:ext uri="{FF2B5EF4-FFF2-40B4-BE49-F238E27FC236}">
-                <a16:creationId xmlns:a16="http://schemas.microsoft.com/office/drawing/2014/main" id="{0AA3941C-351B-4191-8E79-6B2D2BC646B3}"/>
+                <a16:creationId xmlns:a16="http://schemas.microsoft.com/office/drawing/2014/main" id="{890DD6BA-D377-43D1-B82B-62F97A81FFFC}"/>
               </a:ext>
             </a:extLst>
           </p:cNvPr>
@@ -8870,7 +8902,7 @@
             <a:avLst/>
           </a:prstGeom>
           <a:solidFill xmlns:a="http://schemas.openxmlformats.org/drawingml/2006/main">
-            <a:srgbClr val="00A7A0"/>
+            <a:srgbClr val="1C2E4A"/>
           </a:solidFill>
           <a:ln xmlns:a="http://schemas.openxmlformats.org/drawingml/2006/main" w="0">
             <a:noFill/>
@@ -8882,7 +8914,7 @@
           <p:cNvPr id="2" name="">
             <a:extLst xmlns:a="http://schemas.openxmlformats.org/drawingml/2006/main">
               <a:ext uri="{FF2B5EF4-FFF2-40B4-BE49-F238E27FC236}">
-                <a16:creationId xmlns:a16="http://schemas.microsoft.com/office/drawing/2014/main" id="{124B60D0-C3D5-43CB-B40E-1D61BA387C8E}"/>
+                <a16:creationId xmlns:a16="http://schemas.microsoft.com/office/drawing/2014/main" id="{1957D6E0-8BDA-489E-BE29-7B6A2C47563B}"/>
               </a:ext>
             </a:extLst>
           </p:cNvPr>
@@ -8913,7 +8945,7 @@
             <a:pPr algn="l">
               <a:defRPr sz="1125" b="1">
                 <a:solidFill>
-                  <a:srgbClr val="2563EB"/>
+                  <a:srgbClr val="52677D"/>
                 </a:solidFill>
                 <a:latin typeface="Helvetica Neue"/>
                 <a:ea typeface="Helvetica Neue"/>
@@ -8923,7 +8955,7 @@
             <a:r>
               <a:rPr sz="1125" b="1">
                 <a:solidFill>
-                  <a:srgbClr val="2563EB"/>
+                  <a:srgbClr val="52677D"/>
                 </a:solidFill>
                 <a:latin typeface="Helvetica Neue"/>
                 <a:ea typeface="Helvetica Neue"/>
@@ -8939,7 +8971,7 @@
           <p:cNvPr id="3" name="">
             <a:extLst xmlns:a="http://schemas.openxmlformats.org/drawingml/2006/main">
               <a:ext uri="{FF2B5EF4-FFF2-40B4-BE49-F238E27FC236}">
-                <a16:creationId xmlns:a16="http://schemas.microsoft.com/office/drawing/2014/main" id="{11A9159C-4E44-4C04-8718-FA30349BC5FB}"/>
+                <a16:creationId xmlns:a16="http://schemas.microsoft.com/office/drawing/2014/main" id="{DBD3C79A-76AD-439D-9F50-DB1F2B3C1E33}"/>
               </a:ext>
             </a:extLst>
           </p:cNvPr>
@@ -8959,7 +8991,7 @@
             </a:avLst>
           </a:prstGeom>
           <a:solidFill xmlns:a="http://schemas.openxmlformats.org/drawingml/2006/main">
-            <a:srgbClr val="FFD43B"/>
+            <a:srgbClr val="D1CFC9"/>
           </a:solidFill>
           <a:ln xmlns:a="http://schemas.openxmlformats.org/drawingml/2006/main" w="0">
             <a:noFill/>
@@ -8971,7 +9003,7 @@
           <p:cNvPr id="4" name="">
             <a:extLst xmlns:a="http://schemas.openxmlformats.org/drawingml/2006/main">
               <a:ext uri="{FF2B5EF4-FFF2-40B4-BE49-F238E27FC236}">
-                <a16:creationId xmlns:a16="http://schemas.microsoft.com/office/drawing/2014/main" id="{5EF8D09E-2A18-4B7A-9F78-431CA290BA55}"/>
+                <a16:creationId xmlns:a16="http://schemas.microsoft.com/office/drawing/2014/main" id="{50C7C046-1835-4E51-A9B0-0D252B46CC8A}"/>
               </a:ext>
             </a:extLst>
           </p:cNvPr>
@@ -9002,7 +9034,7 @@
             <a:pPr algn="ctr">
               <a:defRPr sz="1275" b="1">
                 <a:solidFill>
-                  <a:srgbClr val="092454"/>
+                  <a:srgbClr val="1C2E4A"/>
                 </a:solidFill>
                 <a:latin typeface="Helvetica Neue"/>
                 <a:ea typeface="Helvetica Neue"/>
@@ -9012,7 +9044,7 @@
             <a:r>
               <a:rPr sz="1275" b="1">
                 <a:solidFill>
-                  <a:srgbClr val="092454"/>
+                  <a:srgbClr val="1C2E4A"/>
                 </a:solidFill>
                 <a:latin typeface="Helvetica Neue"/>
                 <a:ea typeface="Helvetica Neue"/>
@@ -9028,7 +9060,7 @@
           <p:cNvPr id="5" name="">
             <a:extLst xmlns:a="http://schemas.openxmlformats.org/drawingml/2006/main">
               <a:ext uri="{FF2B5EF4-FFF2-40B4-BE49-F238E27FC236}">
-                <a16:creationId xmlns:a16="http://schemas.microsoft.com/office/drawing/2014/main" id="{5DC4C382-ED73-4F90-AF00-E1035AC61C29}"/>
+                <a16:creationId xmlns:a16="http://schemas.microsoft.com/office/drawing/2014/main" id="{D5A51827-622F-4C3B-8016-572458339557}"/>
               </a:ext>
             </a:extLst>
           </p:cNvPr>
@@ -9059,7 +9091,7 @@
             <a:pPr algn="l">
               <a:defRPr sz="2550" b="1">
                 <a:solidFill>
-                  <a:srgbClr val="092454"/>
+                  <a:srgbClr val="1C2E4A"/>
                 </a:solidFill>
                 <a:latin typeface="Helvetica Neue"/>
                 <a:ea typeface="Helvetica Neue"/>
@@ -9069,7 +9101,7 @@
             <a:r>
               <a:rPr sz="2550" b="1">
                 <a:solidFill>
-                  <a:srgbClr val="092454"/>
+                  <a:srgbClr val="1C2E4A"/>
                 </a:solidFill>
                 <a:latin typeface="Helvetica Neue"/>
                 <a:ea typeface="Helvetica Neue"/>
@@ -9085,7 +9117,7 @@
           <p:cNvPr id="6" name="">
             <a:extLst xmlns:a="http://schemas.openxmlformats.org/drawingml/2006/main">
               <a:ext uri="{FF2B5EF4-FFF2-40B4-BE49-F238E27FC236}">
-                <a16:creationId xmlns:a16="http://schemas.microsoft.com/office/drawing/2014/main" id="{C74039C1-FD61-4BDA-947D-B7467D7FDCE5}"/>
+                <a16:creationId xmlns:a16="http://schemas.microsoft.com/office/drawing/2014/main" id="{05887655-F3AF-40EE-AA0F-ACF3E1FF7D7E}"/>
               </a:ext>
             </a:extLst>
           </p:cNvPr>
@@ -9105,7 +9137,7 @@
             </a:avLst>
           </a:prstGeom>
           <a:solidFill xmlns:a="http://schemas.openxmlformats.org/drawingml/2006/main">
-            <a:srgbClr val="EEF7FF"/>
+            <a:srgbClr val="D1CFC9"/>
           </a:solidFill>
           <a:ln xmlns:a="http://schemas.openxmlformats.org/drawingml/2006/main" w="0">
             <a:noFill/>
@@ -9117,7 +9149,7 @@
           <p:cNvPr id="7" name="">
             <a:extLst xmlns:a="http://schemas.openxmlformats.org/drawingml/2006/main">
               <a:ext uri="{FF2B5EF4-FFF2-40B4-BE49-F238E27FC236}">
-                <a16:creationId xmlns:a16="http://schemas.microsoft.com/office/drawing/2014/main" id="{5AA07D71-518A-47EF-80AA-E185C5E010A4}"/>
+                <a16:creationId xmlns:a16="http://schemas.microsoft.com/office/drawing/2014/main" id="{C1F9A6E2-2989-4F3F-BE88-480D9693288A}"/>
               </a:ext>
             </a:extLst>
           </p:cNvPr>
@@ -9148,7 +9180,7 @@
             <a:pPr algn="ctr">
               <a:defRPr sz="1350" b="1">
                 <a:solidFill>
-                  <a:srgbClr val="2563EB"/>
+                  <a:srgbClr val="52677D"/>
                 </a:solidFill>
                 <a:latin typeface="Helvetica Neue"/>
                 <a:ea typeface="Helvetica Neue"/>
@@ -9158,7 +9190,7 @@
             <a:r>
               <a:rPr sz="1350" b="1">
                 <a:solidFill>
-                  <a:srgbClr val="2563EB"/>
+                  <a:srgbClr val="52677D"/>
                 </a:solidFill>
                 <a:latin typeface="Helvetica Neue"/>
                 <a:ea typeface="Helvetica Neue"/>
@@ -9174,7 +9206,7 @@
           <p:cNvPr id="8" name="">
             <a:extLst xmlns:a="http://schemas.openxmlformats.org/drawingml/2006/main">
               <a:ext uri="{FF2B5EF4-FFF2-40B4-BE49-F238E27FC236}">
-                <a16:creationId xmlns:a16="http://schemas.microsoft.com/office/drawing/2014/main" id="{D1B88063-9D31-4911-A0A7-45A852B1BA6E}"/>
+                <a16:creationId xmlns:a16="http://schemas.microsoft.com/office/drawing/2014/main" id="{43521F7B-4653-45F4-9324-0A38BB82E06A}"/>
               </a:ext>
             </a:extLst>
           </p:cNvPr>
@@ -9205,7 +9237,7 @@
             <a:pPr algn="l">
               <a:defRPr sz="1575" b="0">
                 <a:solidFill>
-                  <a:srgbClr val="10213D"/>
+                  <a:srgbClr val="0F1A2B"/>
                 </a:solidFill>
                 <a:latin typeface="Helvetica Neue"/>
                 <a:ea typeface="Helvetica Neue"/>
@@ -9215,7 +9247,7 @@
             <a:r>
               <a:rPr sz="1575" b="0">
                 <a:solidFill>
-                  <a:srgbClr val="10213D"/>
+                  <a:srgbClr val="0F1A2B"/>
                 </a:solidFill>
                 <a:latin typeface="Helvetica Neue"/>
                 <a:ea typeface="Helvetica Neue"/>
@@ -9231,7 +9263,7 @@
           <p:cNvPr id="9" name="">
             <a:extLst xmlns:a="http://schemas.openxmlformats.org/drawingml/2006/main">
               <a:ext uri="{FF2B5EF4-FFF2-40B4-BE49-F238E27FC236}">
-                <a16:creationId xmlns:a16="http://schemas.microsoft.com/office/drawing/2014/main" id="{527CC7A1-4D48-44EB-9912-60E320FB95AD}"/>
+                <a16:creationId xmlns:a16="http://schemas.microsoft.com/office/drawing/2014/main" id="{FC8FC2B1-2CD6-41A5-BA1C-AED36026669C}"/>
               </a:ext>
             </a:extLst>
           </p:cNvPr>
@@ -9251,7 +9283,7 @@
             </a:avLst>
           </a:prstGeom>
           <a:solidFill xmlns:a="http://schemas.openxmlformats.org/drawingml/2006/main">
-            <a:srgbClr val="EEF7FF"/>
+            <a:srgbClr val="D1CFC9"/>
           </a:solidFill>
           <a:ln xmlns:a="http://schemas.openxmlformats.org/drawingml/2006/main" w="0">
             <a:noFill/>
@@ -9263,7 +9295,7 @@
           <p:cNvPr id="10" name="">
             <a:extLst xmlns:a="http://schemas.openxmlformats.org/drawingml/2006/main">
               <a:ext uri="{FF2B5EF4-FFF2-40B4-BE49-F238E27FC236}">
-                <a16:creationId xmlns:a16="http://schemas.microsoft.com/office/drawing/2014/main" id="{0334DA18-BD28-4423-9243-DB7225B9C7CC}"/>
+                <a16:creationId xmlns:a16="http://schemas.microsoft.com/office/drawing/2014/main" id="{D4DF97D3-7AB2-4012-8D0C-FC6C7B6A2BEE}"/>
               </a:ext>
             </a:extLst>
           </p:cNvPr>
@@ -9294,7 +9326,7 @@
             <a:pPr algn="ctr">
               <a:defRPr sz="1350" b="1">
                 <a:solidFill>
-                  <a:srgbClr val="2563EB"/>
+                  <a:srgbClr val="52677D"/>
                 </a:solidFill>
                 <a:latin typeface="Helvetica Neue"/>
                 <a:ea typeface="Helvetica Neue"/>
@@ -9304,7 +9336,7 @@
             <a:r>
               <a:rPr sz="1350" b="1">
                 <a:solidFill>
-                  <a:srgbClr val="2563EB"/>
+                  <a:srgbClr val="52677D"/>
                 </a:solidFill>
                 <a:latin typeface="Helvetica Neue"/>
                 <a:ea typeface="Helvetica Neue"/>
@@ -9320,7 +9352,7 @@
           <p:cNvPr id="11" name="">
             <a:extLst xmlns:a="http://schemas.openxmlformats.org/drawingml/2006/main">
               <a:ext uri="{FF2B5EF4-FFF2-40B4-BE49-F238E27FC236}">
-                <a16:creationId xmlns:a16="http://schemas.microsoft.com/office/drawing/2014/main" id="{F57226E9-A23C-42D1-A251-7F4B4DF2B06B}"/>
+                <a16:creationId xmlns:a16="http://schemas.microsoft.com/office/drawing/2014/main" id="{A444C41E-C8EA-4FB4-A398-B4ADDC5BB584}"/>
               </a:ext>
             </a:extLst>
           </p:cNvPr>
@@ -9351,7 +9383,7 @@
             <a:pPr algn="l">
               <a:defRPr sz="1575" b="0">
                 <a:solidFill>
-                  <a:srgbClr val="10213D"/>
+                  <a:srgbClr val="0F1A2B"/>
                 </a:solidFill>
                 <a:latin typeface="Helvetica Neue"/>
                 <a:ea typeface="Helvetica Neue"/>
@@ -9361,7 +9393,7 @@
             <a:r>
               <a:rPr sz="1575" b="0">
                 <a:solidFill>
-                  <a:srgbClr val="10213D"/>
+                  <a:srgbClr val="0F1A2B"/>
                 </a:solidFill>
                 <a:latin typeface="Helvetica Neue"/>
                 <a:ea typeface="Helvetica Neue"/>
@@ -9377,7 +9409,7 @@
           <p:cNvPr id="12" name="">
             <a:extLst xmlns:a="http://schemas.openxmlformats.org/drawingml/2006/main">
               <a:ext uri="{FF2B5EF4-FFF2-40B4-BE49-F238E27FC236}">
-                <a16:creationId xmlns:a16="http://schemas.microsoft.com/office/drawing/2014/main" id="{2CE1F5A0-4285-44E5-87DB-5F3E1D94D476}"/>
+                <a16:creationId xmlns:a16="http://schemas.microsoft.com/office/drawing/2014/main" id="{8ED6189C-E322-40F5-860E-9B9DDFE41C62}"/>
               </a:ext>
             </a:extLst>
           </p:cNvPr>
@@ -9397,7 +9429,7 @@
             </a:avLst>
           </a:prstGeom>
           <a:solidFill xmlns:a="http://schemas.openxmlformats.org/drawingml/2006/main">
-            <a:srgbClr val="EEF7FF"/>
+            <a:srgbClr val="D1CFC9"/>
           </a:solidFill>
           <a:ln xmlns:a="http://schemas.openxmlformats.org/drawingml/2006/main" w="0">
             <a:noFill/>
@@ -9409,7 +9441,7 @@
           <p:cNvPr id="13" name="">
             <a:extLst xmlns:a="http://schemas.openxmlformats.org/drawingml/2006/main">
               <a:ext uri="{FF2B5EF4-FFF2-40B4-BE49-F238E27FC236}">
-                <a16:creationId xmlns:a16="http://schemas.microsoft.com/office/drawing/2014/main" id="{B7EF3AF8-3483-430B-9085-55C3A87CE6A7}"/>
+                <a16:creationId xmlns:a16="http://schemas.microsoft.com/office/drawing/2014/main" id="{00F82582-0AC1-4E7B-A229-7B50C5193504}"/>
               </a:ext>
             </a:extLst>
           </p:cNvPr>
@@ -9440,7 +9472,7 @@
             <a:pPr algn="ctr">
               <a:defRPr sz="1350" b="1">
                 <a:solidFill>
-                  <a:srgbClr val="2563EB"/>
+                  <a:srgbClr val="52677D"/>
                 </a:solidFill>
                 <a:latin typeface="Helvetica Neue"/>
                 <a:ea typeface="Helvetica Neue"/>
@@ -9450,7 +9482,7 @@
             <a:r>
               <a:rPr sz="1350" b="1">
                 <a:solidFill>
-                  <a:srgbClr val="2563EB"/>
+                  <a:srgbClr val="52677D"/>
                 </a:solidFill>
                 <a:latin typeface="Helvetica Neue"/>
                 <a:ea typeface="Helvetica Neue"/>
@@ -9466,7 +9498,7 @@
           <p:cNvPr id="14" name="">
             <a:extLst xmlns:a="http://schemas.openxmlformats.org/drawingml/2006/main">
               <a:ext uri="{FF2B5EF4-FFF2-40B4-BE49-F238E27FC236}">
-                <a16:creationId xmlns:a16="http://schemas.microsoft.com/office/drawing/2014/main" id="{9EA67348-6692-499D-A655-22B0B312C98C}"/>
+                <a16:creationId xmlns:a16="http://schemas.microsoft.com/office/drawing/2014/main" id="{7B5D6157-6C45-48C4-8A24-53CD5756DC83}"/>
               </a:ext>
             </a:extLst>
           </p:cNvPr>
@@ -9497,7 +9529,7 @@
             <a:pPr algn="l">
               <a:defRPr sz="1575" b="0">
                 <a:solidFill>
-                  <a:srgbClr val="10213D"/>
+                  <a:srgbClr val="0F1A2B"/>
                 </a:solidFill>
                 <a:latin typeface="Helvetica Neue"/>
                 <a:ea typeface="Helvetica Neue"/>
@@ -9507,7 +9539,7 @@
             <a:r>
               <a:rPr sz="1575" b="0">
                 <a:solidFill>
-                  <a:srgbClr val="10213D"/>
+                  <a:srgbClr val="0F1A2B"/>
                 </a:solidFill>
                 <a:latin typeface="Helvetica Neue"/>
                 <a:ea typeface="Helvetica Neue"/>
@@ -9523,7 +9555,7 @@
           <p:cNvPr id="15" name="">
             <a:extLst xmlns:a="http://schemas.openxmlformats.org/drawingml/2006/main">
               <a:ext uri="{FF2B5EF4-FFF2-40B4-BE49-F238E27FC236}">
-                <a16:creationId xmlns:a16="http://schemas.microsoft.com/office/drawing/2014/main" id="{2653565E-A32B-4B36-9CE0-8699615DF090}"/>
+                <a16:creationId xmlns:a16="http://schemas.microsoft.com/office/drawing/2014/main" id="{4B54BEC1-D4D8-4E68-8911-144F0F4EFD21}"/>
               </a:ext>
             </a:extLst>
           </p:cNvPr>
@@ -9543,7 +9575,7 @@
             </a:avLst>
           </a:prstGeom>
           <a:solidFill xmlns:a="http://schemas.openxmlformats.org/drawingml/2006/main">
-            <a:srgbClr val="EEF7FF"/>
+            <a:srgbClr val="D1CFC9"/>
           </a:solidFill>
           <a:ln xmlns:a="http://schemas.openxmlformats.org/drawingml/2006/main" w="0">
             <a:noFill/>
@@ -9555,7 +9587,7 @@
           <p:cNvPr id="16" name="">
             <a:extLst xmlns:a="http://schemas.openxmlformats.org/drawingml/2006/main">
               <a:ext uri="{FF2B5EF4-FFF2-40B4-BE49-F238E27FC236}">
-                <a16:creationId xmlns:a16="http://schemas.microsoft.com/office/drawing/2014/main" id="{71735D21-0E24-434D-9386-47D0AC9EA3F7}"/>
+                <a16:creationId xmlns:a16="http://schemas.microsoft.com/office/drawing/2014/main" id="{F130DB08-FAC3-4CE3-9224-D54F6669A96D}"/>
               </a:ext>
             </a:extLst>
           </p:cNvPr>
@@ -9586,7 +9618,7 @@
             <a:pPr algn="l">
               <a:defRPr sz="1125" b="0">
                 <a:solidFill>
-                  <a:srgbClr val="092454"/>
+                  <a:srgbClr val="1C2E4A"/>
                 </a:solidFill>
                 <a:latin typeface="Helvetica Neue"/>
                 <a:ea typeface="Helvetica Neue"/>
@@ -9596,7 +9628,7 @@
             <a:r>
               <a:rPr sz="1125" b="0">
                 <a:solidFill>
-                  <a:srgbClr val="092454"/>
+                  <a:srgbClr val="1C2E4A"/>
                 </a:solidFill>
                 <a:latin typeface="Helvetica Neue"/>
                 <a:ea typeface="Helvetica Neue"/>
@@ -9612,7 +9644,7 @@
           <p:cNvPr id="17" name="">
             <a:extLst xmlns:a="http://schemas.openxmlformats.org/drawingml/2006/main">
               <a:ext uri="{FF2B5EF4-FFF2-40B4-BE49-F238E27FC236}">
-                <a16:creationId xmlns:a16="http://schemas.microsoft.com/office/drawing/2014/main" id="{6E18986E-C534-44B3-8376-2195441BB13B}"/>
+                <a16:creationId xmlns:a16="http://schemas.microsoft.com/office/drawing/2014/main" id="{A27A7046-367E-48EA-94D1-7F35EC3C7914}"/>
               </a:ext>
             </a:extLst>
           </p:cNvPr>
@@ -9632,7 +9664,7 @@
             </a:avLst>
           </a:prstGeom>
           <a:solidFill xmlns:a="http://schemas.openxmlformats.org/drawingml/2006/main">
-            <a:srgbClr val="092454"/>
+            <a:srgbClr val="1C2E4A"/>
           </a:solidFill>
           <a:ln xmlns:a="http://schemas.openxmlformats.org/drawingml/2006/main" w="0">
             <a:noFill/>
@@ -9644,7 +9676,7 @@
           <p:cNvPr id="18" name="">
             <a:extLst xmlns:a="http://schemas.openxmlformats.org/drawingml/2006/main">
               <a:ext uri="{FF2B5EF4-FFF2-40B4-BE49-F238E27FC236}">
-                <a16:creationId xmlns:a16="http://schemas.microsoft.com/office/drawing/2014/main" id="{29D46971-6AC2-4549-8652-1682ABD2D5F4}"/>
+                <a16:creationId xmlns:a16="http://schemas.microsoft.com/office/drawing/2014/main" id="{F4694B76-CC35-4E25-81A3-878BD84DD448}"/>
               </a:ext>
             </a:extLst>
           </p:cNvPr>
@@ -9675,7 +9707,7 @@
             <a:pPr algn="l">
               <a:defRPr sz="1050" b="1">
                 <a:solidFill>
-                  <a:srgbClr val="FFD43B"/>
+                  <a:srgbClr val="D1CFC9"/>
                 </a:solidFill>
                 <a:latin typeface="Helvetica Neue"/>
                 <a:ea typeface="Helvetica Neue"/>
@@ -9685,7 +9717,7 @@
             <a:r>
               <a:rPr sz="1050" b="1">
                 <a:solidFill>
-                  <a:srgbClr val="FFD43B"/>
+                  <a:srgbClr val="D1CFC9"/>
                 </a:solidFill>
                 <a:latin typeface="Helvetica Neue"/>
                 <a:ea typeface="Helvetica Neue"/>
@@ -9701,7 +9733,7 @@
           <p:cNvPr id="19" name="">
             <a:extLst xmlns:a="http://schemas.openxmlformats.org/drawingml/2006/main">
               <a:ext uri="{FF2B5EF4-FFF2-40B4-BE49-F238E27FC236}">
-                <a16:creationId xmlns:a16="http://schemas.microsoft.com/office/drawing/2014/main" id="{9B40D123-B8C4-4F06-B124-A48C162D60EE}"/>
+                <a16:creationId xmlns:a16="http://schemas.microsoft.com/office/drawing/2014/main" id="{A69D6D57-08BA-4E76-AF07-3829AACD6C44}"/>
               </a:ext>
             </a:extLst>
           </p:cNvPr>
@@ -9758,7 +9790,7 @@
           <p:cNvPr id="20" name="">
             <a:extLst xmlns:a="http://schemas.openxmlformats.org/drawingml/2006/main">
               <a:ext uri="{FF2B5EF4-FFF2-40B4-BE49-F238E27FC236}">
-                <a16:creationId xmlns:a16="http://schemas.microsoft.com/office/drawing/2014/main" id="{1466B2B7-EE9F-41E7-B9AE-A9759DFFED32}"/>
+                <a16:creationId xmlns:a16="http://schemas.microsoft.com/office/drawing/2014/main" id="{BE31284C-DE92-4B33-82B3-6D6251067BF4}"/>
               </a:ext>
             </a:extLst>
           </p:cNvPr>
@@ -9789,7 +9821,7 @@
             <a:pPr algn="l">
               <a:defRPr sz="1125" b="0">
                 <a:solidFill>
-                  <a:srgbClr val="BFE6FF"/>
+                  <a:srgbClr val="BDC4D4"/>
                 </a:solidFill>
                 <a:latin typeface="Helvetica Neue"/>
                 <a:ea typeface="Helvetica Neue"/>
@@ -9799,7 +9831,7 @@
             <a:r>
               <a:rPr sz="1125" b="0">
                 <a:solidFill>
-                  <a:srgbClr val="BFE6FF"/>
+                  <a:srgbClr val="BDC4D4"/>
                 </a:solidFill>
                 <a:latin typeface="Helvetica Neue"/>
                 <a:ea typeface="Helvetica Neue"/>
@@ -9815,7 +9847,7 @@
           <p:cNvPr id="21" name="">
             <a:extLst xmlns:a="http://schemas.openxmlformats.org/drawingml/2006/main">
               <a:ext uri="{FF2B5EF4-FFF2-40B4-BE49-F238E27FC236}">
-                <a16:creationId xmlns:a16="http://schemas.microsoft.com/office/drawing/2014/main" id="{E07A2EC6-71D2-493A-BA36-521C697D6821}"/>
+                <a16:creationId xmlns:a16="http://schemas.microsoft.com/office/drawing/2014/main" id="{60FA6A3B-C9A4-4427-A976-560C064BBDAC}"/>
               </a:ext>
             </a:extLst>
           </p:cNvPr>
@@ -9833,7 +9865,7 @@
             <a:avLst/>
           </a:prstGeom>
           <a:solidFill xmlns:a="http://schemas.openxmlformats.org/drawingml/2006/main">
-            <a:srgbClr val="D8E5F2"/>
+            <a:srgbClr val="BDC4D4"/>
           </a:solidFill>
           <a:ln xmlns:a="http://schemas.openxmlformats.org/drawingml/2006/main" w="0">
             <a:noFill/>
@@ -9845,7 +9877,7 @@
           <p:cNvPr id="22" name="">
             <a:extLst xmlns:a="http://schemas.openxmlformats.org/drawingml/2006/main">
               <a:ext uri="{FF2B5EF4-FFF2-40B4-BE49-F238E27FC236}">
-                <a16:creationId xmlns:a16="http://schemas.microsoft.com/office/drawing/2014/main" id="{19E3E9E5-6A45-45E9-B501-5A53E9A7F610}"/>
+                <a16:creationId xmlns:a16="http://schemas.microsoft.com/office/drawing/2014/main" id="{B04F1667-1238-4925-B019-D92C4231125A}"/>
               </a:ext>
             </a:extLst>
           </p:cNvPr>
@@ -9876,7 +9908,7 @@
             <a:pPr algn="l">
               <a:defRPr sz="750" b="0">
                 <a:solidFill>
-                  <a:srgbClr val="61718A"/>
+                  <a:srgbClr val="52677D"/>
                 </a:solidFill>
                 <a:latin typeface="Helvetica Neue"/>
                 <a:ea typeface="Helvetica Neue"/>
@@ -9886,7 +9918,7 @@
             <a:r>
               <a:rPr sz="750" b="0">
                 <a:solidFill>
-                  <a:srgbClr val="61718A"/>
+                  <a:srgbClr val="52677D"/>
                 </a:solidFill>
                 <a:latin typeface="Helvetica Neue"/>
                 <a:ea typeface="Helvetica Neue"/>
@@ -9902,7 +9934,7 @@
           <p:cNvPr id="23" name="">
             <a:extLst xmlns:a="http://schemas.openxmlformats.org/drawingml/2006/main">
               <a:ext uri="{FF2B5EF4-FFF2-40B4-BE49-F238E27FC236}">
-                <a16:creationId xmlns:a16="http://schemas.microsoft.com/office/drawing/2014/main" id="{A8174802-B21E-4FE8-B8BF-0621CBF4FF82}"/>
+                <a16:creationId xmlns:a16="http://schemas.microsoft.com/office/drawing/2014/main" id="{28E25615-97F7-4840-92BE-86361474F96A}"/>
               </a:ext>
             </a:extLst>
           </p:cNvPr>
@@ -9933,7 +9965,7 @@
             <a:pPr algn="r">
               <a:defRPr sz="825" b="1">
                 <a:solidFill>
-                  <a:srgbClr val="2563EB"/>
+                  <a:srgbClr val="52677D"/>
                 </a:solidFill>
                 <a:latin typeface="Helvetica Neue"/>
                 <a:ea typeface="Helvetica Neue"/>
@@ -9943,7 +9975,7 @@
             <a:r>
               <a:rPr sz="825" b="1">
                 <a:solidFill>
-                  <a:srgbClr val="2563EB"/>
+                  <a:srgbClr val="52677D"/>
                 </a:solidFill>
                 <a:latin typeface="Helvetica Neue"/>
                 <a:ea typeface="Helvetica Neue"/>
@@ -9957,7 +9989,7 @@
     </p:spTree>
     <p:extLst>
       <p:ext uri="{BB962C8B-B14F-4D97-AF65-F5344CB8AC3E}">
-        <p14:creationId xmlns:p14="http://schemas.microsoft.com/office/powerpoint/2010/main" val="707053390"/>
+        <p14:creationId xmlns:p14="http://schemas.microsoft.com/office/powerpoint/2010/main" val="120860159"/>
       </p:ext>
     </p:extLst>
   </p:cSld>
@@ -9988,7 +10020,7 @@
           <p:cNvPr id="24" name="">
             <a:extLst xmlns:a="http://schemas.openxmlformats.org/drawingml/2006/main">
               <a:ext uri="{FF2B5EF4-FFF2-40B4-BE49-F238E27FC236}">
-                <a16:creationId xmlns:a16="http://schemas.microsoft.com/office/drawing/2014/main" id="{32C4388F-97A8-46F4-9C6C-EE72E20CF742}"/>
+                <a16:creationId xmlns:a16="http://schemas.microsoft.com/office/drawing/2014/main" id="{CA0F6A39-37AD-4F01-8FB2-D2651DC26D16}"/>
               </a:ext>
             </a:extLst>
           </p:cNvPr>
@@ -10006,7 +10038,7 @@
             <a:avLst/>
           </a:prstGeom>
           <a:solidFill xmlns:a="http://schemas.openxmlformats.org/drawingml/2006/main">
-            <a:srgbClr val="6C5CE7"/>
+            <a:srgbClr val="1C2E4A"/>
           </a:solidFill>
           <a:ln xmlns:a="http://schemas.openxmlformats.org/drawingml/2006/main" w="0">
             <a:noFill/>
@@ -10018,7 +10050,7 @@
           <p:cNvPr id="2" name="">
             <a:extLst xmlns:a="http://schemas.openxmlformats.org/drawingml/2006/main">
               <a:ext uri="{FF2B5EF4-FFF2-40B4-BE49-F238E27FC236}">
-                <a16:creationId xmlns:a16="http://schemas.microsoft.com/office/drawing/2014/main" id="{A6966408-0A20-41B2-A539-A4E1E7FDF405}"/>
+                <a16:creationId xmlns:a16="http://schemas.microsoft.com/office/drawing/2014/main" id="{E1E82D66-E551-4ECA-A642-5BB70C377379}"/>
               </a:ext>
             </a:extLst>
           </p:cNvPr>
@@ -10049,7 +10081,7 @@
             <a:pPr algn="l">
               <a:defRPr sz="1125" b="1">
                 <a:solidFill>
-                  <a:srgbClr val="2563EB"/>
+                  <a:srgbClr val="52677D"/>
                 </a:solidFill>
                 <a:latin typeface="Helvetica Neue"/>
                 <a:ea typeface="Helvetica Neue"/>
@@ -10059,7 +10091,7 @@
             <a:r>
               <a:rPr sz="1125" b="1">
                 <a:solidFill>
-                  <a:srgbClr val="2563EB"/>
+                  <a:srgbClr val="52677D"/>
                 </a:solidFill>
                 <a:latin typeface="Helvetica Neue"/>
                 <a:ea typeface="Helvetica Neue"/>
@@ -10075,7 +10107,7 @@
           <p:cNvPr id="3" name="">
             <a:extLst xmlns:a="http://schemas.openxmlformats.org/drawingml/2006/main">
               <a:ext uri="{FF2B5EF4-FFF2-40B4-BE49-F238E27FC236}">
-                <a16:creationId xmlns:a16="http://schemas.microsoft.com/office/drawing/2014/main" id="{6A6EB0DB-C7A3-4597-B3D5-6607718FBC68}"/>
+                <a16:creationId xmlns:a16="http://schemas.microsoft.com/office/drawing/2014/main" id="{5C97672B-F42B-4911-8354-CD53BE8166A2}"/>
               </a:ext>
             </a:extLst>
           </p:cNvPr>
@@ -10095,7 +10127,7 @@
             </a:avLst>
           </a:prstGeom>
           <a:solidFill xmlns:a="http://schemas.openxmlformats.org/drawingml/2006/main">
-            <a:srgbClr val="FFD43B"/>
+            <a:srgbClr val="D1CFC9"/>
           </a:solidFill>
           <a:ln xmlns:a="http://schemas.openxmlformats.org/drawingml/2006/main" w="0">
             <a:noFill/>
@@ -10107,7 +10139,7 @@
           <p:cNvPr id="4" name="">
             <a:extLst xmlns:a="http://schemas.openxmlformats.org/drawingml/2006/main">
               <a:ext uri="{FF2B5EF4-FFF2-40B4-BE49-F238E27FC236}">
-                <a16:creationId xmlns:a16="http://schemas.microsoft.com/office/drawing/2014/main" id="{67024303-C6AD-4FA2-A411-03A7AEF5DFC1}"/>
+                <a16:creationId xmlns:a16="http://schemas.microsoft.com/office/drawing/2014/main" id="{B90B018C-F359-4F73-BFAF-BB60FB68CF87}"/>
               </a:ext>
             </a:extLst>
           </p:cNvPr>
@@ -10138,7 +10170,7 @@
             <a:pPr algn="ctr">
               <a:defRPr sz="1275" b="1">
                 <a:solidFill>
-                  <a:srgbClr val="092454"/>
+                  <a:srgbClr val="1C2E4A"/>
                 </a:solidFill>
                 <a:latin typeface="Helvetica Neue"/>
                 <a:ea typeface="Helvetica Neue"/>
@@ -10148,7 +10180,7 @@
             <a:r>
               <a:rPr sz="1275" b="1">
                 <a:solidFill>
-                  <a:srgbClr val="092454"/>
+                  <a:srgbClr val="1C2E4A"/>
                 </a:solidFill>
                 <a:latin typeface="Helvetica Neue"/>
                 <a:ea typeface="Helvetica Neue"/>
@@ -10164,7 +10196,7 @@
           <p:cNvPr id="5" name="">
             <a:extLst xmlns:a="http://schemas.openxmlformats.org/drawingml/2006/main">
               <a:ext uri="{FF2B5EF4-FFF2-40B4-BE49-F238E27FC236}">
-                <a16:creationId xmlns:a16="http://schemas.microsoft.com/office/drawing/2014/main" id="{23860E18-65A7-4517-850B-884CC5C75DF2}"/>
+                <a16:creationId xmlns:a16="http://schemas.microsoft.com/office/drawing/2014/main" id="{D9A1967E-263D-4F38-9BDD-1B9ABC127DDF}"/>
               </a:ext>
             </a:extLst>
           </p:cNvPr>
@@ -10195,7 +10227,7 @@
             <a:pPr algn="l">
               <a:defRPr sz="2550" b="1">
                 <a:solidFill>
-                  <a:srgbClr val="092454"/>
+                  <a:srgbClr val="1C2E4A"/>
                 </a:solidFill>
                 <a:latin typeface="Helvetica Neue"/>
                 <a:ea typeface="Helvetica Neue"/>
@@ -10205,7 +10237,7 @@
             <a:r>
               <a:rPr sz="2550" b="1">
                 <a:solidFill>
-                  <a:srgbClr val="092454"/>
+                  <a:srgbClr val="1C2E4A"/>
                 </a:solidFill>
                 <a:latin typeface="Helvetica Neue"/>
                 <a:ea typeface="Helvetica Neue"/>
@@ -10221,7 +10253,7 @@
           <p:cNvPr id="6" name="">
             <a:extLst xmlns:a="http://schemas.openxmlformats.org/drawingml/2006/main">
               <a:ext uri="{FF2B5EF4-FFF2-40B4-BE49-F238E27FC236}">
-                <a16:creationId xmlns:a16="http://schemas.microsoft.com/office/drawing/2014/main" id="{34C1DF57-87EB-4486-9804-D9DEEA2CF987}"/>
+                <a16:creationId xmlns:a16="http://schemas.microsoft.com/office/drawing/2014/main" id="{57695354-EF97-4766-BAA9-A02AE41F19A8}"/>
               </a:ext>
             </a:extLst>
           </p:cNvPr>
@@ -10241,7 +10273,7 @@
             </a:avLst>
           </a:prstGeom>
           <a:solidFill xmlns:a="http://schemas.openxmlformats.org/drawingml/2006/main">
-            <a:srgbClr val="EEF7FF"/>
+            <a:srgbClr val="D1CFC9"/>
           </a:solidFill>
           <a:ln xmlns:a="http://schemas.openxmlformats.org/drawingml/2006/main" w="0">
             <a:noFill/>
@@ -10253,7 +10285,7 @@
           <p:cNvPr id="7" name="">
             <a:extLst xmlns:a="http://schemas.openxmlformats.org/drawingml/2006/main">
               <a:ext uri="{FF2B5EF4-FFF2-40B4-BE49-F238E27FC236}">
-                <a16:creationId xmlns:a16="http://schemas.microsoft.com/office/drawing/2014/main" id="{22A1C1F1-AC53-451A-8807-0DCDF7BB8755}"/>
+                <a16:creationId xmlns:a16="http://schemas.microsoft.com/office/drawing/2014/main" id="{FFA91E91-2218-427A-9570-394AAE248182}"/>
               </a:ext>
             </a:extLst>
           </p:cNvPr>
@@ -10284,7 +10316,7 @@
             <a:pPr algn="ctr">
               <a:defRPr sz="1350" b="1">
                 <a:solidFill>
-                  <a:srgbClr val="2563EB"/>
+                  <a:srgbClr val="52677D"/>
                 </a:solidFill>
                 <a:latin typeface="Helvetica Neue"/>
                 <a:ea typeface="Helvetica Neue"/>
@@ -10294,7 +10326,7 @@
             <a:r>
               <a:rPr sz="1350" b="1">
                 <a:solidFill>
-                  <a:srgbClr val="2563EB"/>
+                  <a:srgbClr val="52677D"/>
                 </a:solidFill>
                 <a:latin typeface="Helvetica Neue"/>
                 <a:ea typeface="Helvetica Neue"/>
@@ -10310,7 +10342,7 @@
           <p:cNvPr id="8" name="">
             <a:extLst xmlns:a="http://schemas.openxmlformats.org/drawingml/2006/main">
               <a:ext uri="{FF2B5EF4-FFF2-40B4-BE49-F238E27FC236}">
-                <a16:creationId xmlns:a16="http://schemas.microsoft.com/office/drawing/2014/main" id="{92CFF4C1-B71F-407A-B16D-CC365D08F4E2}"/>
+                <a16:creationId xmlns:a16="http://schemas.microsoft.com/office/drawing/2014/main" id="{631C886B-0649-4E69-8EE8-B4A8B8B36F84}"/>
               </a:ext>
             </a:extLst>
           </p:cNvPr>
@@ -10341,7 +10373,7 @@
             <a:pPr algn="l">
               <a:defRPr sz="1575" b="0">
                 <a:solidFill>
-                  <a:srgbClr val="10213D"/>
+                  <a:srgbClr val="0F1A2B"/>
                 </a:solidFill>
                 <a:latin typeface="Helvetica Neue"/>
                 <a:ea typeface="Helvetica Neue"/>
@@ -10351,7 +10383,7 @@
             <a:r>
               <a:rPr sz="1575" b="0">
                 <a:solidFill>
-                  <a:srgbClr val="10213D"/>
+                  <a:srgbClr val="0F1A2B"/>
                 </a:solidFill>
                 <a:latin typeface="Helvetica Neue"/>
                 <a:ea typeface="Helvetica Neue"/>
@@ -10367,7 +10399,7 @@
           <p:cNvPr id="9" name="">
             <a:extLst xmlns:a="http://schemas.openxmlformats.org/drawingml/2006/main">
               <a:ext uri="{FF2B5EF4-FFF2-40B4-BE49-F238E27FC236}">
-                <a16:creationId xmlns:a16="http://schemas.microsoft.com/office/drawing/2014/main" id="{3F1B5F9D-09D2-4D80-B68B-A85DC1BD5DB2}"/>
+                <a16:creationId xmlns:a16="http://schemas.microsoft.com/office/drawing/2014/main" id="{3CF61FDD-AAAA-4B3D-B27A-E1C626F07822}"/>
               </a:ext>
             </a:extLst>
           </p:cNvPr>
@@ -10387,7 +10419,7 @@
             </a:avLst>
           </a:prstGeom>
           <a:solidFill xmlns:a="http://schemas.openxmlformats.org/drawingml/2006/main">
-            <a:srgbClr val="EEF7FF"/>
+            <a:srgbClr val="D1CFC9"/>
           </a:solidFill>
           <a:ln xmlns:a="http://schemas.openxmlformats.org/drawingml/2006/main" w="0">
             <a:noFill/>
@@ -10399,7 +10431,7 @@
           <p:cNvPr id="10" name="">
             <a:extLst xmlns:a="http://schemas.openxmlformats.org/drawingml/2006/main">
               <a:ext uri="{FF2B5EF4-FFF2-40B4-BE49-F238E27FC236}">
-                <a16:creationId xmlns:a16="http://schemas.microsoft.com/office/drawing/2014/main" id="{B4D52EF0-4363-4314-AEAC-EAF0DB5E50F6}"/>
+                <a16:creationId xmlns:a16="http://schemas.microsoft.com/office/drawing/2014/main" id="{51EA6486-1512-4208-BFB6-01283D8ED884}"/>
               </a:ext>
             </a:extLst>
           </p:cNvPr>
@@ -10430,7 +10462,7 @@
             <a:pPr algn="ctr">
               <a:defRPr sz="1350" b="1">
                 <a:solidFill>
-                  <a:srgbClr val="2563EB"/>
+                  <a:srgbClr val="52677D"/>
                 </a:solidFill>
                 <a:latin typeface="Helvetica Neue"/>
                 <a:ea typeface="Helvetica Neue"/>
@@ -10440,7 +10472,7 @@
             <a:r>
               <a:rPr sz="1350" b="1">
                 <a:solidFill>
-                  <a:srgbClr val="2563EB"/>
+                  <a:srgbClr val="52677D"/>
                 </a:solidFill>
                 <a:latin typeface="Helvetica Neue"/>
                 <a:ea typeface="Helvetica Neue"/>
@@ -10456,7 +10488,7 @@
           <p:cNvPr id="11" name="">
             <a:extLst xmlns:a="http://schemas.openxmlformats.org/drawingml/2006/main">
               <a:ext uri="{FF2B5EF4-FFF2-40B4-BE49-F238E27FC236}">
-                <a16:creationId xmlns:a16="http://schemas.microsoft.com/office/drawing/2014/main" id="{A178EAC9-6C1B-4FCC-9FD2-24602DF9A578}"/>
+                <a16:creationId xmlns:a16="http://schemas.microsoft.com/office/drawing/2014/main" id="{C15CA437-9477-4B6E-BAE0-50273A3999FF}"/>
               </a:ext>
             </a:extLst>
           </p:cNvPr>
@@ -10487,7 +10519,7 @@
             <a:pPr algn="l">
               <a:defRPr sz="1575" b="0">
                 <a:solidFill>
-                  <a:srgbClr val="10213D"/>
+                  <a:srgbClr val="0F1A2B"/>
                 </a:solidFill>
                 <a:latin typeface="Helvetica Neue"/>
                 <a:ea typeface="Helvetica Neue"/>
@@ -10497,7 +10529,7 @@
             <a:r>
               <a:rPr sz="1575" b="0">
                 <a:solidFill>
-                  <a:srgbClr val="10213D"/>
+                  <a:srgbClr val="0F1A2B"/>
                 </a:solidFill>
                 <a:latin typeface="Helvetica Neue"/>
                 <a:ea typeface="Helvetica Neue"/>
@@ -10513,7 +10545,7 @@
           <p:cNvPr id="12" name="">
             <a:extLst xmlns:a="http://schemas.openxmlformats.org/drawingml/2006/main">
               <a:ext uri="{FF2B5EF4-FFF2-40B4-BE49-F238E27FC236}">
-                <a16:creationId xmlns:a16="http://schemas.microsoft.com/office/drawing/2014/main" id="{82BBEA65-A679-41FE-AB7F-770EE53F0452}"/>
+                <a16:creationId xmlns:a16="http://schemas.microsoft.com/office/drawing/2014/main" id="{CCA373E2-85AB-430A-907A-50FFDE8CD7E7}"/>
               </a:ext>
             </a:extLst>
           </p:cNvPr>
@@ -10533,7 +10565,7 @@
             </a:avLst>
           </a:prstGeom>
           <a:solidFill xmlns:a="http://schemas.openxmlformats.org/drawingml/2006/main">
-            <a:srgbClr val="EEF7FF"/>
+            <a:srgbClr val="D1CFC9"/>
           </a:solidFill>
           <a:ln xmlns:a="http://schemas.openxmlformats.org/drawingml/2006/main" w="0">
             <a:noFill/>
@@ -10545,7 +10577,7 @@
           <p:cNvPr id="13" name="">
             <a:extLst xmlns:a="http://schemas.openxmlformats.org/drawingml/2006/main">
               <a:ext uri="{FF2B5EF4-FFF2-40B4-BE49-F238E27FC236}">
-                <a16:creationId xmlns:a16="http://schemas.microsoft.com/office/drawing/2014/main" id="{4F39C0FA-3649-472D-A003-6FC3139A4F77}"/>
+                <a16:creationId xmlns:a16="http://schemas.microsoft.com/office/drawing/2014/main" id="{A966A747-77EE-4AC9-B7CB-0C4D6E13391E}"/>
               </a:ext>
             </a:extLst>
           </p:cNvPr>
@@ -10576,7 +10608,7 @@
             <a:pPr algn="ctr">
               <a:defRPr sz="1350" b="1">
                 <a:solidFill>
-                  <a:srgbClr val="2563EB"/>
+                  <a:srgbClr val="52677D"/>
                 </a:solidFill>
                 <a:latin typeface="Helvetica Neue"/>
                 <a:ea typeface="Helvetica Neue"/>
@@ -10586,7 +10618,7 @@
             <a:r>
               <a:rPr sz="1350" b="1">
                 <a:solidFill>
-                  <a:srgbClr val="2563EB"/>
+                  <a:srgbClr val="52677D"/>
                 </a:solidFill>
                 <a:latin typeface="Helvetica Neue"/>
                 <a:ea typeface="Helvetica Neue"/>
@@ -10602,7 +10634,7 @@
           <p:cNvPr id="14" name="">
             <a:extLst xmlns:a="http://schemas.openxmlformats.org/drawingml/2006/main">
               <a:ext uri="{FF2B5EF4-FFF2-40B4-BE49-F238E27FC236}">
-                <a16:creationId xmlns:a16="http://schemas.microsoft.com/office/drawing/2014/main" id="{3E26C801-CCD7-447B-89EE-B422E63B50AF}"/>
+                <a16:creationId xmlns:a16="http://schemas.microsoft.com/office/drawing/2014/main" id="{7E46007A-054B-4D57-85CA-CD480BC24B34}"/>
               </a:ext>
             </a:extLst>
           </p:cNvPr>
@@ -10633,7 +10665,7 @@
             <a:pPr algn="l">
               <a:defRPr sz="1575" b="0">
                 <a:solidFill>
-                  <a:srgbClr val="10213D"/>
+                  <a:srgbClr val="0F1A2B"/>
                 </a:solidFill>
                 <a:latin typeface="Helvetica Neue"/>
                 <a:ea typeface="Helvetica Neue"/>
@@ -10643,7 +10675,7 @@
             <a:r>
               <a:rPr sz="1575" b="0">
                 <a:solidFill>
-                  <a:srgbClr val="10213D"/>
+                  <a:srgbClr val="0F1A2B"/>
                 </a:solidFill>
                 <a:latin typeface="Helvetica Neue"/>
                 <a:ea typeface="Helvetica Neue"/>
@@ -10659,7 +10691,7 @@
           <p:cNvPr id="15" name="">
             <a:extLst xmlns:a="http://schemas.openxmlformats.org/drawingml/2006/main">
               <a:ext uri="{FF2B5EF4-FFF2-40B4-BE49-F238E27FC236}">
-                <a16:creationId xmlns:a16="http://schemas.microsoft.com/office/drawing/2014/main" id="{B0949294-E380-4E8B-9380-5EC111531246}"/>
+                <a16:creationId xmlns:a16="http://schemas.microsoft.com/office/drawing/2014/main" id="{4D16AF9C-1E0D-492B-8CA8-3C95849D6E39}"/>
               </a:ext>
             </a:extLst>
           </p:cNvPr>
@@ -10679,7 +10711,7 @@
             </a:avLst>
           </a:prstGeom>
           <a:solidFill xmlns:a="http://schemas.openxmlformats.org/drawingml/2006/main">
-            <a:srgbClr val="EEF7FF"/>
+            <a:srgbClr val="D1CFC9"/>
           </a:solidFill>
           <a:ln xmlns:a="http://schemas.openxmlformats.org/drawingml/2006/main" w="0">
             <a:noFill/>
@@ -10691,7 +10723,7 @@
           <p:cNvPr id="16" name="">
             <a:extLst xmlns:a="http://schemas.openxmlformats.org/drawingml/2006/main">
               <a:ext uri="{FF2B5EF4-FFF2-40B4-BE49-F238E27FC236}">
-                <a16:creationId xmlns:a16="http://schemas.microsoft.com/office/drawing/2014/main" id="{73B88605-6B2E-49D5-904D-C199A3811A6B}"/>
+                <a16:creationId xmlns:a16="http://schemas.microsoft.com/office/drawing/2014/main" id="{FF830532-61D1-49D8-9463-702F9E1F3B68}"/>
               </a:ext>
             </a:extLst>
           </p:cNvPr>
@@ -10722,7 +10754,7 @@
             <a:pPr algn="l">
               <a:defRPr sz="1125" b="0">
                 <a:solidFill>
-                  <a:srgbClr val="092454"/>
+                  <a:srgbClr val="1C2E4A"/>
                 </a:solidFill>
                 <a:latin typeface="Helvetica Neue"/>
                 <a:ea typeface="Helvetica Neue"/>
@@ -10732,7 +10764,7 @@
             <a:r>
               <a:rPr sz="1125" b="0">
                 <a:solidFill>
-                  <a:srgbClr val="092454"/>
+                  <a:srgbClr val="1C2E4A"/>
                 </a:solidFill>
                 <a:latin typeface="Helvetica Neue"/>
                 <a:ea typeface="Helvetica Neue"/>
@@ -10748,7 +10780,7 @@
           <p:cNvPr id="17" name="">
             <a:extLst xmlns:a="http://schemas.openxmlformats.org/drawingml/2006/main">
               <a:ext uri="{FF2B5EF4-FFF2-40B4-BE49-F238E27FC236}">
-                <a16:creationId xmlns:a16="http://schemas.microsoft.com/office/drawing/2014/main" id="{30515E56-E3B9-4A8B-A24D-4D5922C35C52}"/>
+                <a16:creationId xmlns:a16="http://schemas.microsoft.com/office/drawing/2014/main" id="{20ADF56C-E522-46AA-9B6B-8BB61119BE8B}"/>
               </a:ext>
             </a:extLst>
           </p:cNvPr>
@@ -10768,7 +10800,7 @@
             </a:avLst>
           </a:prstGeom>
           <a:solidFill xmlns:a="http://schemas.openxmlformats.org/drawingml/2006/main">
-            <a:srgbClr val="092454"/>
+            <a:srgbClr val="1C2E4A"/>
           </a:solidFill>
           <a:ln xmlns:a="http://schemas.openxmlformats.org/drawingml/2006/main" w="0">
             <a:noFill/>
@@ -10780,7 +10812,7 @@
           <p:cNvPr id="18" name="">
             <a:extLst xmlns:a="http://schemas.openxmlformats.org/drawingml/2006/main">
               <a:ext uri="{FF2B5EF4-FFF2-40B4-BE49-F238E27FC236}">
-                <a16:creationId xmlns:a16="http://schemas.microsoft.com/office/drawing/2014/main" id="{1C29B405-1492-4C61-8A47-32C9A7B930A7}"/>
+                <a16:creationId xmlns:a16="http://schemas.microsoft.com/office/drawing/2014/main" id="{B96F1EE4-D832-4FB7-8813-B2EFDF0B8285}"/>
               </a:ext>
             </a:extLst>
           </p:cNvPr>
@@ -10811,7 +10843,7 @@
             <a:pPr algn="l">
               <a:defRPr sz="1050" b="1">
                 <a:solidFill>
-                  <a:srgbClr val="FFD43B"/>
+                  <a:srgbClr val="D1CFC9"/>
                 </a:solidFill>
                 <a:latin typeface="Helvetica Neue"/>
                 <a:ea typeface="Helvetica Neue"/>
@@ -10821,7 +10853,7 @@
             <a:r>
               <a:rPr sz="1050" b="1">
                 <a:solidFill>
-                  <a:srgbClr val="FFD43B"/>
+                  <a:srgbClr val="D1CFC9"/>
                 </a:solidFill>
                 <a:latin typeface="Helvetica Neue"/>
                 <a:ea typeface="Helvetica Neue"/>
@@ -10837,7 +10869,7 @@
           <p:cNvPr id="19" name="">
             <a:extLst xmlns:a="http://schemas.openxmlformats.org/drawingml/2006/main">
               <a:ext uri="{FF2B5EF4-FFF2-40B4-BE49-F238E27FC236}">
-                <a16:creationId xmlns:a16="http://schemas.microsoft.com/office/drawing/2014/main" id="{DC263812-7C40-488E-B267-C1F0A6FD8CE3}"/>
+                <a16:creationId xmlns:a16="http://schemas.microsoft.com/office/drawing/2014/main" id="{46E4A906-B13C-4270-9F91-78F0141DBAA3}"/>
               </a:ext>
             </a:extLst>
           </p:cNvPr>
@@ -10894,7 +10926,7 @@
           <p:cNvPr id="20" name="">
             <a:extLst xmlns:a="http://schemas.openxmlformats.org/drawingml/2006/main">
               <a:ext uri="{FF2B5EF4-FFF2-40B4-BE49-F238E27FC236}">
-                <a16:creationId xmlns:a16="http://schemas.microsoft.com/office/drawing/2014/main" id="{12F22D1A-943D-498C-A9AF-7F3AA3B6CB75}"/>
+                <a16:creationId xmlns:a16="http://schemas.microsoft.com/office/drawing/2014/main" id="{BA119200-C1BD-48ED-89D5-7D424595A610}"/>
               </a:ext>
             </a:extLst>
           </p:cNvPr>
@@ -10925,7 +10957,7 @@
             <a:pPr algn="l">
               <a:defRPr sz="1125" b="0">
                 <a:solidFill>
-                  <a:srgbClr val="BFE6FF"/>
+                  <a:srgbClr val="BDC4D4"/>
                 </a:solidFill>
                 <a:latin typeface="Helvetica Neue"/>
                 <a:ea typeface="Helvetica Neue"/>
@@ -10935,7 +10967,7 @@
             <a:r>
               <a:rPr sz="1125" b="0">
                 <a:solidFill>
-                  <a:srgbClr val="BFE6FF"/>
+                  <a:srgbClr val="BDC4D4"/>
                 </a:solidFill>
                 <a:latin typeface="Helvetica Neue"/>
                 <a:ea typeface="Helvetica Neue"/>
@@ -10951,7 +10983,7 @@
           <p:cNvPr id="21" name="">
             <a:extLst xmlns:a="http://schemas.openxmlformats.org/drawingml/2006/main">
               <a:ext uri="{FF2B5EF4-FFF2-40B4-BE49-F238E27FC236}">
-                <a16:creationId xmlns:a16="http://schemas.microsoft.com/office/drawing/2014/main" id="{7BA324C0-E1B8-4108-B523-26D80EED49AA}"/>
+                <a16:creationId xmlns:a16="http://schemas.microsoft.com/office/drawing/2014/main" id="{8FB4EC95-D02A-424F-843D-14AB14C2A05B}"/>
               </a:ext>
             </a:extLst>
           </p:cNvPr>
@@ -10969,7 +11001,7 @@
             <a:avLst/>
           </a:prstGeom>
           <a:solidFill xmlns:a="http://schemas.openxmlformats.org/drawingml/2006/main">
-            <a:srgbClr val="D8E5F2"/>
+            <a:srgbClr val="BDC4D4"/>
           </a:solidFill>
           <a:ln xmlns:a="http://schemas.openxmlformats.org/drawingml/2006/main" w="0">
             <a:noFill/>
@@ -10981,7 +11013,7 @@
           <p:cNvPr id="22" name="">
             <a:extLst xmlns:a="http://schemas.openxmlformats.org/drawingml/2006/main">
               <a:ext uri="{FF2B5EF4-FFF2-40B4-BE49-F238E27FC236}">
-                <a16:creationId xmlns:a16="http://schemas.microsoft.com/office/drawing/2014/main" id="{E8F4C9C1-6099-4F95-B9A4-78514ABCECDA}"/>
+                <a16:creationId xmlns:a16="http://schemas.microsoft.com/office/drawing/2014/main" id="{D8A5C7A0-1DA8-4357-95C2-3763E12C0E23}"/>
               </a:ext>
             </a:extLst>
           </p:cNvPr>
@@ -11012,7 +11044,7 @@
             <a:pPr algn="l">
               <a:defRPr sz="750" b="0">
                 <a:solidFill>
-                  <a:srgbClr val="61718A"/>
+                  <a:srgbClr val="52677D"/>
                 </a:solidFill>
                 <a:latin typeface="Helvetica Neue"/>
                 <a:ea typeface="Helvetica Neue"/>
@@ -11022,7 +11054,7 @@
             <a:r>
               <a:rPr sz="750" b="0">
                 <a:solidFill>
-                  <a:srgbClr val="61718A"/>
+                  <a:srgbClr val="52677D"/>
                 </a:solidFill>
                 <a:latin typeface="Helvetica Neue"/>
                 <a:ea typeface="Helvetica Neue"/>
@@ -11038,7 +11070,7 @@
           <p:cNvPr id="23" name="">
             <a:extLst xmlns:a="http://schemas.openxmlformats.org/drawingml/2006/main">
               <a:ext uri="{FF2B5EF4-FFF2-40B4-BE49-F238E27FC236}">
-                <a16:creationId xmlns:a16="http://schemas.microsoft.com/office/drawing/2014/main" id="{F92E212C-D4D5-4869-8CD8-5F18FD190740}"/>
+                <a16:creationId xmlns:a16="http://schemas.microsoft.com/office/drawing/2014/main" id="{5D4199C2-0771-4ECF-BD3E-C3AB967CFE5F}"/>
               </a:ext>
             </a:extLst>
           </p:cNvPr>
@@ -11069,7 +11101,7 @@
             <a:pPr algn="r">
               <a:defRPr sz="825" b="1">
                 <a:solidFill>
-                  <a:srgbClr val="2563EB"/>
+                  <a:srgbClr val="52677D"/>
                 </a:solidFill>
                 <a:latin typeface="Helvetica Neue"/>
                 <a:ea typeface="Helvetica Neue"/>
@@ -11079,7 +11111,7 @@
             <a:r>
               <a:rPr sz="825" b="1">
                 <a:solidFill>
-                  <a:srgbClr val="2563EB"/>
+                  <a:srgbClr val="52677D"/>
                 </a:solidFill>
                 <a:latin typeface="Helvetica Neue"/>
                 <a:ea typeface="Helvetica Neue"/>
@@ -11093,7 +11125,7 @@
     </p:spTree>
     <p:extLst>
       <p:ext uri="{BB962C8B-B14F-4D97-AF65-F5344CB8AC3E}">
-        <p14:creationId xmlns:p14="http://schemas.microsoft.com/office/powerpoint/2010/main" val="999304272"/>
+        <p14:creationId xmlns:p14="http://schemas.microsoft.com/office/powerpoint/2010/main" val="528520570"/>
       </p:ext>
     </p:extLst>
   </p:cSld>
@@ -11124,7 +11156,7 @@
           <p:cNvPr id="24" name="">
             <a:extLst xmlns:a="http://schemas.openxmlformats.org/drawingml/2006/main">
               <a:ext uri="{FF2B5EF4-FFF2-40B4-BE49-F238E27FC236}">
-                <a16:creationId xmlns:a16="http://schemas.microsoft.com/office/drawing/2014/main" id="{0EB96777-24A7-438D-B023-E73691D4DDF2}"/>
+                <a16:creationId xmlns:a16="http://schemas.microsoft.com/office/drawing/2014/main" id="{C219D9EB-4C6B-461F-9A7E-7897D76ACA33}"/>
               </a:ext>
             </a:extLst>
           </p:cNvPr>
@@ -11142,7 +11174,7 @@
             <a:avLst/>
           </a:prstGeom>
           <a:solidFill xmlns:a="http://schemas.openxmlformats.org/drawingml/2006/main">
-            <a:srgbClr val="092454"/>
+            <a:srgbClr val="1C2E4A"/>
           </a:solidFill>
           <a:ln xmlns:a="http://schemas.openxmlformats.org/drawingml/2006/main" w="0">
             <a:noFill/>
@@ -11154,7 +11186,7 @@
           <p:cNvPr id="2" name="">
             <a:extLst xmlns:a="http://schemas.openxmlformats.org/drawingml/2006/main">
               <a:ext uri="{FF2B5EF4-FFF2-40B4-BE49-F238E27FC236}">
-                <a16:creationId xmlns:a16="http://schemas.microsoft.com/office/drawing/2014/main" id="{6893569D-C405-44DB-BEB5-3779D5CD7353}"/>
+                <a16:creationId xmlns:a16="http://schemas.microsoft.com/office/drawing/2014/main" id="{2FA76665-5D36-4AB5-9220-023F0F5B7E61}"/>
               </a:ext>
             </a:extLst>
           </p:cNvPr>
@@ -11185,7 +11217,7 @@
             <a:pPr algn="l">
               <a:defRPr sz="1125" b="1">
                 <a:solidFill>
-                  <a:srgbClr val="2563EB"/>
+                  <a:srgbClr val="52677D"/>
                 </a:solidFill>
                 <a:latin typeface="Helvetica Neue"/>
                 <a:ea typeface="Helvetica Neue"/>
@@ -11195,7 +11227,7 @@
             <a:r>
               <a:rPr sz="1125" b="1">
                 <a:solidFill>
-                  <a:srgbClr val="2563EB"/>
+                  <a:srgbClr val="52677D"/>
                 </a:solidFill>
                 <a:latin typeface="Helvetica Neue"/>
                 <a:ea typeface="Helvetica Neue"/>
@@ -11211,7 +11243,7 @@
           <p:cNvPr id="3" name="">
             <a:extLst xmlns:a="http://schemas.openxmlformats.org/drawingml/2006/main">
               <a:ext uri="{FF2B5EF4-FFF2-40B4-BE49-F238E27FC236}">
-                <a16:creationId xmlns:a16="http://schemas.microsoft.com/office/drawing/2014/main" id="{5DFCF4B4-CC0F-4BA7-9AC7-A0FB275D0211}"/>
+                <a16:creationId xmlns:a16="http://schemas.microsoft.com/office/drawing/2014/main" id="{472F7BD2-BB6E-4F4E-AF48-0FCB4C12A5E5}"/>
               </a:ext>
             </a:extLst>
           </p:cNvPr>
@@ -11231,7 +11263,7 @@
             </a:avLst>
           </a:prstGeom>
           <a:solidFill xmlns:a="http://schemas.openxmlformats.org/drawingml/2006/main">
-            <a:srgbClr val="FFD43B"/>
+            <a:srgbClr val="D1CFC9"/>
           </a:solidFill>
           <a:ln xmlns:a="http://schemas.openxmlformats.org/drawingml/2006/main" w="0">
             <a:noFill/>
@@ -11243,7 +11275,7 @@
           <p:cNvPr id="4" name="">
             <a:extLst xmlns:a="http://schemas.openxmlformats.org/drawingml/2006/main">
               <a:ext uri="{FF2B5EF4-FFF2-40B4-BE49-F238E27FC236}">
-                <a16:creationId xmlns:a16="http://schemas.microsoft.com/office/drawing/2014/main" id="{253FC0CD-6BAF-4DD3-847B-2CC0EE160A58}"/>
+                <a16:creationId xmlns:a16="http://schemas.microsoft.com/office/drawing/2014/main" id="{3E6B80A5-D7B8-4B0F-9999-3D455A0CE8AB}"/>
               </a:ext>
             </a:extLst>
           </p:cNvPr>
@@ -11274,7 +11306,7 @@
             <a:pPr algn="ctr">
               <a:defRPr sz="1275" b="1">
                 <a:solidFill>
-                  <a:srgbClr val="092454"/>
+                  <a:srgbClr val="1C2E4A"/>
                 </a:solidFill>
                 <a:latin typeface="Helvetica Neue"/>
                 <a:ea typeface="Helvetica Neue"/>
@@ -11284,7 +11316,7 @@
             <a:r>
               <a:rPr sz="1275" b="1">
                 <a:solidFill>
-                  <a:srgbClr val="092454"/>
+                  <a:srgbClr val="1C2E4A"/>
                 </a:solidFill>
                 <a:latin typeface="Helvetica Neue"/>
                 <a:ea typeface="Helvetica Neue"/>
@@ -11300,7 +11332,7 @@
           <p:cNvPr id="5" name="">
             <a:extLst xmlns:a="http://schemas.openxmlformats.org/drawingml/2006/main">
               <a:ext uri="{FF2B5EF4-FFF2-40B4-BE49-F238E27FC236}">
-                <a16:creationId xmlns:a16="http://schemas.microsoft.com/office/drawing/2014/main" id="{4A8DBF08-8EF8-4666-901B-E8565B7243CD}"/>
+                <a16:creationId xmlns:a16="http://schemas.microsoft.com/office/drawing/2014/main" id="{9803EB3C-BC9B-4E63-B374-9634D34A862D}"/>
               </a:ext>
             </a:extLst>
           </p:cNvPr>
@@ -11331,7 +11363,7 @@
             <a:pPr algn="l">
               <a:defRPr sz="2550" b="1">
                 <a:solidFill>
-                  <a:srgbClr val="092454"/>
+                  <a:srgbClr val="1C2E4A"/>
                 </a:solidFill>
                 <a:latin typeface="Helvetica Neue"/>
                 <a:ea typeface="Helvetica Neue"/>
@@ -11341,7 +11373,7 @@
             <a:r>
               <a:rPr sz="2550" b="1">
                 <a:solidFill>
-                  <a:srgbClr val="092454"/>
+                  <a:srgbClr val="1C2E4A"/>
                 </a:solidFill>
                 <a:latin typeface="Helvetica Neue"/>
                 <a:ea typeface="Helvetica Neue"/>
@@ -11357,7 +11389,7 @@
           <p:cNvPr id="6" name="">
             <a:extLst xmlns:a="http://schemas.openxmlformats.org/drawingml/2006/main">
               <a:ext uri="{FF2B5EF4-FFF2-40B4-BE49-F238E27FC236}">
-                <a16:creationId xmlns:a16="http://schemas.microsoft.com/office/drawing/2014/main" id="{3257FF61-C6D9-4D50-8C3A-617881E1489C}"/>
+                <a16:creationId xmlns:a16="http://schemas.microsoft.com/office/drawing/2014/main" id="{866200DA-C8B3-4FBE-95BD-7C6EB195379D}"/>
               </a:ext>
             </a:extLst>
           </p:cNvPr>
@@ -11377,7 +11409,7 @@
             </a:avLst>
           </a:prstGeom>
           <a:solidFill xmlns:a="http://schemas.openxmlformats.org/drawingml/2006/main">
-            <a:srgbClr val="EEF7FF"/>
+            <a:srgbClr val="D1CFC9"/>
           </a:solidFill>
           <a:ln xmlns:a="http://schemas.openxmlformats.org/drawingml/2006/main" w="0">
             <a:noFill/>
@@ -11389,7 +11421,7 @@
           <p:cNvPr id="7" name="">
             <a:extLst xmlns:a="http://schemas.openxmlformats.org/drawingml/2006/main">
               <a:ext uri="{FF2B5EF4-FFF2-40B4-BE49-F238E27FC236}">
-                <a16:creationId xmlns:a16="http://schemas.microsoft.com/office/drawing/2014/main" id="{D04D9C88-A978-4B85-8B7F-BEA2B308B1D7}"/>
+                <a16:creationId xmlns:a16="http://schemas.microsoft.com/office/drawing/2014/main" id="{86A6BFF5-3F5C-4C68-957C-A85B76AE1C83}"/>
               </a:ext>
             </a:extLst>
           </p:cNvPr>
@@ -11420,7 +11452,7 @@
             <a:pPr algn="ctr">
               <a:defRPr sz="1350" b="1">
                 <a:solidFill>
-                  <a:srgbClr val="2563EB"/>
+                  <a:srgbClr val="52677D"/>
                 </a:solidFill>
                 <a:latin typeface="Helvetica Neue"/>
                 <a:ea typeface="Helvetica Neue"/>
@@ -11430,7 +11462,7 @@
             <a:r>
               <a:rPr sz="1350" b="1">
                 <a:solidFill>
-                  <a:srgbClr val="2563EB"/>
+                  <a:srgbClr val="52677D"/>
                 </a:solidFill>
                 <a:latin typeface="Helvetica Neue"/>
                 <a:ea typeface="Helvetica Neue"/>
@@ -11446,7 +11478,7 @@
           <p:cNvPr id="8" name="">
             <a:extLst xmlns:a="http://schemas.openxmlformats.org/drawingml/2006/main">
               <a:ext uri="{FF2B5EF4-FFF2-40B4-BE49-F238E27FC236}">
-                <a16:creationId xmlns:a16="http://schemas.microsoft.com/office/drawing/2014/main" id="{F0B709F6-B749-43D8-8DF2-F90FFA3AAAA5}"/>
+                <a16:creationId xmlns:a16="http://schemas.microsoft.com/office/drawing/2014/main" id="{EB5165D4-1B7D-49FC-B0CD-07417C367432}"/>
               </a:ext>
             </a:extLst>
           </p:cNvPr>
@@ -11477,7 +11509,7 @@
             <a:pPr algn="l">
               <a:defRPr sz="1575" b="0">
                 <a:solidFill>
-                  <a:srgbClr val="10213D"/>
+                  <a:srgbClr val="0F1A2B"/>
                 </a:solidFill>
                 <a:latin typeface="Helvetica Neue"/>
                 <a:ea typeface="Helvetica Neue"/>
@@ -11487,7 +11519,7 @@
             <a:r>
               <a:rPr sz="1575" b="0">
                 <a:solidFill>
-                  <a:srgbClr val="10213D"/>
+                  <a:srgbClr val="0F1A2B"/>
                 </a:solidFill>
                 <a:latin typeface="Helvetica Neue"/>
                 <a:ea typeface="Helvetica Neue"/>
@@ -11503,7 +11535,7 @@
           <p:cNvPr id="9" name="">
             <a:extLst xmlns:a="http://schemas.openxmlformats.org/drawingml/2006/main">
               <a:ext uri="{FF2B5EF4-FFF2-40B4-BE49-F238E27FC236}">
-                <a16:creationId xmlns:a16="http://schemas.microsoft.com/office/drawing/2014/main" id="{5CB49BF5-68C9-43B8-9C2A-A0CC0F6953CB}"/>
+                <a16:creationId xmlns:a16="http://schemas.microsoft.com/office/drawing/2014/main" id="{D5B36444-67B5-4C20-A7C4-853C0C4F1D21}"/>
               </a:ext>
             </a:extLst>
           </p:cNvPr>
@@ -11523,7 +11555,7 @@
             </a:avLst>
           </a:prstGeom>
           <a:solidFill xmlns:a="http://schemas.openxmlformats.org/drawingml/2006/main">
-            <a:srgbClr val="EEF7FF"/>
+            <a:srgbClr val="D1CFC9"/>
           </a:solidFill>
           <a:ln xmlns:a="http://schemas.openxmlformats.org/drawingml/2006/main" w="0">
             <a:noFill/>
@@ -11535,7 +11567,7 @@
           <p:cNvPr id="10" name="">
             <a:extLst xmlns:a="http://schemas.openxmlformats.org/drawingml/2006/main">
               <a:ext uri="{FF2B5EF4-FFF2-40B4-BE49-F238E27FC236}">
-                <a16:creationId xmlns:a16="http://schemas.microsoft.com/office/drawing/2014/main" id="{B85F1591-4F96-42E3-82B0-8495B26A1CED}"/>
+                <a16:creationId xmlns:a16="http://schemas.microsoft.com/office/drawing/2014/main" id="{4BEE14C5-8608-45FB-96FE-91EDAE0DE9D7}"/>
               </a:ext>
             </a:extLst>
           </p:cNvPr>
@@ -11566,7 +11598,7 @@
             <a:pPr algn="ctr">
               <a:defRPr sz="1350" b="1">
                 <a:solidFill>
-                  <a:srgbClr val="2563EB"/>
+                  <a:srgbClr val="52677D"/>
                 </a:solidFill>
                 <a:latin typeface="Helvetica Neue"/>
                 <a:ea typeface="Helvetica Neue"/>
@@ -11576,7 +11608,7 @@
             <a:r>
               <a:rPr sz="1350" b="1">
                 <a:solidFill>
-                  <a:srgbClr val="2563EB"/>
+                  <a:srgbClr val="52677D"/>
                 </a:solidFill>
                 <a:latin typeface="Helvetica Neue"/>
                 <a:ea typeface="Helvetica Neue"/>
@@ -11592,7 +11624,7 @@
           <p:cNvPr id="11" name="">
             <a:extLst xmlns:a="http://schemas.openxmlformats.org/drawingml/2006/main">
               <a:ext uri="{FF2B5EF4-FFF2-40B4-BE49-F238E27FC236}">
-                <a16:creationId xmlns:a16="http://schemas.microsoft.com/office/drawing/2014/main" id="{0DBBA7A3-AD19-4274-A325-4F5377CBFC8A}"/>
+                <a16:creationId xmlns:a16="http://schemas.microsoft.com/office/drawing/2014/main" id="{2E54B72C-B527-4CEC-8A9C-741D40EAE485}"/>
               </a:ext>
             </a:extLst>
           </p:cNvPr>
@@ -11623,7 +11655,7 @@
             <a:pPr algn="l">
               <a:defRPr sz="1575" b="0">
                 <a:solidFill>
-                  <a:srgbClr val="10213D"/>
+                  <a:srgbClr val="0F1A2B"/>
                 </a:solidFill>
                 <a:latin typeface="Helvetica Neue"/>
                 <a:ea typeface="Helvetica Neue"/>
@@ -11633,7 +11665,7 @@
             <a:r>
               <a:rPr sz="1575" b="0">
                 <a:solidFill>
-                  <a:srgbClr val="10213D"/>
+                  <a:srgbClr val="0F1A2B"/>
                 </a:solidFill>
                 <a:latin typeface="Helvetica Neue"/>
                 <a:ea typeface="Helvetica Neue"/>
@@ -11649,7 +11681,7 @@
           <p:cNvPr id="12" name="">
             <a:extLst xmlns:a="http://schemas.openxmlformats.org/drawingml/2006/main">
               <a:ext uri="{FF2B5EF4-FFF2-40B4-BE49-F238E27FC236}">
-                <a16:creationId xmlns:a16="http://schemas.microsoft.com/office/drawing/2014/main" id="{A8CEFA84-8F05-491C-ADFD-0925BE45E61C}"/>
+                <a16:creationId xmlns:a16="http://schemas.microsoft.com/office/drawing/2014/main" id="{B8CDBF07-4B61-451A-911D-833773943F53}"/>
               </a:ext>
             </a:extLst>
           </p:cNvPr>
@@ -11669,7 +11701,7 @@
             </a:avLst>
           </a:prstGeom>
           <a:solidFill xmlns:a="http://schemas.openxmlformats.org/drawingml/2006/main">
-            <a:srgbClr val="EEF7FF"/>
+            <a:srgbClr val="D1CFC9"/>
           </a:solidFill>
           <a:ln xmlns:a="http://schemas.openxmlformats.org/drawingml/2006/main" w="0">
             <a:noFill/>
@@ -11681,7 +11713,7 @@
           <p:cNvPr id="13" name="">
             <a:extLst xmlns:a="http://schemas.openxmlformats.org/drawingml/2006/main">
               <a:ext uri="{FF2B5EF4-FFF2-40B4-BE49-F238E27FC236}">
-                <a16:creationId xmlns:a16="http://schemas.microsoft.com/office/drawing/2014/main" id="{3F408FAB-3DA2-4F13-A09F-EFF875438EB0}"/>
+                <a16:creationId xmlns:a16="http://schemas.microsoft.com/office/drawing/2014/main" id="{706FE4B1-E2E2-44DE-B813-B40A54C6B607}"/>
               </a:ext>
             </a:extLst>
           </p:cNvPr>
@@ -11712,7 +11744,7 @@
             <a:pPr algn="ctr">
               <a:defRPr sz="1350" b="1">
                 <a:solidFill>
-                  <a:srgbClr val="2563EB"/>
+                  <a:srgbClr val="52677D"/>
                 </a:solidFill>
                 <a:latin typeface="Helvetica Neue"/>
                 <a:ea typeface="Helvetica Neue"/>
@@ -11722,7 +11754,7 @@
             <a:r>
               <a:rPr sz="1350" b="1">
                 <a:solidFill>
-                  <a:srgbClr val="2563EB"/>
+                  <a:srgbClr val="52677D"/>
                 </a:solidFill>
                 <a:latin typeface="Helvetica Neue"/>
                 <a:ea typeface="Helvetica Neue"/>
@@ -11738,7 +11770,7 @@
           <p:cNvPr id="14" name="">
             <a:extLst xmlns:a="http://schemas.openxmlformats.org/drawingml/2006/main">
               <a:ext uri="{FF2B5EF4-FFF2-40B4-BE49-F238E27FC236}">
-                <a16:creationId xmlns:a16="http://schemas.microsoft.com/office/drawing/2014/main" id="{FA2FE056-BB4B-4208-B292-C19CBC653E45}"/>
+                <a16:creationId xmlns:a16="http://schemas.microsoft.com/office/drawing/2014/main" id="{26E2E68B-49F8-49AC-AF41-D7364A5E56BD}"/>
               </a:ext>
             </a:extLst>
           </p:cNvPr>
@@ -11769,7 +11801,7 @@
             <a:pPr algn="l">
               <a:defRPr sz="1575" b="0">
                 <a:solidFill>
-                  <a:srgbClr val="10213D"/>
+                  <a:srgbClr val="0F1A2B"/>
                 </a:solidFill>
                 <a:latin typeface="Helvetica Neue"/>
                 <a:ea typeface="Helvetica Neue"/>
@@ -11779,7 +11811,7 @@
             <a:r>
               <a:rPr sz="1575" b="0">
                 <a:solidFill>
-                  <a:srgbClr val="10213D"/>
+                  <a:srgbClr val="0F1A2B"/>
                 </a:solidFill>
                 <a:latin typeface="Helvetica Neue"/>
                 <a:ea typeface="Helvetica Neue"/>
@@ -11795,7 +11827,7 @@
           <p:cNvPr id="15" name="">
             <a:extLst xmlns:a="http://schemas.openxmlformats.org/drawingml/2006/main">
               <a:ext uri="{FF2B5EF4-FFF2-40B4-BE49-F238E27FC236}">
-                <a16:creationId xmlns:a16="http://schemas.microsoft.com/office/drawing/2014/main" id="{730558FF-C0CC-4E5C-9578-B36D54E617EE}"/>
+                <a16:creationId xmlns:a16="http://schemas.microsoft.com/office/drawing/2014/main" id="{F1CC316F-628B-4724-B6C6-CCA4DA19095A}"/>
               </a:ext>
             </a:extLst>
           </p:cNvPr>
@@ -11815,7 +11847,7 @@
             </a:avLst>
           </a:prstGeom>
           <a:solidFill xmlns:a="http://schemas.openxmlformats.org/drawingml/2006/main">
-            <a:srgbClr val="EEF7FF"/>
+            <a:srgbClr val="D1CFC9"/>
           </a:solidFill>
           <a:ln xmlns:a="http://schemas.openxmlformats.org/drawingml/2006/main" w="0">
             <a:noFill/>
@@ -11827,7 +11859,7 @@
           <p:cNvPr id="16" name="">
             <a:extLst xmlns:a="http://schemas.openxmlformats.org/drawingml/2006/main">
               <a:ext uri="{FF2B5EF4-FFF2-40B4-BE49-F238E27FC236}">
-                <a16:creationId xmlns:a16="http://schemas.microsoft.com/office/drawing/2014/main" id="{E3B9719B-4305-411F-834F-4E95E4F5F6C8}"/>
+                <a16:creationId xmlns:a16="http://schemas.microsoft.com/office/drawing/2014/main" id="{9DDEE0B7-40EF-48A5-A6BC-B3545C9FCDB5}"/>
               </a:ext>
             </a:extLst>
           </p:cNvPr>
@@ -11858,7 +11890,7 @@
             <a:pPr algn="l">
               <a:defRPr sz="1125" b="0">
                 <a:solidFill>
-                  <a:srgbClr val="092454"/>
+                  <a:srgbClr val="1C2E4A"/>
                 </a:solidFill>
                 <a:latin typeface="Helvetica Neue"/>
                 <a:ea typeface="Helvetica Neue"/>
@@ -11868,7 +11900,7 @@
             <a:r>
               <a:rPr sz="1125" b="0">
                 <a:solidFill>
-                  <a:srgbClr val="092454"/>
+                  <a:srgbClr val="1C2E4A"/>
                 </a:solidFill>
                 <a:latin typeface="Helvetica Neue"/>
                 <a:ea typeface="Helvetica Neue"/>
@@ -11884,7 +11916,7 @@
           <p:cNvPr id="17" name="">
             <a:extLst xmlns:a="http://schemas.openxmlformats.org/drawingml/2006/main">
               <a:ext uri="{FF2B5EF4-FFF2-40B4-BE49-F238E27FC236}">
-                <a16:creationId xmlns:a16="http://schemas.microsoft.com/office/drawing/2014/main" id="{D320C7B0-7090-4911-9393-B7CC83643927}"/>
+                <a16:creationId xmlns:a16="http://schemas.microsoft.com/office/drawing/2014/main" id="{9AC37919-9530-46D8-A993-E83DD0DB2D4B}"/>
               </a:ext>
             </a:extLst>
           </p:cNvPr>
@@ -11904,7 +11936,7 @@
             </a:avLst>
           </a:prstGeom>
           <a:solidFill xmlns:a="http://schemas.openxmlformats.org/drawingml/2006/main">
-            <a:srgbClr val="092454"/>
+            <a:srgbClr val="1C2E4A"/>
           </a:solidFill>
           <a:ln xmlns:a="http://schemas.openxmlformats.org/drawingml/2006/main" w="0">
             <a:noFill/>
@@ -11916,7 +11948,7 @@
           <p:cNvPr id="18" name="">
             <a:extLst xmlns:a="http://schemas.openxmlformats.org/drawingml/2006/main">
               <a:ext uri="{FF2B5EF4-FFF2-40B4-BE49-F238E27FC236}">
-                <a16:creationId xmlns:a16="http://schemas.microsoft.com/office/drawing/2014/main" id="{245C7445-6CA5-4681-B352-2F31840BBCE3}"/>
+                <a16:creationId xmlns:a16="http://schemas.microsoft.com/office/drawing/2014/main" id="{2958099A-54C6-442E-A030-9C1E6E99DD21}"/>
               </a:ext>
             </a:extLst>
           </p:cNvPr>
@@ -11947,7 +11979,7 @@
             <a:pPr algn="l">
               <a:defRPr sz="1050" b="1">
                 <a:solidFill>
-                  <a:srgbClr val="FFD43B"/>
+                  <a:srgbClr val="D1CFC9"/>
                 </a:solidFill>
                 <a:latin typeface="Helvetica Neue"/>
                 <a:ea typeface="Helvetica Neue"/>
@@ -11957,7 +11989,7 @@
             <a:r>
               <a:rPr sz="1050" b="1">
                 <a:solidFill>
-                  <a:srgbClr val="FFD43B"/>
+                  <a:srgbClr val="D1CFC9"/>
                 </a:solidFill>
                 <a:latin typeface="Helvetica Neue"/>
                 <a:ea typeface="Helvetica Neue"/>
@@ -11973,7 +12005,7 @@
           <p:cNvPr id="19" name="">
             <a:extLst xmlns:a="http://schemas.openxmlformats.org/drawingml/2006/main">
               <a:ext uri="{FF2B5EF4-FFF2-40B4-BE49-F238E27FC236}">
-                <a16:creationId xmlns:a16="http://schemas.microsoft.com/office/drawing/2014/main" id="{A5A6446C-04EF-4D1D-8F88-49BAA59DED1A}"/>
+                <a16:creationId xmlns:a16="http://schemas.microsoft.com/office/drawing/2014/main" id="{9DC28DC1-91F6-4B5B-AE78-06F343450D1E}"/>
               </a:ext>
             </a:extLst>
           </p:cNvPr>
@@ -12030,7 +12062,7 @@
           <p:cNvPr id="20" name="">
             <a:extLst xmlns:a="http://schemas.openxmlformats.org/drawingml/2006/main">
               <a:ext uri="{FF2B5EF4-FFF2-40B4-BE49-F238E27FC236}">
-                <a16:creationId xmlns:a16="http://schemas.microsoft.com/office/drawing/2014/main" id="{03F2782E-E872-4655-A1B5-2CE8F0BDDA9B}"/>
+                <a16:creationId xmlns:a16="http://schemas.microsoft.com/office/drawing/2014/main" id="{D9830CF4-3C89-4316-966A-CB7848BC594B}"/>
               </a:ext>
             </a:extLst>
           </p:cNvPr>
@@ -12061,7 +12093,7 @@
             <a:pPr algn="l">
               <a:defRPr sz="1125" b="0">
                 <a:solidFill>
-                  <a:srgbClr val="BFE6FF"/>
+                  <a:srgbClr val="BDC4D4"/>
                 </a:solidFill>
                 <a:latin typeface="Helvetica Neue"/>
                 <a:ea typeface="Helvetica Neue"/>
@@ -12071,7 +12103,7 @@
             <a:r>
               <a:rPr sz="1125" b="0">
                 <a:solidFill>
-                  <a:srgbClr val="BFE6FF"/>
+                  <a:srgbClr val="BDC4D4"/>
                 </a:solidFill>
                 <a:latin typeface="Helvetica Neue"/>
                 <a:ea typeface="Helvetica Neue"/>
@@ -12087,7 +12119,7 @@
           <p:cNvPr id="21" name="">
             <a:extLst xmlns:a="http://schemas.openxmlformats.org/drawingml/2006/main">
               <a:ext uri="{FF2B5EF4-FFF2-40B4-BE49-F238E27FC236}">
-                <a16:creationId xmlns:a16="http://schemas.microsoft.com/office/drawing/2014/main" id="{6004E021-72AA-4340-B63B-B78BCFDFB24B}"/>
+                <a16:creationId xmlns:a16="http://schemas.microsoft.com/office/drawing/2014/main" id="{AD971B22-A364-4C19-9617-2270347712A6}"/>
               </a:ext>
             </a:extLst>
           </p:cNvPr>
@@ -12105,7 +12137,7 @@
             <a:avLst/>
           </a:prstGeom>
           <a:solidFill xmlns:a="http://schemas.openxmlformats.org/drawingml/2006/main">
-            <a:srgbClr val="D8E5F2"/>
+            <a:srgbClr val="BDC4D4"/>
           </a:solidFill>
           <a:ln xmlns:a="http://schemas.openxmlformats.org/drawingml/2006/main" w="0">
             <a:noFill/>
@@ -12117,7 +12149,7 @@
           <p:cNvPr id="22" name="">
             <a:extLst xmlns:a="http://schemas.openxmlformats.org/drawingml/2006/main">
               <a:ext uri="{FF2B5EF4-FFF2-40B4-BE49-F238E27FC236}">
-                <a16:creationId xmlns:a16="http://schemas.microsoft.com/office/drawing/2014/main" id="{09E5A62F-0DAF-4E2C-A575-140CE6798786}"/>
+                <a16:creationId xmlns:a16="http://schemas.microsoft.com/office/drawing/2014/main" id="{F4C8FABE-D4C7-48EF-A2D7-90CBF17AF141}"/>
               </a:ext>
             </a:extLst>
           </p:cNvPr>
@@ -12148,7 +12180,7 @@
             <a:pPr algn="l">
               <a:defRPr sz="750" b="0">
                 <a:solidFill>
-                  <a:srgbClr val="61718A"/>
+                  <a:srgbClr val="52677D"/>
                 </a:solidFill>
                 <a:latin typeface="Helvetica Neue"/>
                 <a:ea typeface="Helvetica Neue"/>
@@ -12158,7 +12190,7 @@
             <a:r>
               <a:rPr sz="750" b="0">
                 <a:solidFill>
-                  <a:srgbClr val="61718A"/>
+                  <a:srgbClr val="52677D"/>
                 </a:solidFill>
                 <a:latin typeface="Helvetica Neue"/>
                 <a:ea typeface="Helvetica Neue"/>
@@ -12174,7 +12206,7 @@
           <p:cNvPr id="23" name="">
             <a:extLst xmlns:a="http://schemas.openxmlformats.org/drawingml/2006/main">
               <a:ext uri="{FF2B5EF4-FFF2-40B4-BE49-F238E27FC236}">
-                <a16:creationId xmlns:a16="http://schemas.microsoft.com/office/drawing/2014/main" id="{BF33F344-3CD2-4190-8302-4EB17E90DF73}"/>
+                <a16:creationId xmlns:a16="http://schemas.microsoft.com/office/drawing/2014/main" id="{DAF9B684-B76C-4D1A-9B13-1F0E4B8C0A9D}"/>
               </a:ext>
             </a:extLst>
           </p:cNvPr>
@@ -12205,7 +12237,7 @@
             <a:pPr algn="r">
               <a:defRPr sz="825" b="1">
                 <a:solidFill>
-                  <a:srgbClr val="2563EB"/>
+                  <a:srgbClr val="52677D"/>
                 </a:solidFill>
                 <a:latin typeface="Helvetica Neue"/>
                 <a:ea typeface="Helvetica Neue"/>
@@ -12215,7 +12247,7 @@
             <a:r>
               <a:rPr sz="825" b="1">
                 <a:solidFill>
-                  <a:srgbClr val="2563EB"/>
+                  <a:srgbClr val="52677D"/>
                 </a:solidFill>
                 <a:latin typeface="Helvetica Neue"/>
                 <a:ea typeface="Helvetica Neue"/>
@@ -12229,7 +12261,7 @@
     </p:spTree>
     <p:extLst>
       <p:ext uri="{BB962C8B-B14F-4D97-AF65-F5344CB8AC3E}">
-        <p14:creationId xmlns:p14="http://schemas.microsoft.com/office/powerpoint/2010/main" val="1542726308"/>
+        <p14:creationId xmlns:p14="http://schemas.microsoft.com/office/powerpoint/2010/main" val="175406747"/>
       </p:ext>
     </p:extLst>
   </p:cSld>
@@ -12242,7 +12274,7 @@
     <p:bg>
       <p:bgPr>
         <a:solidFill xmlns:a="http://schemas.openxmlformats.org/drawingml/2006/main">
-          <a:srgbClr val="092454"/>
+          <a:srgbClr val="1C2E4A"/>
         </a:solidFill>
       </p:bgPr>
     </p:bg>
@@ -12260,7 +12292,7 @@
           <p:cNvPr id="20" name="">
             <a:extLst xmlns:a="http://schemas.openxmlformats.org/drawingml/2006/main">
               <a:ext uri="{FF2B5EF4-FFF2-40B4-BE49-F238E27FC236}">
-                <a16:creationId xmlns:a16="http://schemas.microsoft.com/office/drawing/2014/main" id="{343AFC59-337F-4306-8D5D-C938341BC13A}"/>
+                <a16:creationId xmlns:a16="http://schemas.microsoft.com/office/drawing/2014/main" id="{54489E39-48B5-4768-89D0-CF3E6D2C7EEC}"/>
               </a:ext>
             </a:extLst>
           </p:cNvPr>
@@ -12291,7 +12323,7 @@
             <a:pPr algn="l">
               <a:defRPr sz="1125" b="1">
                 <a:solidFill>
-                  <a:srgbClr val="FFD43B"/>
+                  <a:srgbClr val="D1CFC9"/>
                 </a:solidFill>
                 <a:latin typeface="Helvetica Neue"/>
                 <a:ea typeface="Helvetica Neue"/>
@@ -12301,7 +12333,7 @@
             <a:r>
               <a:rPr sz="1125" b="1">
                 <a:solidFill>
-                  <a:srgbClr val="FFD43B"/>
+                  <a:srgbClr val="D1CFC9"/>
                 </a:solidFill>
                 <a:latin typeface="Helvetica Neue"/>
                 <a:ea typeface="Helvetica Neue"/>
@@ -12317,7 +12349,7 @@
           <p:cNvPr id="2" name="">
             <a:extLst xmlns:a="http://schemas.openxmlformats.org/drawingml/2006/main">
               <a:ext uri="{FF2B5EF4-FFF2-40B4-BE49-F238E27FC236}">
-                <a16:creationId xmlns:a16="http://schemas.microsoft.com/office/drawing/2014/main" id="{1CE17696-9C67-4FD1-AFC7-B17685459896}"/>
+                <a16:creationId xmlns:a16="http://schemas.microsoft.com/office/drawing/2014/main" id="{B9C86345-4E07-4E4E-BA98-D61505A282A2}"/>
               </a:ext>
             </a:extLst>
           </p:cNvPr>
@@ -12374,7 +12406,7 @@
           <p:cNvPr id="3" name="">
             <a:extLst xmlns:a="http://schemas.openxmlformats.org/drawingml/2006/main">
               <a:ext uri="{FF2B5EF4-FFF2-40B4-BE49-F238E27FC236}">
-                <a16:creationId xmlns:a16="http://schemas.microsoft.com/office/drawing/2014/main" id="{A798977B-E63D-4E66-9B92-AA95F8C18B6F}"/>
+                <a16:creationId xmlns:a16="http://schemas.microsoft.com/office/drawing/2014/main" id="{05A276C5-306E-4163-BAFD-36C1E995205C}"/>
               </a:ext>
             </a:extLst>
           </p:cNvPr>
@@ -12394,7 +12426,7 @@
             </a:avLst>
           </a:prstGeom>
           <a:solidFill xmlns:a="http://schemas.openxmlformats.org/drawingml/2006/main">
-            <a:srgbClr val="FFD43B"/>
+            <a:srgbClr val="D1CFC9"/>
           </a:solidFill>
           <a:ln xmlns:a="http://schemas.openxmlformats.org/drawingml/2006/main" w="0">
             <a:noFill/>
@@ -12406,7 +12438,7 @@
           <p:cNvPr id="4" name="">
             <a:extLst xmlns:a="http://schemas.openxmlformats.org/drawingml/2006/main">
               <a:ext uri="{FF2B5EF4-FFF2-40B4-BE49-F238E27FC236}">
-                <a16:creationId xmlns:a16="http://schemas.microsoft.com/office/drawing/2014/main" id="{F61B6725-6AA7-447C-8E85-49FC804C25A3}"/>
+                <a16:creationId xmlns:a16="http://schemas.microsoft.com/office/drawing/2014/main" id="{9D5E9443-865A-44CD-98FC-436C0B4F2E24}"/>
               </a:ext>
             </a:extLst>
           </p:cNvPr>
@@ -12437,7 +12469,7 @@
             <a:pPr algn="ctr">
               <a:defRPr sz="1275" b="1">
                 <a:solidFill>
-                  <a:srgbClr val="092454"/>
+                  <a:srgbClr val="1C2E4A"/>
                 </a:solidFill>
                 <a:latin typeface="Helvetica Neue"/>
                 <a:ea typeface="Helvetica Neue"/>
@@ -12447,7 +12479,7 @@
             <a:r>
               <a:rPr sz="1275" b="1">
                 <a:solidFill>
-                  <a:srgbClr val="092454"/>
+                  <a:srgbClr val="1C2E4A"/>
                 </a:solidFill>
                 <a:latin typeface="Helvetica Neue"/>
                 <a:ea typeface="Helvetica Neue"/>
@@ -12463,7 +12495,7 @@
           <p:cNvPr id="5" name="">
             <a:extLst xmlns:a="http://schemas.openxmlformats.org/drawingml/2006/main">
               <a:ext uri="{FF2B5EF4-FFF2-40B4-BE49-F238E27FC236}">
-                <a16:creationId xmlns:a16="http://schemas.microsoft.com/office/drawing/2014/main" id="{E679F074-E132-4819-8389-9E15062E87A3}"/>
+                <a16:creationId xmlns:a16="http://schemas.microsoft.com/office/drawing/2014/main" id="{9BE9BB93-8A60-4BB4-AB32-9EDC824DDF68}"/>
               </a:ext>
             </a:extLst>
           </p:cNvPr>
@@ -12494,7 +12526,7 @@
             <a:pPr algn="l">
               <a:defRPr sz="1950" b="1">
                 <a:solidFill>
-                  <a:srgbClr val="FFD43B"/>
+                  <a:srgbClr val="D1CFC9"/>
                 </a:solidFill>
                 <a:latin typeface="Helvetica Neue"/>
                 <a:ea typeface="Helvetica Neue"/>
@@ -12504,7 +12536,7 @@
             <a:r>
               <a:rPr sz="1950" b="1">
                 <a:solidFill>
-                  <a:srgbClr val="FFD43B"/>
+                  <a:srgbClr val="D1CFC9"/>
                 </a:solidFill>
                 <a:latin typeface="Helvetica Neue"/>
                 <a:ea typeface="Helvetica Neue"/>
@@ -12520,7 +12552,7 @@
           <p:cNvPr id="6" name="">
             <a:extLst xmlns:a="http://schemas.openxmlformats.org/drawingml/2006/main">
               <a:ext uri="{FF2B5EF4-FFF2-40B4-BE49-F238E27FC236}">
-                <a16:creationId xmlns:a16="http://schemas.microsoft.com/office/drawing/2014/main" id="{B9E6C592-A48F-4285-9827-8084C13DCC85}"/>
+                <a16:creationId xmlns:a16="http://schemas.microsoft.com/office/drawing/2014/main" id="{9725CB9F-0B26-4A8A-94BD-D879A76E60D3}"/>
               </a:ext>
             </a:extLst>
           </p:cNvPr>
@@ -12577,7 +12609,7 @@
           <p:cNvPr id="7" name="">
             <a:extLst xmlns:a="http://schemas.openxmlformats.org/drawingml/2006/main">
               <a:ext uri="{FF2B5EF4-FFF2-40B4-BE49-F238E27FC236}">
-                <a16:creationId xmlns:a16="http://schemas.microsoft.com/office/drawing/2014/main" id="{B1B9132F-B26D-446E-986E-3A6528F69CEF}"/>
+                <a16:creationId xmlns:a16="http://schemas.microsoft.com/office/drawing/2014/main" id="{40323D63-63FD-487C-AF83-44E39A610008}"/>
               </a:ext>
             </a:extLst>
           </p:cNvPr>
@@ -12608,7 +12640,7 @@
             <a:pPr algn="l">
               <a:defRPr sz="1950" b="1">
                 <a:solidFill>
-                  <a:srgbClr val="FFD43B"/>
+                  <a:srgbClr val="D1CFC9"/>
                 </a:solidFill>
                 <a:latin typeface="Helvetica Neue"/>
                 <a:ea typeface="Helvetica Neue"/>
@@ -12618,7 +12650,7 @@
             <a:r>
               <a:rPr sz="1950" b="1">
                 <a:solidFill>
-                  <a:srgbClr val="FFD43B"/>
+                  <a:srgbClr val="D1CFC9"/>
                 </a:solidFill>
                 <a:latin typeface="Helvetica Neue"/>
                 <a:ea typeface="Helvetica Neue"/>
@@ -12634,7 +12666,7 @@
           <p:cNvPr id="8" name="">
             <a:extLst xmlns:a="http://schemas.openxmlformats.org/drawingml/2006/main">
               <a:ext uri="{FF2B5EF4-FFF2-40B4-BE49-F238E27FC236}">
-                <a16:creationId xmlns:a16="http://schemas.microsoft.com/office/drawing/2014/main" id="{030337AF-670C-4EB8-8013-41947738EF89}"/>
+                <a16:creationId xmlns:a16="http://schemas.microsoft.com/office/drawing/2014/main" id="{5F515904-A34F-48FE-9570-B0C397F5CDB0}"/>
               </a:ext>
             </a:extLst>
           </p:cNvPr>
@@ -12691,7 +12723,7 @@
           <p:cNvPr id="9" name="">
             <a:extLst xmlns:a="http://schemas.openxmlformats.org/drawingml/2006/main">
               <a:ext uri="{FF2B5EF4-FFF2-40B4-BE49-F238E27FC236}">
-                <a16:creationId xmlns:a16="http://schemas.microsoft.com/office/drawing/2014/main" id="{1C405277-E7F0-4CFC-8928-391BF838C6C3}"/>
+                <a16:creationId xmlns:a16="http://schemas.microsoft.com/office/drawing/2014/main" id="{C3349CEE-584A-4BC0-9969-8517A4D50B1A}"/>
               </a:ext>
             </a:extLst>
           </p:cNvPr>
@@ -12722,7 +12754,7 @@
             <a:pPr algn="l">
               <a:defRPr sz="1950" b="1">
                 <a:solidFill>
-                  <a:srgbClr val="FFD43B"/>
+                  <a:srgbClr val="D1CFC9"/>
                 </a:solidFill>
                 <a:latin typeface="Helvetica Neue"/>
                 <a:ea typeface="Helvetica Neue"/>
@@ -12732,7 +12764,7 @@
             <a:r>
               <a:rPr sz="1950" b="1">
                 <a:solidFill>
-                  <a:srgbClr val="FFD43B"/>
+                  <a:srgbClr val="D1CFC9"/>
                 </a:solidFill>
                 <a:latin typeface="Helvetica Neue"/>
                 <a:ea typeface="Helvetica Neue"/>
@@ -12748,7 +12780,7 @@
           <p:cNvPr id="10" name="">
             <a:extLst xmlns:a="http://schemas.openxmlformats.org/drawingml/2006/main">
               <a:ext uri="{FF2B5EF4-FFF2-40B4-BE49-F238E27FC236}">
-                <a16:creationId xmlns:a16="http://schemas.microsoft.com/office/drawing/2014/main" id="{A8372956-449D-4F92-A1FA-619FF48EF629}"/>
+                <a16:creationId xmlns:a16="http://schemas.microsoft.com/office/drawing/2014/main" id="{8D18B10A-6CC4-4258-AAB2-4DF675E9A4FF}"/>
               </a:ext>
             </a:extLst>
           </p:cNvPr>
@@ -12805,7 +12837,7 @@
           <p:cNvPr id="11" name="">
             <a:extLst xmlns:a="http://schemas.openxmlformats.org/drawingml/2006/main">
               <a:ext uri="{FF2B5EF4-FFF2-40B4-BE49-F238E27FC236}">
-                <a16:creationId xmlns:a16="http://schemas.microsoft.com/office/drawing/2014/main" id="{EE8358BD-7D77-4DE9-9E5E-1EADA8D0DC5A}"/>
+                <a16:creationId xmlns:a16="http://schemas.microsoft.com/office/drawing/2014/main" id="{68DDCEB2-0AD7-4896-97E4-7A7032FE1DDD}"/>
               </a:ext>
             </a:extLst>
           </p:cNvPr>
@@ -12836,7 +12868,7 @@
             <a:pPr algn="l">
               <a:defRPr sz="1950" b="1">
                 <a:solidFill>
-                  <a:srgbClr val="FFD43B"/>
+                  <a:srgbClr val="D1CFC9"/>
                 </a:solidFill>
                 <a:latin typeface="Helvetica Neue"/>
                 <a:ea typeface="Helvetica Neue"/>
@@ -12846,7 +12878,7 @@
             <a:r>
               <a:rPr sz="1950" b="1">
                 <a:solidFill>
-                  <a:srgbClr val="FFD43B"/>
+                  <a:srgbClr val="D1CFC9"/>
                 </a:solidFill>
                 <a:latin typeface="Helvetica Neue"/>
                 <a:ea typeface="Helvetica Neue"/>
@@ -12862,7 +12894,7 @@
           <p:cNvPr id="12" name="">
             <a:extLst xmlns:a="http://schemas.openxmlformats.org/drawingml/2006/main">
               <a:ext uri="{FF2B5EF4-FFF2-40B4-BE49-F238E27FC236}">
-                <a16:creationId xmlns:a16="http://schemas.microsoft.com/office/drawing/2014/main" id="{E94BC68E-2364-460D-A1B3-B8E4BE8D2AD5}"/>
+                <a16:creationId xmlns:a16="http://schemas.microsoft.com/office/drawing/2014/main" id="{9BFBA4D9-1297-491E-941A-D3F4EC71F3C1}"/>
               </a:ext>
             </a:extLst>
           </p:cNvPr>
@@ -12919,7 +12951,7 @@
           <p:cNvPr id="13" name="">
             <a:extLst xmlns:a="http://schemas.openxmlformats.org/drawingml/2006/main">
               <a:ext uri="{FF2B5EF4-FFF2-40B4-BE49-F238E27FC236}">
-                <a16:creationId xmlns:a16="http://schemas.microsoft.com/office/drawing/2014/main" id="{80063B21-F558-4C19-A331-C192BB907D0E}"/>
+                <a16:creationId xmlns:a16="http://schemas.microsoft.com/office/drawing/2014/main" id="{2FE1E060-572E-4B39-BAA8-20B306A50B7D}"/>
               </a:ext>
             </a:extLst>
           </p:cNvPr>
@@ -12939,7 +12971,7 @@
             </a:avLst>
           </a:prstGeom>
           <a:solidFill xmlns:a="http://schemas.openxmlformats.org/drawingml/2006/main">
-            <a:srgbClr val="FFD43B"/>
+            <a:srgbClr val="D1CFC9"/>
           </a:solidFill>
           <a:ln xmlns:a="http://schemas.openxmlformats.org/drawingml/2006/main" w="0">
             <a:noFill/>
@@ -12951,7 +12983,7 @@
           <p:cNvPr id="14" name="">
             <a:extLst xmlns:a="http://schemas.openxmlformats.org/drawingml/2006/main">
               <a:ext uri="{FF2B5EF4-FFF2-40B4-BE49-F238E27FC236}">
-                <a16:creationId xmlns:a16="http://schemas.microsoft.com/office/drawing/2014/main" id="{EE6E9FED-00A4-4664-B458-9EC8BF569694}"/>
+                <a16:creationId xmlns:a16="http://schemas.microsoft.com/office/drawing/2014/main" id="{D38D49B4-83F5-438C-B309-74B0A1FC44B2}"/>
               </a:ext>
             </a:extLst>
           </p:cNvPr>
@@ -12982,7 +13014,7 @@
             <a:pPr algn="ctr">
               <a:defRPr sz="1050" b="1">
                 <a:solidFill>
-                  <a:srgbClr val="092454"/>
+                  <a:srgbClr val="1C2E4A"/>
                 </a:solidFill>
                 <a:latin typeface="Helvetica Neue"/>
                 <a:ea typeface="Helvetica Neue"/>
@@ -12992,7 +13024,7 @@
             <a:r>
               <a:rPr sz="1050" b="1">
                 <a:solidFill>
-                  <a:srgbClr val="092454"/>
+                  <a:srgbClr val="1C2E4A"/>
                 </a:solidFill>
                 <a:latin typeface="Helvetica Neue"/>
                 <a:ea typeface="Helvetica Neue"/>
@@ -13008,7 +13040,7 @@
           <p:cNvPr id="15" name="">
             <a:extLst xmlns:a="http://schemas.openxmlformats.org/drawingml/2006/main">
               <a:ext uri="{FF2B5EF4-FFF2-40B4-BE49-F238E27FC236}">
-                <a16:creationId xmlns:a16="http://schemas.microsoft.com/office/drawing/2014/main" id="{1AD1518D-F38E-4D89-8B52-87500E18F86E}"/>
+                <a16:creationId xmlns:a16="http://schemas.microsoft.com/office/drawing/2014/main" id="{EA19BE14-CC56-4F26-8937-89FF3EAB401C}"/>
               </a:ext>
             </a:extLst>
           </p:cNvPr>
@@ -13039,7 +13071,7 @@
             <a:pPr algn="ctr">
               <a:defRPr sz="2250" b="1">
                 <a:solidFill>
-                  <a:srgbClr val="092454"/>
+                  <a:srgbClr val="1C2E4A"/>
                 </a:solidFill>
                 <a:latin typeface="Helvetica Neue"/>
                 <a:ea typeface="Helvetica Neue"/>
@@ -13049,7 +13081,7 @@
             <a:r>
               <a:rPr sz="2250" b="1">
                 <a:solidFill>
-                  <a:srgbClr val="092454"/>
+                  <a:srgbClr val="1C2E4A"/>
                 </a:solidFill>
                 <a:latin typeface="Helvetica Neue"/>
                 <a:ea typeface="Helvetica Neue"/>
@@ -13062,7 +13094,7 @@
             <a:pPr algn="ctr">
               <a:defRPr sz="2250" b="1">
                 <a:solidFill>
-                  <a:srgbClr val="092454"/>
+                  <a:srgbClr val="1C2E4A"/>
                 </a:solidFill>
                 <a:latin typeface="Helvetica Neue"/>
                 <a:ea typeface="Helvetica Neue"/>
@@ -13072,7 +13104,7 @@
             <a:r>
               <a:rPr sz="2250" b="1">
                 <a:solidFill>
-                  <a:srgbClr val="092454"/>
+                  <a:srgbClr val="1C2E4A"/>
                 </a:solidFill>
                 <a:latin typeface="Helvetica Neue"/>
                 <a:ea typeface="Helvetica Neue"/>
@@ -13085,7 +13117,7 @@
             <a:pPr algn="ctr">
               <a:defRPr sz="2250" b="1">
                 <a:solidFill>
-                  <a:srgbClr val="092454"/>
+                  <a:srgbClr val="1C2E4A"/>
                 </a:solidFill>
                 <a:latin typeface="Helvetica Neue"/>
                 <a:ea typeface="Helvetica Neue"/>
@@ -13095,7 +13127,7 @@
             <a:r>
               <a:rPr sz="2250" b="1">
                 <a:solidFill>
-                  <a:srgbClr val="092454"/>
+                  <a:srgbClr val="1C2E4A"/>
                 </a:solidFill>
                 <a:latin typeface="Helvetica Neue"/>
                 <a:ea typeface="Helvetica Neue"/>
@@ -13111,7 +13143,7 @@
           <p:cNvPr id="16" name="">
             <a:extLst xmlns:a="http://schemas.openxmlformats.org/drawingml/2006/main">
               <a:ext uri="{FF2B5EF4-FFF2-40B4-BE49-F238E27FC236}">
-                <a16:creationId xmlns:a16="http://schemas.microsoft.com/office/drawing/2014/main" id="{4116DB10-199C-4C33-B3BC-B6529345A106}"/>
+                <a16:creationId xmlns:a16="http://schemas.microsoft.com/office/drawing/2014/main" id="{C75FD2B9-9767-4D53-BC16-A608E73CC8A0}"/>
               </a:ext>
             </a:extLst>
           </p:cNvPr>
@@ -13142,7 +13174,7 @@
             <a:pPr algn="ctr">
               <a:defRPr sz="1125" b="0">
                 <a:solidFill>
-                  <a:srgbClr val="092454"/>
+                  <a:srgbClr val="1C2E4A"/>
                 </a:solidFill>
                 <a:latin typeface="Helvetica Neue"/>
                 <a:ea typeface="Helvetica Neue"/>
@@ -13152,7 +13184,7 @@
             <a:r>
               <a:rPr sz="1125" b="0">
                 <a:solidFill>
-                  <a:srgbClr val="092454"/>
+                  <a:srgbClr val="1C2E4A"/>
                 </a:solidFill>
                 <a:latin typeface="Helvetica Neue"/>
                 <a:ea typeface="Helvetica Neue"/>
@@ -13168,7 +13200,7 @@
           <p:cNvPr id="17" name="">
             <a:extLst xmlns:a="http://schemas.openxmlformats.org/drawingml/2006/main">
               <a:ext uri="{FF2B5EF4-FFF2-40B4-BE49-F238E27FC236}">
-                <a16:creationId xmlns:a16="http://schemas.microsoft.com/office/drawing/2014/main" id="{3AC45DCE-B6BB-43E9-9ED9-285B24BFB9D1}"/>
+                <a16:creationId xmlns:a16="http://schemas.microsoft.com/office/drawing/2014/main" id="{601DCA44-06C9-47E7-ABF7-37E031F9A800}"/>
               </a:ext>
             </a:extLst>
           </p:cNvPr>
@@ -13186,7 +13218,7 @@
             <a:avLst/>
           </a:prstGeom>
           <a:solidFill xmlns:a="http://schemas.openxmlformats.org/drawingml/2006/main">
-            <a:srgbClr val="31507E"/>
+            <a:srgbClr val="52677D"/>
           </a:solidFill>
           <a:ln xmlns:a="http://schemas.openxmlformats.org/drawingml/2006/main" w="0">
             <a:noFill/>
@@ -13198,7 +13230,7 @@
           <p:cNvPr id="18" name="">
             <a:extLst xmlns:a="http://schemas.openxmlformats.org/drawingml/2006/main">
               <a:ext uri="{FF2B5EF4-FFF2-40B4-BE49-F238E27FC236}">
-                <a16:creationId xmlns:a16="http://schemas.microsoft.com/office/drawing/2014/main" id="{1B53552C-D535-4A10-8450-73704023A1AD}"/>
+                <a16:creationId xmlns:a16="http://schemas.microsoft.com/office/drawing/2014/main" id="{C0841AF4-487B-4EB2-95BC-426B356B31D0}"/>
               </a:ext>
             </a:extLst>
           </p:cNvPr>
@@ -13229,7 +13261,7 @@
             <a:pPr algn="l">
               <a:defRPr sz="750" b="0">
                 <a:solidFill>
-                  <a:srgbClr val="BFE6FF"/>
+                  <a:srgbClr val="BDC4D4"/>
                 </a:solidFill>
                 <a:latin typeface="Helvetica Neue"/>
                 <a:ea typeface="Helvetica Neue"/>
@@ -13239,7 +13271,7 @@
             <a:r>
               <a:rPr sz="750" b="0">
                 <a:solidFill>
-                  <a:srgbClr val="BFE6FF"/>
+                  <a:srgbClr val="BDC4D4"/>
                 </a:solidFill>
                 <a:latin typeface="Helvetica Neue"/>
                 <a:ea typeface="Helvetica Neue"/>
@@ -13255,7 +13287,7 @@
           <p:cNvPr id="19" name="">
             <a:extLst xmlns:a="http://schemas.openxmlformats.org/drawingml/2006/main">
               <a:ext uri="{FF2B5EF4-FFF2-40B4-BE49-F238E27FC236}">
-                <a16:creationId xmlns:a16="http://schemas.microsoft.com/office/drawing/2014/main" id="{B00F9E99-017B-4725-A668-BDE35C165D3A}"/>
+                <a16:creationId xmlns:a16="http://schemas.microsoft.com/office/drawing/2014/main" id="{C1EF38D2-A48B-4B17-B9AC-64F8F12F2486}"/>
               </a:ext>
             </a:extLst>
           </p:cNvPr>
@@ -13286,7 +13318,7 @@
             <a:pPr algn="r">
               <a:defRPr sz="825" b="1">
                 <a:solidFill>
-                  <a:srgbClr val="FFD43B"/>
+                  <a:srgbClr val="D1CFC9"/>
                 </a:solidFill>
                 <a:latin typeface="Helvetica Neue"/>
                 <a:ea typeface="Helvetica Neue"/>
@@ -13296,7 +13328,7 @@
             <a:r>
               <a:rPr sz="825" b="1">
                 <a:solidFill>
-                  <a:srgbClr val="FFD43B"/>
+                  <a:srgbClr val="D1CFC9"/>
                 </a:solidFill>
                 <a:latin typeface="Helvetica Neue"/>
                 <a:ea typeface="Helvetica Neue"/>
@@ -13310,7 +13342,7 @@
     </p:spTree>
     <p:extLst>
       <p:ext uri="{BB962C8B-B14F-4D97-AF65-F5344CB8AC3E}">
-        <p14:creationId xmlns:p14="http://schemas.microsoft.com/office/powerpoint/2010/main" val="161291181"/>
+        <p14:creationId xmlns:p14="http://schemas.microsoft.com/office/powerpoint/2010/main" val="213701306"/>
       </p:ext>
     </p:extLst>
   </p:cSld>
